--- a/docs/C08_Project_Status.pptx
+++ b/docs/C08_Project_Status.pptx
@@ -2,18 +2,18 @@
 <file path=ppt/presentation.xml><?xml version="1.0" encoding="utf-8"?>
 <p:presentation xmlns:p="http://schemas.openxmlformats.org/presentationml/2006/main">
   <p:sldMasterIdLst>
-    <p:sldMasterId xmlns:r="http://schemas.openxmlformats.org/officeDocument/2006/relationships" id="2147483648" r:id="R6ae576ccbde843de"/>
+    <p:sldMasterId xmlns:r="http://schemas.openxmlformats.org/officeDocument/2006/relationships" id="2147483648" r:id="R51d05c4242784013"/>
   </p:sldMasterIdLst>
   <p:notesMasterIdLst>
-    <p:notesMasterId xmlns:r="http://schemas.openxmlformats.org/officeDocument/2006/relationships" r:id="Re6c50629a58347ad"/>
+    <p:notesMasterId xmlns:r="http://schemas.openxmlformats.org/officeDocument/2006/relationships" r:id="Reef6d89c2008406d"/>
   </p:notesMasterIdLst>
   <p:sldIdLst>
-    <p:sldId xmlns:r="http://schemas.openxmlformats.org/officeDocument/2006/relationships" id="256" r:id="R9580b415c2f34d50"/>
-    <p:sldId xmlns:r="http://schemas.openxmlformats.org/officeDocument/2006/relationships" id="257" r:id="R3867612a1d064104"/>
-    <p:sldId xmlns:r="http://schemas.openxmlformats.org/officeDocument/2006/relationships" id="258" r:id="R6694a148260146ea"/>
-    <p:sldId xmlns:r="http://schemas.openxmlformats.org/officeDocument/2006/relationships" id="259" r:id="Re4a99e3e6432473a"/>
-    <p:sldId xmlns:r="http://schemas.openxmlformats.org/officeDocument/2006/relationships" id="260" r:id="R838b7ce8ecec4c2f"/>
-    <p:sldId xmlns:r="http://schemas.openxmlformats.org/officeDocument/2006/relationships" id="261" r:id="Rc20e4f4968cf439f"/>
+    <p:sldId xmlns:r="http://schemas.openxmlformats.org/officeDocument/2006/relationships" id="256" r:id="R0fe88bdbdc9a4c98"/>
+    <p:sldId xmlns:r="http://schemas.openxmlformats.org/officeDocument/2006/relationships" id="257" r:id="R1d93cd1b8b2046b5"/>
+    <p:sldId xmlns:r="http://schemas.openxmlformats.org/officeDocument/2006/relationships" id="258" r:id="Re3229866b5e94ee5"/>
+    <p:sldId xmlns:r="http://schemas.openxmlformats.org/officeDocument/2006/relationships" id="259" r:id="R0948da82fb954f05"/>
+    <p:sldId xmlns:r="http://schemas.openxmlformats.org/officeDocument/2006/relationships" id="260" r:id="R1103eef6b622493a"/>
+    <p:sldId xmlns:r="http://schemas.openxmlformats.org/officeDocument/2006/relationships" id="261" r:id="R8dd6077f57de439b"/>
   </p:sldIdLst>
   <p:sldSz cx="12192000" cy="6858000"/>
   <p:notesSz cx="6858000" cy="9144000"/>
@@ -374,7 +374,7 @@
               <a:buNone/>
             </a:pPr>
             <a:r>
-              <a:t>Reporting baseline: c08-report-2026-10-30. Kód vychází z f34f0ec0f31782ff1886e9b3c4020c2c39a3fe28 a od testů se nezměnil. 97 testů = 57 doménových/architektonických a 40 integračních. F1 je evidence gap. Zdroje: docs/evidence-and-evolution.md, docs/verification/2026-10-30/*.txt.</a:t>
+              <a:t>Reporting baseline: c08-report-2026-10-30-v4. Kód vychází z f34f0ec0f31782ff1886e9b3c4020c2c39a3fe28. Dne 30. 10. 2026 prošlo 57 doménových/architektonických a 40 integračních testů. Podmínky, počty, příkazy a výsledky příkladů jsou zapsané přímo v docs/evidence-and-evolution.md, část A. F1 zůstává ACCEPTED/OPEN.</a:t>
             </a:r>
             <a:endParaRPr sz="1800" b="0" u="none" strike="noStrike">
               <a:solidFill>
@@ -455,7 +455,7 @@
               <a:buNone/>
             </a:pPr>
             <a:r>
-              <a:t>Každá stavová buňka má odkaz na specifikaci, návrh, implementaci nebo report. C04: PARTLY znamená popsaný tlak Changeability v intent-and-change.md. NO v návrhu a implementaci se vztahuje na ucelený C04 scénář s kritériem a měřením. Izolované architektonické prvky tím nepopíráme. Zdroje: docs/specification-v0.2.md, docs/architecture-and-decisions.md, docs/c05_detailed_design.md, zdrojové třídy a reporty testů. Všechna YES platí pro uvedenou baseline a doložený rozsah testů, nikoli produkční autentizaci nebo doručení zpráv.</a:t>
+              <a:t>Zdroje stavů na slidu 2: OP-01/02/03/04/05 a BR-02/03 jsou v docs/specification-v0.2.md. ADR-001/002/005/007 jsou v docs/architecture-and-decisions.md. C05 je docs/c05_detailed_design.md. I1 až I4 označují metody createReservation, checkAvailability, confirmReservation, approveReservation a cancelReservation ve třídě ReservationService v src/src/main/java/cz/vsb/reservation/domain/service/ReservationService.java. T1: ReservationServiceTest, 24 testů. T2: ReservationLifecycleApiTest, 22 testů. T3: ApprovalWorkflowApiTest, 18 testů. T4: ReservationTest, 27 testů, a souběžné testy z T2/T3. Dalších 6 testů je ArchitectureTest. Testy jsou v src/src/test/java/cz/vsb/reservation. Souhrn úspěšných běhů, podmínky, konkrétní příklady a příkazy jsou přímo v docs/evidence-and-evolution.md, část A. DB ochrana je ve V1__init.sql, doménový model v Reservation.java. C04 pressure je v docs/intent-and-change.md. Všechny reference jsou běžný text bez klikacích odkazů.</a:t>
             </a:r>
             <a:endParaRPr sz="1800" b="0" u="none" strike="noStrike">
               <a:solidFill>
@@ -536,7 +536,7 @@
               <a:buNone/>
             </a:pPr>
             <a:r>
-              <a:t>Termíny 30. 10. jsou plány opatření z B, nejsou vydávány za skutečné dokončení. Nácvik je plánován na 2. 11. podle evidence-and-evolution.md. Kapacity ani termín obhajoby tým nesdělil. Chybějící plán vykazujeme jako otevřenou položku s koordinací do 2. 11.; nejde o historický splněný plán. CP2 datum není známo, proto neuvádíme odhad jeho splnění.</a:t>
+              <a:t>A a B jsou připravené dokumentační výstupy. Jediným otevřeným nálezem je C04/F1. Tým zatím nezná dostupný čas ani termín dokončení C04. Nejde o slib konkrétní osoby k doplnění plánu do určitého data. Zdroj: docs/evidence-and-evolution.md.</a:t>
             </a:r>
             <a:endParaRPr sz="1800" b="0" u="none" strike="noStrike">
               <a:solidFill>
@@ -617,7 +617,7 @@
               <a:buNone/>
             </a:pPr>
             <a:r>
-              <a:t>Použity R-03, R-01 a R-04 z úplného registru B. R-02 má počáteční LOW (2), očekávané LOW (1) a skutečné NOT VERIFIED. R-01 review 6. 11., R-03 review 2. 11. a po změně ochrany, R-04 před každým odevzdáním. Přijetí rizika neznamená ověřené opatření. Zdroj: docs/evidence-and-evolution.md, registr rizik. F1 je existující issue, samostatně od budoucích rizik.</a:t>
+              <a:t>Rizika R-03, R-01 a R-04 přebírají hodnoty a stavy z B. NOT VERIFIED u plánovaného opatření neznamená nový potvrzený problém aplikace. R-02 zůstává v úplném registru B. F1 je samostatný existující nález.</a:t>
             </a:r>
             <a:endParaRPr sz="1800" b="0" u="none" strike="noStrike">
               <a:solidFill>
@@ -698,7 +698,7 @@
               <a:buNone/>
             </a:pPr>
             <a:r>
-              <a:t>Definice hotovo jsou konkrétní kontrolovatelné výstupy. P1 a P2 jsou opatření již plánovaná na 30. 10., jejich dokončení není doloženo. Plánování C04 znamená přiřazení vlastníka a termínu, nikoli uzavření F1. Zdroj: docs/evidence-and-evolution.md, registr B a Stav a další kroky.</a:t>
+              <a:t>Kroky P1 až P4 popisují zbývající práci na C04. Termíny kroků a časová kapacita zatím nejsou stanovené. Dokument nepředstírá jejich potvrzení ani uzavření F1. Stav F1 zůstává ACCEPTED/OPEN.</a:t>
             </a:r>
             <a:endParaRPr sz="1800" b="0" u="none" strike="noStrike">
               <a:solidFill>
@@ -779,7 +779,7 @@
               <a:buNone/>
             </a:pPr>
             <a:r>
-              <a:t>Prognóza je podmíněná, protože chybí potvrzená kapacita a závazný termín uzavření C04. Skutečná autentizace, externí doručování notifikací a restartový test nejsou dokončené produkční schopnosti; jde o omezení deklarovaná v A. Zdroje: docs/evidence-and-evolution.md a docs/intent-and-change.md.</a:t>
+              <a:t>Jediný otevřený nález je C04/F1. Omezení prototypu, například simulovaná identita a logování oznámení, jsou deklarované hranice současného řešení, nikoli nově zjištěné defects. Zdroje: docs/evidence-and-evolution.md a docs/intent-and-change.md.</a:t>
             </a:r>
             <a:endParaRPr sz="1800" b="0" u="none" strike="noStrike">
               <a:solidFill>
@@ -865,7 +865,7 @@
           <p:cNvPr id="2" name="PlaceHolder 1">
             <a:extLst xmlns:a="http://schemas.openxmlformats.org/drawingml/2006/main">
               <a:ext uri="{FF2B5EF4-FFF2-40B4-BE49-F238E27FC236}">
-                <a16:creationId xmlns:a16="http://schemas.microsoft.com/office/drawing/2014/main" id="{E0FDCFF3-C8E4-4B88-B695-E952031FB95B}"/>
+                <a16:creationId xmlns:a16="http://schemas.microsoft.com/office/drawing/2014/main" id="{17C65F6D-6DC8-47FA-9CC5-F953715408A0}"/>
               </a:ext>
             </a:extLst>
           </p:cNvPr>
@@ -925,7 +925,7 @@
           <p:cNvPr id="3" name="PlaceHolder 2">
             <a:extLst xmlns:a="http://schemas.openxmlformats.org/drawingml/2006/main">
               <a:ext uri="{FF2B5EF4-FFF2-40B4-BE49-F238E27FC236}">
-                <a16:creationId xmlns:a16="http://schemas.microsoft.com/office/drawing/2014/main" id="{E750F65F-2625-4F06-86EF-4948A7439A63}"/>
+                <a16:creationId xmlns:a16="http://schemas.microsoft.com/office/drawing/2014/main" id="{72F0BBBD-0AE2-42BC-A89D-96414EC06F73}"/>
               </a:ext>
             </a:extLst>
           </p:cNvPr>
@@ -1201,8 +1201,8 @@
   </p:cSld>
   <p:clrMap bg1="lt1" tx1="dk1" bg2="lt2" tx2="dk2" accent1="accent1" accent2="accent2" accent3="accent3" accent4="accent4" accent5="accent5" accent6="accent6" hlink="hlink" folHlink="folHlink"/>
   <p:sldLayoutIdLst>
-    <p:sldLayoutId xmlns:r="http://schemas.openxmlformats.org/officeDocument/2006/relationships" id="2147483649" r:id="R8c90ab7c9df24024"/>
-    <p:sldLayoutId xmlns:r="http://schemas.openxmlformats.org/officeDocument/2006/relationships" id="2147483650" r:id="Rb6478b49ae554ed5"/>
+    <p:sldLayoutId xmlns:r="http://schemas.openxmlformats.org/officeDocument/2006/relationships" id="2147483649" r:id="R6af5f93966874524"/>
+    <p:sldLayoutId xmlns:r="http://schemas.openxmlformats.org/officeDocument/2006/relationships" id="2147483650" r:id="Rca097e021e5b4a47"/>
   </p:sldLayoutIdLst>
 </p:sldMaster>
 </file>
@@ -1393,7 +1393,7 @@
           <p:cNvPr id="8" name="Shape 0">
             <a:extLst xmlns:a="http://schemas.openxmlformats.org/drawingml/2006/main">
               <a:ext uri="{FF2B5EF4-FFF2-40B4-BE49-F238E27FC236}">
-                <a16:creationId xmlns:a16="http://schemas.microsoft.com/office/drawing/2014/main" id="{4691CBC8-9118-46B1-A416-5BD505085E3D}"/>
+                <a16:creationId xmlns:a16="http://schemas.microsoft.com/office/drawing/2014/main" id="{BF47CCCB-05BC-491B-8862-A8EBD2A9C4BD}"/>
               </a:ext>
             </a:extLst>
           </p:cNvPr>
@@ -1450,7 +1450,7 @@
           <p:cNvPr id="9" name="Text 1">
             <a:extLst xmlns:a="http://schemas.openxmlformats.org/drawingml/2006/main">
               <a:ext uri="{FF2B5EF4-FFF2-40B4-BE49-F238E27FC236}">
-                <a16:creationId xmlns:a16="http://schemas.microsoft.com/office/drawing/2014/main" id="{299D4857-8C96-41EE-92A7-B22208ED9AB2}"/>
+                <a16:creationId xmlns:a16="http://schemas.microsoft.com/office/drawing/2014/main" id="{E147BBDC-3E19-4F6D-A627-70DD3B1A00DF}"/>
               </a:ext>
             </a:extLst>
           </p:cNvPr>
@@ -1520,7 +1520,7 @@
           <p:cNvPr id="10" name="Text 2">
             <a:extLst xmlns:a="http://schemas.openxmlformats.org/drawingml/2006/main">
               <a:ext uri="{FF2B5EF4-FFF2-40B4-BE49-F238E27FC236}">
-                <a16:creationId xmlns:a16="http://schemas.microsoft.com/office/drawing/2014/main" id="{B84E49D6-1DF6-413D-B09E-9CC9919B7E63}"/>
+                <a16:creationId xmlns:a16="http://schemas.microsoft.com/office/drawing/2014/main" id="{A3A19958-D5AC-4C80-9B7E-9037EC18FA4E}"/>
               </a:ext>
             </a:extLst>
           </p:cNvPr>
@@ -1590,7 +1590,7 @@
           <p:cNvPr id="11" name="Text 3">
             <a:extLst xmlns:a="http://schemas.openxmlformats.org/drawingml/2006/main">
               <a:ext uri="{FF2B5EF4-FFF2-40B4-BE49-F238E27FC236}">
-                <a16:creationId xmlns:a16="http://schemas.microsoft.com/office/drawing/2014/main" id="{844C5695-2492-4D7E-BEB4-AE9FDCDFEC59}"/>
+                <a16:creationId xmlns:a16="http://schemas.microsoft.com/office/drawing/2014/main" id="{DBD8A00C-143B-4DCE-9C97-8EC578E9E492}"/>
               </a:ext>
             </a:extLst>
           </p:cNvPr>
@@ -1660,7 +1660,7 @@
           <p:cNvPr id="12" name="Text 4">
             <a:extLst xmlns:a="http://schemas.openxmlformats.org/drawingml/2006/main">
               <a:ext uri="{FF2B5EF4-FFF2-40B4-BE49-F238E27FC236}">
-                <a16:creationId xmlns:a16="http://schemas.microsoft.com/office/drawing/2014/main" id="{9A007222-4957-43FA-9B0B-AB9B5179A49B}"/>
+                <a16:creationId xmlns:a16="http://schemas.microsoft.com/office/drawing/2014/main" id="{238B82A7-A61C-4E1D-838C-E8D86194398D}"/>
               </a:ext>
             </a:extLst>
           </p:cNvPr>
@@ -1712,7 +1712,7 @@
                 <a:ea typeface="Arial"/>
                 <a:cs typeface="Arial"/>
               </a:rPr>
-              <a:t>Řešení funguje. Otevřená zůstává evidence C04 a část přípravy obhajoby.</a:t>
+              <a:t>Rezervační systém je ověřený. Otevřená zůstává pouze část C04.</a:t>
             </a:r>
             <a:endParaRPr sz="1210" b="0" u="none" strike="noStrike">
               <a:solidFill>
@@ -1730,7 +1730,7 @@
           <p:cNvPr id="13" name="Text 5">
             <a:extLst xmlns:a="http://schemas.openxmlformats.org/drawingml/2006/main">
               <a:ext uri="{FF2B5EF4-FFF2-40B4-BE49-F238E27FC236}">
-                <a16:creationId xmlns:a16="http://schemas.microsoft.com/office/drawing/2014/main" id="{741D2346-EF7C-4223-8E7D-BBB4B894EEF5}"/>
+                <a16:creationId xmlns:a16="http://schemas.microsoft.com/office/drawing/2014/main" id="{9470F915-5534-49BD-9DBB-F3D392883276}"/>
               </a:ext>
             </a:extLst>
           </p:cNvPr>
@@ -1805,7 +1805,7 @@
           <p:cNvPr id="14" name="Text 6">
             <a:extLst xmlns:a="http://schemas.openxmlformats.org/drawingml/2006/main">
               <a:ext uri="{FF2B5EF4-FFF2-40B4-BE49-F238E27FC236}">
-                <a16:creationId xmlns:a16="http://schemas.microsoft.com/office/drawing/2014/main" id="{E9099A33-2451-4CBC-B51F-FBC75FBF56BE}"/>
+                <a16:creationId xmlns:a16="http://schemas.microsoft.com/office/drawing/2014/main" id="{D8867E40-4952-4741-8E22-F61B011B936B}"/>
               </a:ext>
             </a:extLst>
           </p:cNvPr>
@@ -1862,7 +1862,7 @@
                 <a:ea typeface="Arial"/>
                 <a:cs typeface="Arial"/>
               </a:rPr>
-              <a:t>BASELINE: c08-report-2026-10-30</a:t>
+              <a:t>BASELINE: c08-report-2026-10-30-v4</a:t>
             </a:r>
             <a:endParaRPr sz="1040" b="0" u="none" strike="noStrike">
               <a:solidFill>
@@ -1880,7 +1880,7 @@
           <p:cNvPr id="15" name="Text 7">
             <a:extLst xmlns:a="http://schemas.openxmlformats.org/drawingml/2006/main">
               <a:ext uri="{FF2B5EF4-FFF2-40B4-BE49-F238E27FC236}">
-                <a16:creationId xmlns:a16="http://schemas.microsoft.com/office/drawing/2014/main" id="{A7874897-0436-44D1-8774-224F2CF3E767}"/>
+                <a16:creationId xmlns:a16="http://schemas.microsoft.com/office/drawing/2014/main" id="{0F1A27CE-97DB-4566-8284-F4A69EA53A87}"/>
               </a:ext>
             </a:extLst>
           </p:cNvPr>
@@ -1955,7 +1955,7 @@
           <p:cNvPr id="16" name="Shape 8">
             <a:extLst xmlns:a="http://schemas.openxmlformats.org/drawingml/2006/main">
               <a:ext uri="{FF2B5EF4-FFF2-40B4-BE49-F238E27FC236}">
-                <a16:creationId xmlns:a16="http://schemas.microsoft.com/office/drawing/2014/main" id="{A74E0359-BA64-476A-8A12-E2DE022935BB}"/>
+                <a16:creationId xmlns:a16="http://schemas.microsoft.com/office/drawing/2014/main" id="{CBEC095A-6D7D-40E3-8D0C-7AA65570832F}"/>
               </a:ext>
             </a:extLst>
           </p:cNvPr>
@@ -2007,7 +2007,7 @@
           <p:cNvPr id="17" name="Text 9">
             <a:extLst xmlns:a="http://schemas.openxmlformats.org/drawingml/2006/main">
               <a:ext uri="{FF2B5EF4-FFF2-40B4-BE49-F238E27FC236}">
-                <a16:creationId xmlns:a16="http://schemas.microsoft.com/office/drawing/2014/main" id="{B905900F-B5C6-4253-A664-9E0DAC650F2C}"/>
+                <a16:creationId xmlns:a16="http://schemas.microsoft.com/office/drawing/2014/main" id="{5FA37B2B-D3ED-4384-AC86-ACAB4A29C1D6}"/>
               </a:ext>
             </a:extLst>
           </p:cNvPr>
@@ -2059,7 +2059,7 @@
                 <a:ea typeface="Arial"/>
                 <a:cs typeface="Arial"/>
               </a:rPr>
-              <a:t>SWI C08   Baseline: c08-report-2026-10-30   Stav k 30. 10. 2026</a:t>
+              <a:t>SWI C08   Baseline: c08-report-2026-10-30-v4   Stav k 30. 10. 2026</a:t>
             </a:r>
             <a:endParaRPr sz="880" b="0" u="none" strike="noStrike">
               <a:solidFill>
@@ -2077,7 +2077,7 @@
           <p:cNvPr id="18" name="Text 10">
             <a:extLst xmlns:a="http://schemas.openxmlformats.org/drawingml/2006/main">
               <a:ext uri="{FF2B5EF4-FFF2-40B4-BE49-F238E27FC236}">
-                <a16:creationId xmlns:a16="http://schemas.microsoft.com/office/drawing/2014/main" id="{FCC0A44D-123A-40A1-88CC-3D4FF5C4B476}"/>
+                <a16:creationId xmlns:a16="http://schemas.microsoft.com/office/drawing/2014/main" id="{CBA2C6C3-8A5F-4651-935C-0C05931C90E9}"/>
               </a:ext>
             </a:extLst>
           </p:cNvPr>
@@ -2152,7 +2152,7 @@
           <p:cNvPr id="19" name="Text 11">
             <a:extLst xmlns:a="http://schemas.openxmlformats.org/drawingml/2006/main">
               <a:ext uri="{FF2B5EF4-FFF2-40B4-BE49-F238E27FC236}">
-                <a16:creationId xmlns:a16="http://schemas.microsoft.com/office/drawing/2014/main" id="{B776903A-C5FB-4DD5-9DC6-1EAEDE58AEF2}"/>
+                <a16:creationId xmlns:a16="http://schemas.microsoft.com/office/drawing/2014/main" id="{9387FD46-F981-4D8E-834D-5FE8115EBBEC}"/>
               </a:ext>
             </a:extLst>
           </p:cNvPr>
@@ -2257,7 +2257,7 @@
           <p:cNvPr id="20" name="Text 12">
             <a:extLst xmlns:a="http://schemas.openxmlformats.org/drawingml/2006/main">
               <a:ext uri="{FF2B5EF4-FFF2-40B4-BE49-F238E27FC236}">
-                <a16:creationId xmlns:a16="http://schemas.microsoft.com/office/drawing/2014/main" id="{07E27319-4956-4786-90B1-90EBE34F4126}"/>
+                <a16:creationId xmlns:a16="http://schemas.microsoft.com/office/drawing/2014/main" id="{69AC6A10-6314-44CE-92B3-C07D00449836}"/>
               </a:ext>
             </a:extLst>
           </p:cNvPr>
@@ -2332,7 +2332,7 @@
           <p:cNvPr id="21" name="Text 13">
             <a:extLst xmlns:a="http://schemas.openxmlformats.org/drawingml/2006/main">
               <a:ext uri="{FF2B5EF4-FFF2-40B4-BE49-F238E27FC236}">
-                <a16:creationId xmlns:a16="http://schemas.microsoft.com/office/drawing/2014/main" id="{5A334DD2-E3CC-4B0D-9672-1B089D6A98B4}"/>
+                <a16:creationId xmlns:a16="http://schemas.microsoft.com/office/drawing/2014/main" id="{1DC61ED2-FD7F-4526-BB55-340E23C9118E}"/>
               </a:ext>
             </a:extLst>
           </p:cNvPr>
@@ -2490,7 +2490,7 @@
                 <a:ea typeface="Arial"/>
                 <a:cs typeface="Arial"/>
               </a:rPr>
-              <a:t>C04 zůstává OPEN. Kapacity a termín obhajoby nejsou potvrzené.</a:t>
+              <a:t>Jediný otevřený nález: C04 / F1.</a:t>
             </a:r>
             <a:endParaRPr sz="1560" b="0" u="none" strike="noStrike">
               <a:solidFill>
@@ -2508,7 +2508,7 @@
           <p:cNvPr id="22" name="Text 14">
             <a:extLst xmlns:a="http://schemas.openxmlformats.org/drawingml/2006/main">
               <a:ext uri="{FF2B5EF4-FFF2-40B4-BE49-F238E27FC236}">
-                <a16:creationId xmlns:a16="http://schemas.microsoft.com/office/drawing/2014/main" id="{8CCEB7AA-2663-490A-B241-04680515D8CF}"/>
+                <a16:creationId xmlns:a16="http://schemas.microsoft.com/office/drawing/2014/main" id="{A016333F-B175-40C5-978D-C3D86511C44C}"/>
               </a:ext>
             </a:extLst>
           </p:cNvPr>
@@ -2583,7 +2583,7 @@
           <p:cNvPr id="23" name="Text 15">
             <a:extLst xmlns:a="http://schemas.openxmlformats.org/drawingml/2006/main">
               <a:ext uri="{FF2B5EF4-FFF2-40B4-BE49-F238E27FC236}">
-                <a16:creationId xmlns:a16="http://schemas.microsoft.com/office/drawing/2014/main" id="{5F7E9578-E54E-474E-9B72-0620B4BE3227}"/>
+                <a16:creationId xmlns:a16="http://schemas.microsoft.com/office/drawing/2014/main" id="{686C0CD4-31E2-48F2-AD43-BA252B94A610}"/>
               </a:ext>
             </a:extLst>
           </p:cNvPr>
@@ -2622,32 +2622,64 @@
           </a:bodyPr>
           <a:lstStyle xmlns:a="http://schemas.openxmlformats.org/drawingml/2006/main"/>
           <a:p xmlns:a="http://schemas.openxmlformats.org/drawingml/2006/main">
-            <a:r>
-              <a:rPr u="none">
+            <a:pPr defTabSz="914400">
+              <a:lnSpc>
+                <a:spcPct val="100000"/>
+              </a:lnSpc>
+              <a:buNone/>
+              <a:tabLst>
+                <a:tab pos="0" algn="l"/>
+              </a:tabLst>
+            </a:pPr>
+            <a:r>
+              <a:rPr sz="1460" b="0" u="none" strike="noStrike">
                 <a:solidFill>
                   <a:srgbClr val="26354B"/>
                 </a:solidFill>
-                <a:hlinkClick xmlns:r="http://schemas.openxmlformats.org/officeDocument/2006/relationships" r:id="Rd0da4f8943274e79"/>
+                <a:latin typeface="Arial"/>
+                <a:ea typeface="Arial"/>
+                <a:cs typeface="Arial"/>
               </a:rPr>
               <a:t>97 vybraných testů prošlo ve dvou bězích.</a:t>
             </a:r>
-            <a:br>
-              <a:rPr u="none">
+            <a:endParaRPr sz="1460" b="0" u="none" strike="noStrike">
+              <a:solidFill>
+                <a:srgbClr val="000000"/>
+              </a:solidFill>
+              <a:latin typeface="Arial"/>
+              <a:ea typeface="Arial"/>
+              <a:cs typeface="Arial"/>
+            </a:endParaRPr>
+          </a:p>
+          <a:p xmlns:a="http://schemas.openxmlformats.org/drawingml/2006/main">
+            <a:pPr defTabSz="914400">
+              <a:lnSpc>
+                <a:spcPct val="100000"/>
+              </a:lnSpc>
+              <a:buNone/>
+              <a:tabLst>
+                <a:tab pos="0" algn="l"/>
+              </a:tabLst>
+            </a:pPr>
+            <a:r>
+              <a:rPr sz="1460" b="0" u="none" strike="noStrike">
                 <a:solidFill>
                   <a:srgbClr val="26354B"/>
                 </a:solidFill>
-                <a:hlinkClick xmlns:r="http://schemas.openxmlformats.org/officeDocument/2006/relationships" r:id="Rd0da4f8943274e79"/>
-              </a:rPr>
-            </a:br>
-            <a:r>
-              <a:rPr u="none">
-                <a:solidFill>
-                  <a:srgbClr val="26354B"/>
-                </a:solidFill>
-                <a:hlinkClick xmlns:r="http://schemas.openxmlformats.org/officeDocument/2006/relationships" r:id="Rd0da4f8943274e79"/>
+                <a:latin typeface="Arial"/>
+                <a:ea typeface="Arial"/>
+                <a:cs typeface="Arial"/>
               </a:rPr>
               <a:t>Z toho 40 integračních proti PostgreSQL.</a:t>
             </a:r>
+            <a:endParaRPr sz="1460" b="0" u="none" strike="noStrike">
+              <a:solidFill>
+                <a:srgbClr val="000000"/>
+              </a:solidFill>
+              <a:latin typeface="Arial"/>
+              <a:ea typeface="Arial"/>
+              <a:cs typeface="Arial"/>
+            </a:endParaRPr>
           </a:p>
         </p:txBody>
       </p:sp>
@@ -2656,7 +2688,7 @@
           <p:cNvPr id="24" name="Text 16">
             <a:extLst xmlns:a="http://schemas.openxmlformats.org/drawingml/2006/main">
               <a:ext uri="{FF2B5EF4-FFF2-40B4-BE49-F238E27FC236}">
-                <a16:creationId xmlns:a16="http://schemas.microsoft.com/office/drawing/2014/main" id="{553651EE-108A-4AB7-9F32-F356B2AE6892}"/>
+                <a16:creationId xmlns:a16="http://schemas.microsoft.com/office/drawing/2014/main" id="{5C19C441-FB9A-4DCB-AC0D-700965885A5A}"/>
               </a:ext>
             </a:extLst>
           </p:cNvPr>
@@ -2731,7 +2763,7 @@
           <p:cNvPr id="25" name="Text 17">
             <a:extLst xmlns:a="http://schemas.openxmlformats.org/drawingml/2006/main">
               <a:ext uri="{FF2B5EF4-FFF2-40B4-BE49-F238E27FC236}">
-                <a16:creationId xmlns:a16="http://schemas.microsoft.com/office/drawing/2014/main" id="{3773B6DD-2FF6-426F-A7D4-70BBAF92FFCC}"/>
+                <a16:creationId xmlns:a16="http://schemas.microsoft.com/office/drawing/2014/main" id="{4030CDB3-C972-46DE-BDE2-2FF20EAE0728}"/>
               </a:ext>
             </a:extLst>
           </p:cNvPr>
@@ -2770,32 +2802,64 @@
           </a:bodyPr>
           <a:lstStyle xmlns:a="http://schemas.openxmlformats.org/drawingml/2006/main"/>
           <a:p xmlns:a="http://schemas.openxmlformats.org/drawingml/2006/main">
-            <a:r>
-              <a:rPr u="none">
+            <a:pPr defTabSz="914400">
+              <a:lnSpc>
+                <a:spcPct val="100000"/>
+              </a:lnSpc>
+              <a:buNone/>
+              <a:tabLst>
+                <a:tab pos="0" algn="l"/>
+              </a:tabLst>
+            </a:pPr>
+            <a:r>
+              <a:rPr sz="1460" b="0" u="none" strike="noStrike">
                 <a:solidFill>
                   <a:srgbClr val="26354B"/>
                 </a:solidFill>
-                <a:hlinkClick xmlns:r="http://schemas.openxmlformats.org/officeDocument/2006/relationships" r:id="Rad0aca5b975549e7"/>
+                <a:latin typeface="Arial"/>
+                <a:ea typeface="Arial"/>
+                <a:cs typeface="Arial"/>
               </a:rPr>
               <a:t>F1 ACCEPTED / OPEN</a:t>
             </a:r>
-            <a:br>
-              <a:rPr u="none">
+            <a:endParaRPr sz="1460" b="0" u="none" strike="noStrike">
+              <a:solidFill>
+                <a:srgbClr val="000000"/>
+              </a:solidFill>
+              <a:latin typeface="Arial"/>
+              <a:ea typeface="Arial"/>
+              <a:cs typeface="Arial"/>
+            </a:endParaRPr>
+          </a:p>
+          <a:p xmlns:a="http://schemas.openxmlformats.org/drawingml/2006/main">
+            <a:pPr defTabSz="914400">
+              <a:lnSpc>
+                <a:spcPct val="100000"/>
+              </a:lnSpc>
+              <a:buNone/>
+              <a:tabLst>
+                <a:tab pos="0" algn="l"/>
+              </a:tabLst>
+            </a:pPr>
+            <a:r>
+              <a:rPr sz="1460" b="0" u="none" strike="noStrike">
                 <a:solidFill>
                   <a:srgbClr val="26354B"/>
                 </a:solidFill>
-                <a:hlinkClick xmlns:r="http://schemas.openxmlformats.org/officeDocument/2006/relationships" r:id="Rad0aca5b975549e7"/>
-              </a:rPr>
-            </a:br>
-            <a:r>
-              <a:rPr u="none">
-                <a:solidFill>
-                  <a:srgbClr val="26354B"/>
-                </a:solidFill>
-                <a:hlinkClick xmlns:r="http://schemas.openxmlformats.org/officeDocument/2006/relationships" r:id="Rad0aca5b975549e7"/>
+                <a:latin typeface="Arial"/>
+                <a:ea typeface="Arial"/>
+                <a:cs typeface="Arial"/>
               </a:rPr>
               <a:t>Chybí úplný řetězec C04 od kritéria po rozhodnutí.</a:t>
             </a:r>
+            <a:endParaRPr sz="1460" b="0" u="none" strike="noStrike">
+              <a:solidFill>
+                <a:srgbClr val="000000"/>
+              </a:solidFill>
+              <a:latin typeface="Arial"/>
+              <a:ea typeface="Arial"/>
+              <a:cs typeface="Arial"/>
+            </a:endParaRPr>
           </a:p>
         </p:txBody>
       </p:sp>
@@ -2804,7 +2868,7 @@
           <p:cNvPr id="26" name="Text 18">
             <a:extLst xmlns:a="http://schemas.openxmlformats.org/drawingml/2006/main">
               <a:ext uri="{FF2B5EF4-FFF2-40B4-BE49-F238E27FC236}">
-                <a16:creationId xmlns:a16="http://schemas.microsoft.com/office/drawing/2014/main" id="{77938046-30C4-4920-8157-AB3BA63D04E8}"/>
+                <a16:creationId xmlns:a16="http://schemas.microsoft.com/office/drawing/2014/main" id="{6A3CF015-C22E-4304-8AE1-4519429F7DCE}"/>
               </a:ext>
             </a:extLst>
           </p:cNvPr>
@@ -2879,7 +2943,7 @@
           <p:cNvPr id="27" name="Text 19">
             <a:extLst xmlns:a="http://schemas.openxmlformats.org/drawingml/2006/main">
               <a:ext uri="{FF2B5EF4-FFF2-40B4-BE49-F238E27FC236}">
-                <a16:creationId xmlns:a16="http://schemas.microsoft.com/office/drawing/2014/main" id="{8D58E8AE-340F-4C9A-93E2-72838D71A624}"/>
+                <a16:creationId xmlns:a16="http://schemas.microsoft.com/office/drawing/2014/main" id="{1042A7E6-A3AB-4A3D-87CF-FB6A23070F66}"/>
               </a:ext>
             </a:extLst>
           </p:cNvPr>
@@ -2936,7 +3000,7 @@
                 <a:ea typeface="Arial"/>
                 <a:cs typeface="Arial"/>
               </a:rPr>
-              <a:t>A a registr B jsou připravené. Dokončení obhajoby závisí na C04 a potvrzení zbývajícího plánu.</a:t>
+              <a:t>Části A a B jsou zpracované. Funkční ověření prošlo. Zbývá doplnit C04.</a:t>
             </a:r>
             <a:endParaRPr sz="1530" b="0" u="none" strike="noStrike">
               <a:solidFill>
@@ -2954,7 +3018,7 @@
           <p:cNvPr id="28" name="Text 20">
             <a:extLst xmlns:a="http://schemas.openxmlformats.org/drawingml/2006/main">
               <a:ext uri="{FF2B5EF4-FFF2-40B4-BE49-F238E27FC236}">
-                <a16:creationId xmlns:a16="http://schemas.microsoft.com/office/drawing/2014/main" id="{9110B3ED-51F5-413A-8220-320CC3509097}"/>
+                <a16:creationId xmlns:a16="http://schemas.microsoft.com/office/drawing/2014/main" id="{E8CF079C-C7FE-4983-AA29-37FB55A48F11}"/>
               </a:ext>
             </a:extLst>
           </p:cNvPr>
@@ -3029,7 +3093,7 @@
           <p:cNvPr id="29" name="Text 21">
             <a:extLst xmlns:a="http://schemas.openxmlformats.org/drawingml/2006/main">
               <a:ext uri="{FF2B5EF4-FFF2-40B4-BE49-F238E27FC236}">
-                <a16:creationId xmlns:a16="http://schemas.microsoft.com/office/drawing/2014/main" id="{DDAC6540-C877-444E-8986-AE864877DA64}"/>
+                <a16:creationId xmlns:a16="http://schemas.microsoft.com/office/drawing/2014/main" id="{0B14C46C-3788-438C-9CC2-82E577C9B2AA}"/>
               </a:ext>
             </a:extLst>
           </p:cNvPr>
@@ -3086,7 +3150,7 @@
                 <a:ea typeface="Arial"/>
                 <a:cs typeface="Arial"/>
               </a:rPr>
-              <a:t>Potvrdit kapacity, termín obhajoby a odpovědnost za C04.</a:t>
+              <a:t>Doplnit C04 a doložit uzavření F1.</a:t>
             </a:r>
             <a:endParaRPr sz="1260" b="0" u="none" strike="noStrike">
               <a:solidFill>
@@ -3116,7 +3180,7 @@
                 <a:ea typeface="Arial"/>
                 <a:cs typeface="Arial"/>
               </a:rPr>
-              <a:t>Koordinace: Kryštof Lalošák, do 2. 11. 2026.</a:t>
+              <a:t>Postup a termín dokončení jsou součástí plánu C04.</a:t>
             </a:r>
             <a:endParaRPr sz="1260" b="0" u="none" strike="noStrike">
               <a:solidFill>
@@ -3132,7 +3196,7 @@
     </p:spTree>
     <p:extLst>
       <p:ext uri="{BB962C8B-B14F-4D97-AF65-F5344CB8AC3E}">
-        <p14:creationId xmlns:p14="http://schemas.microsoft.com/office/powerpoint/2010/main" val="1181092443"/>
+        <p14:creationId xmlns:p14="http://schemas.microsoft.com/office/powerpoint/2010/main" val="1337584478"/>
       </p:ext>
     </p:extLst>
   </p:cSld>
@@ -3156,7 +3220,7 @@
           <p:cNvPr id="30" name="Shape 0">
             <a:extLst xmlns:a="http://schemas.openxmlformats.org/drawingml/2006/main">
               <a:ext uri="{FF2B5EF4-FFF2-40B4-BE49-F238E27FC236}">
-                <a16:creationId xmlns:a16="http://schemas.microsoft.com/office/drawing/2014/main" id="{DC54A2B5-E958-4A88-BB96-D8666EF7FC9F}"/>
+                <a16:creationId xmlns:a16="http://schemas.microsoft.com/office/drawing/2014/main" id="{09DAC514-CF17-4A4D-B633-5F3B026E60A8}"/>
               </a:ext>
             </a:extLst>
           </p:cNvPr>
@@ -3213,7 +3277,7 @@
           <p:cNvPr id="31" name="Text 1">
             <a:extLst xmlns:a="http://schemas.openxmlformats.org/drawingml/2006/main">
               <a:ext uri="{FF2B5EF4-FFF2-40B4-BE49-F238E27FC236}">
-                <a16:creationId xmlns:a16="http://schemas.microsoft.com/office/drawing/2014/main" id="{2449D9D7-747C-47B3-BDA5-74BC68B0C1C0}"/>
+                <a16:creationId xmlns:a16="http://schemas.microsoft.com/office/drawing/2014/main" id="{A6BDBA18-004C-4BB8-9B69-23370DA7E15B}"/>
               </a:ext>
             </a:extLst>
           </p:cNvPr>
@@ -3283,7 +3347,7 @@
           <p:cNvPr id="32" name="Text 2">
             <a:extLst xmlns:a="http://schemas.openxmlformats.org/drawingml/2006/main">
               <a:ext uri="{FF2B5EF4-FFF2-40B4-BE49-F238E27FC236}">
-                <a16:creationId xmlns:a16="http://schemas.microsoft.com/office/drawing/2014/main" id="{26B7944E-E9C5-46E9-98AD-3BC7EE969D7D}"/>
+                <a16:creationId xmlns:a16="http://schemas.microsoft.com/office/drawing/2014/main" id="{A8062B74-6568-4D07-8979-AF2D15176E64}"/>
               </a:ext>
             </a:extLst>
           </p:cNvPr>
@@ -3353,7 +3417,7 @@
           <p:cNvPr id="33" name="Text 3">
             <a:extLst xmlns:a="http://schemas.openxmlformats.org/drawingml/2006/main">
               <a:ext uri="{FF2B5EF4-FFF2-40B4-BE49-F238E27FC236}">
-                <a16:creationId xmlns:a16="http://schemas.microsoft.com/office/drawing/2014/main" id="{63F80F0D-0B3A-48FD-97A3-7DAA09C22F61}"/>
+                <a16:creationId xmlns:a16="http://schemas.microsoft.com/office/drawing/2014/main" id="{BE6D8BAA-3143-4AEA-878D-9209A50E422E}"/>
               </a:ext>
             </a:extLst>
           </p:cNvPr>
@@ -3423,7 +3487,7 @@
           <p:cNvPr id="34" name="Text 4">
             <a:extLst xmlns:a="http://schemas.openxmlformats.org/drawingml/2006/main">
               <a:ext uri="{FF2B5EF4-FFF2-40B4-BE49-F238E27FC236}">
-                <a16:creationId xmlns:a16="http://schemas.microsoft.com/office/drawing/2014/main" id="{56824260-E4CA-45BA-92C0-202C6B957A4A}"/>
+                <a16:creationId xmlns:a16="http://schemas.microsoft.com/office/drawing/2014/main" id="{39B83814-EAE3-422C-AC27-FEDBC2ADE8C5}"/>
               </a:ext>
             </a:extLst>
           </p:cNvPr>
@@ -3475,7 +3539,7 @@
                 <a:ea typeface="Arial"/>
                 <a:cs typeface="Arial"/>
               </a:rPr>
-              <a:t>YES = doložené. PARTLY = částečné. NO = chybí. Odkazy jsou v příslušných buňkách.</a:t>
+              <a:t>YES = doložené. PARTLY = částečné. NO = chybí. I = metoda, T = testovací sada.</a:t>
             </a:r>
             <a:endParaRPr sz="1210" b="0" u="none" strike="noStrike">
               <a:solidFill>
@@ -3493,7 +3557,7 @@
           <p:cNvPr id="35" name="Text 5">
             <a:extLst xmlns:a="http://schemas.openxmlformats.org/drawingml/2006/main">
               <a:ext uri="{FF2B5EF4-FFF2-40B4-BE49-F238E27FC236}">
-                <a16:creationId xmlns:a16="http://schemas.microsoft.com/office/drawing/2014/main" id="{9D20FF90-C3B6-4D89-8C97-556A1BCEBE5F}"/>
+                <a16:creationId xmlns:a16="http://schemas.microsoft.com/office/drawing/2014/main" id="{C4872A95-88FD-423A-81D6-61F39E756F8C}"/>
               </a:ext>
             </a:extLst>
           </p:cNvPr>
@@ -3568,7 +3632,7 @@
           <p:cNvPr id="36" name="Text 6">
             <a:extLst xmlns:a="http://schemas.openxmlformats.org/drawingml/2006/main">
               <a:ext uri="{FF2B5EF4-FFF2-40B4-BE49-F238E27FC236}">
-                <a16:creationId xmlns:a16="http://schemas.microsoft.com/office/drawing/2014/main" id="{189B9577-396C-45AA-8ED8-81B256F3FCD8}"/>
+                <a16:creationId xmlns:a16="http://schemas.microsoft.com/office/drawing/2014/main" id="{EBBDCE01-E931-4301-A482-BF2FE1748C6F}"/>
               </a:ext>
             </a:extLst>
           </p:cNvPr>
@@ -3625,7 +3689,7 @@
                 <a:ea typeface="Arial"/>
                 <a:cs typeface="Arial"/>
               </a:rPr>
-              <a:t>BASELINE: c08-report-2026-10-30</a:t>
+              <a:t>BASELINE: c08-report-2026-10-30-v4</a:t>
             </a:r>
             <a:endParaRPr sz="1040" b="0" u="none" strike="noStrike">
               <a:solidFill>
@@ -3643,7 +3707,7 @@
           <p:cNvPr id="37" name="Text 7">
             <a:extLst xmlns:a="http://schemas.openxmlformats.org/drawingml/2006/main">
               <a:ext uri="{FF2B5EF4-FFF2-40B4-BE49-F238E27FC236}">
-                <a16:creationId xmlns:a16="http://schemas.microsoft.com/office/drawing/2014/main" id="{36F4418C-06E5-4597-8E0E-12658DC6674A}"/>
+                <a16:creationId xmlns:a16="http://schemas.microsoft.com/office/drawing/2014/main" id="{DE9540BE-E4F0-41ED-A231-8FEFC85F98DE}"/>
               </a:ext>
             </a:extLst>
           </p:cNvPr>
@@ -3718,7 +3782,7 @@
           <p:cNvPr id="38" name="Shape 8">
             <a:extLst xmlns:a="http://schemas.openxmlformats.org/drawingml/2006/main">
               <a:ext uri="{FF2B5EF4-FFF2-40B4-BE49-F238E27FC236}">
-                <a16:creationId xmlns:a16="http://schemas.microsoft.com/office/drawing/2014/main" id="{1FC622D7-3EEE-4BB4-9B7A-1F139D38AD16}"/>
+                <a16:creationId xmlns:a16="http://schemas.microsoft.com/office/drawing/2014/main" id="{BCA42291-E768-413D-8758-3F8562795ACD}"/>
               </a:ext>
             </a:extLst>
           </p:cNvPr>
@@ -3770,7 +3834,7 @@
           <p:cNvPr id="39" name="Text 9">
             <a:extLst xmlns:a="http://schemas.openxmlformats.org/drawingml/2006/main">
               <a:ext uri="{FF2B5EF4-FFF2-40B4-BE49-F238E27FC236}">
-                <a16:creationId xmlns:a16="http://schemas.microsoft.com/office/drawing/2014/main" id="{4372931A-802A-4CDE-8027-516B3D503E26}"/>
+                <a16:creationId xmlns:a16="http://schemas.microsoft.com/office/drawing/2014/main" id="{D3A19D34-1334-47C9-8B27-1A930E30C74C}"/>
               </a:ext>
             </a:extLst>
           </p:cNvPr>
@@ -3822,7 +3886,7 @@
                 <a:ea typeface="Arial"/>
                 <a:cs typeface="Arial"/>
               </a:rPr>
-              <a:t>SWI C08   Baseline: c08-report-2026-10-30   Stav k 30. 10. 2026</a:t>
+              <a:t>SWI C08   Baseline: c08-report-2026-10-30-v4   Stav k 30. 10. 2026</a:t>
             </a:r>
             <a:endParaRPr sz="880" b="0" u="none" strike="noStrike">
               <a:solidFill>
@@ -3840,7 +3904,7 @@
           <p:cNvPr id="40" name="Text 10">
             <a:extLst xmlns:a="http://schemas.openxmlformats.org/drawingml/2006/main">
               <a:ext uri="{FF2B5EF4-FFF2-40B4-BE49-F238E27FC236}">
-                <a16:creationId xmlns:a16="http://schemas.microsoft.com/office/drawing/2014/main" id="{6416C38D-BA36-437D-9283-10B98291C075}"/>
+                <a16:creationId xmlns:a16="http://schemas.microsoft.com/office/drawing/2014/main" id="{E5EDB0C0-E98D-470B-83CC-F87AD250CD6C}"/>
               </a:ext>
             </a:extLst>
           </p:cNvPr>
@@ -3915,7 +3979,7 @@
           <p:cNvPr id="41" name="Text 11">
             <a:extLst xmlns:a="http://schemas.openxmlformats.org/drawingml/2006/main">
               <a:ext uri="{FF2B5EF4-FFF2-40B4-BE49-F238E27FC236}">
-                <a16:creationId xmlns:a16="http://schemas.microsoft.com/office/drawing/2014/main" id="{9A68E39F-3912-4B06-9A56-17F2B8B7C3F2}"/>
+                <a16:creationId xmlns:a16="http://schemas.microsoft.com/office/drawing/2014/main" id="{2130F7EE-EED6-4794-9E6A-458A460DA5D4}"/>
               </a:ext>
             </a:extLst>
           </p:cNvPr>
@@ -3990,7 +4054,7 @@
           <p:cNvPr id="42" name="Text 12">
             <a:extLst xmlns:a="http://schemas.openxmlformats.org/drawingml/2006/main">
               <a:ext uri="{FF2B5EF4-FFF2-40B4-BE49-F238E27FC236}">
-                <a16:creationId xmlns:a16="http://schemas.microsoft.com/office/drawing/2014/main" id="{EAE4BC19-2499-44B9-96E2-03D714726F3E}"/>
+                <a16:creationId xmlns:a16="http://schemas.microsoft.com/office/drawing/2014/main" id="{E168CD85-C75D-40FF-B49C-30144F67E183}"/>
               </a:ext>
             </a:extLst>
           </p:cNvPr>
@@ -4065,7 +4129,7 @@
           <p:cNvPr id="43" name="Text 13">
             <a:extLst xmlns:a="http://schemas.openxmlformats.org/drawingml/2006/main">
               <a:ext uri="{FF2B5EF4-FFF2-40B4-BE49-F238E27FC236}">
-                <a16:creationId xmlns:a16="http://schemas.microsoft.com/office/drawing/2014/main" id="{85083D5B-51BD-4DED-B5E0-05F67B77F6CF}"/>
+                <a16:creationId xmlns:a16="http://schemas.microsoft.com/office/drawing/2014/main" id="{88AEF1BB-2B3F-4927-BCA9-310DCC9DC6CC}"/>
               </a:ext>
             </a:extLst>
           </p:cNvPr>
@@ -4140,7 +4204,7 @@
           <p:cNvPr id="44" name="Text 14">
             <a:extLst xmlns:a="http://schemas.openxmlformats.org/drawingml/2006/main">
               <a:ext uri="{FF2B5EF4-FFF2-40B4-BE49-F238E27FC236}">
-                <a16:creationId xmlns:a16="http://schemas.microsoft.com/office/drawing/2014/main" id="{99CAC771-812C-48A2-ABD1-09EBBBC65761}"/>
+                <a16:creationId xmlns:a16="http://schemas.microsoft.com/office/drawing/2014/main" id="{41CE195E-0636-4D8F-AF27-D3EDCD620CD6}"/>
               </a:ext>
             </a:extLst>
           </p:cNvPr>
@@ -4215,7 +4279,7 @@
           <p:cNvPr id="45" name="Text 15">
             <a:extLst xmlns:a="http://schemas.openxmlformats.org/drawingml/2006/main">
               <a:ext uri="{FF2B5EF4-FFF2-40B4-BE49-F238E27FC236}">
-                <a16:creationId xmlns:a16="http://schemas.microsoft.com/office/drawing/2014/main" id="{1B187ED2-DB46-4698-8370-C1DA6DF426D3}"/>
+                <a16:creationId xmlns:a16="http://schemas.microsoft.com/office/drawing/2014/main" id="{4F2E2462-2DAA-4A07-8D48-716D042AFFF1}"/>
               </a:ext>
             </a:extLst>
           </p:cNvPr>
@@ -4290,7 +4354,7 @@
           <p:cNvPr id="46" name="Text 16">
             <a:extLst xmlns:a="http://schemas.openxmlformats.org/drawingml/2006/main">
               <a:ext uri="{FF2B5EF4-FFF2-40B4-BE49-F238E27FC236}">
-                <a16:creationId xmlns:a16="http://schemas.microsoft.com/office/drawing/2014/main" id="{9F670D07-D34C-447D-B503-866D36FCE3DF}"/>
+                <a16:creationId xmlns:a16="http://schemas.microsoft.com/office/drawing/2014/main" id="{EC9B8E17-C06D-4FAA-8293-07E1D3D4221D}"/>
               </a:ext>
             </a:extLst>
           </p:cNvPr>
@@ -4365,7 +4429,7 @@
           <p:cNvPr id="47" name="Text 17">
             <a:extLst xmlns:a="http://schemas.openxmlformats.org/drawingml/2006/main">
               <a:ext uri="{FF2B5EF4-FFF2-40B4-BE49-F238E27FC236}">
-                <a16:creationId xmlns:a16="http://schemas.microsoft.com/office/drawing/2014/main" id="{9E19DB0C-2DD4-481B-B0DE-A62F7E2F1DFC}"/>
+                <a16:creationId xmlns:a16="http://schemas.microsoft.com/office/drawing/2014/main" id="{56366134-4C30-4B9E-82D1-57197EAFB401}"/>
               </a:ext>
             </a:extLst>
           </p:cNvPr>
@@ -4404,12 +4468,64 @@
           </a:bodyPr>
           <a:lstStyle xmlns:a="http://schemas.openxmlformats.org/drawingml/2006/main"/>
           <a:p xmlns:a="http://schemas.openxmlformats.org/drawingml/2006/main">
-            <a:r>
-              <a:rPr>
-                <a:hlinkClick xmlns:r="http://schemas.openxmlformats.org/officeDocument/2006/relationships" r:id="Rba9a7d006b6e4617"/>
+            <a:pPr defTabSz="914400">
+              <a:lnSpc>
+                <a:spcPct val="100000"/>
+              </a:lnSpc>
+              <a:buNone/>
+              <a:tabLst>
+                <a:tab pos="0" algn="l"/>
+              </a:tabLst>
+            </a:pPr>
+            <a:r>
+              <a:rPr sz="1190" b="0" u="none" strike="noStrike">
+                <a:solidFill>
+                  <a:srgbClr val="26354B"/>
+                </a:solidFill>
+                <a:latin typeface="Arial"/>
+                <a:ea typeface="Arial"/>
+                <a:cs typeface="Arial"/>
               </a:rPr>
               <a:t>YES</a:t>
             </a:r>
+            <a:endParaRPr sz="1190" b="0" u="none" strike="noStrike">
+              <a:solidFill>
+                <a:srgbClr val="000000"/>
+              </a:solidFill>
+              <a:latin typeface="Arial"/>
+              <a:ea typeface="Arial"/>
+              <a:cs typeface="Arial"/>
+            </a:endParaRPr>
+          </a:p>
+          <a:p xmlns:a="http://schemas.openxmlformats.org/drawingml/2006/main">
+            <a:pPr defTabSz="914400">
+              <a:lnSpc>
+                <a:spcPct val="100000"/>
+              </a:lnSpc>
+              <a:buNone/>
+              <a:tabLst>
+                <a:tab pos="0" algn="l"/>
+              </a:tabLst>
+            </a:pPr>
+            <a:r>
+              <a:rPr sz="1190" b="0" u="none" strike="noStrike">
+                <a:solidFill>
+                  <a:srgbClr val="26354B"/>
+                </a:solidFill>
+                <a:latin typeface="Arial"/>
+                <a:ea typeface="Arial"/>
+                <a:cs typeface="Arial"/>
+              </a:rPr>
+              <a:t>OP-01</a:t>
+            </a:r>
+            <a:endParaRPr sz="1190" b="0" u="none" strike="noStrike">
+              <a:solidFill>
+                <a:srgbClr val="000000"/>
+              </a:solidFill>
+              <a:latin typeface="Arial"/>
+              <a:ea typeface="Arial"/>
+              <a:cs typeface="Arial"/>
+            </a:endParaRPr>
           </a:p>
         </p:txBody>
       </p:sp>
@@ -4418,7 +4534,7 @@
           <p:cNvPr id="48" name="Text 18">
             <a:extLst xmlns:a="http://schemas.openxmlformats.org/drawingml/2006/main">
               <a:ext uri="{FF2B5EF4-FFF2-40B4-BE49-F238E27FC236}">
-                <a16:creationId xmlns:a16="http://schemas.microsoft.com/office/drawing/2014/main" id="{C16FBB1B-221D-4A7F-BD74-00BA3C310FCD}"/>
+                <a16:creationId xmlns:a16="http://schemas.microsoft.com/office/drawing/2014/main" id="{B8EB562E-7A70-4C2F-BDA0-FC7083DDB263}"/>
               </a:ext>
             </a:extLst>
           </p:cNvPr>
@@ -4457,12 +4573,64 @@
           </a:bodyPr>
           <a:lstStyle xmlns:a="http://schemas.openxmlformats.org/drawingml/2006/main"/>
           <a:p xmlns:a="http://schemas.openxmlformats.org/drawingml/2006/main">
-            <a:r>
-              <a:rPr>
-                <a:hlinkClick xmlns:r="http://schemas.openxmlformats.org/officeDocument/2006/relationships" r:id="R09660c58b5fe43a6"/>
+            <a:pPr defTabSz="914400">
+              <a:lnSpc>
+                <a:spcPct val="100000"/>
+              </a:lnSpc>
+              <a:buNone/>
+              <a:tabLst>
+                <a:tab pos="0" algn="l"/>
+              </a:tabLst>
+            </a:pPr>
+            <a:r>
+              <a:rPr sz="1190" b="0" u="none" strike="noStrike">
+                <a:solidFill>
+                  <a:srgbClr val="26354B"/>
+                </a:solidFill>
+                <a:latin typeface="Arial"/>
+                <a:ea typeface="Arial"/>
+                <a:cs typeface="Arial"/>
               </a:rPr>
               <a:t>YES</a:t>
             </a:r>
+            <a:endParaRPr sz="1190" b="0" u="none" strike="noStrike">
+              <a:solidFill>
+                <a:srgbClr val="000000"/>
+              </a:solidFill>
+              <a:latin typeface="Arial"/>
+              <a:ea typeface="Arial"/>
+              <a:cs typeface="Arial"/>
+            </a:endParaRPr>
+          </a:p>
+          <a:p xmlns:a="http://schemas.openxmlformats.org/drawingml/2006/main">
+            <a:pPr defTabSz="914400">
+              <a:lnSpc>
+                <a:spcPct val="100000"/>
+              </a:lnSpc>
+              <a:buNone/>
+              <a:tabLst>
+                <a:tab pos="0" algn="l"/>
+              </a:tabLst>
+            </a:pPr>
+            <a:r>
+              <a:rPr sz="1190" b="0" u="none" strike="noStrike">
+                <a:solidFill>
+                  <a:srgbClr val="26354B"/>
+                </a:solidFill>
+                <a:latin typeface="Arial"/>
+                <a:ea typeface="Arial"/>
+                <a:cs typeface="Arial"/>
+              </a:rPr>
+              <a:t>ADR-001</a:t>
+            </a:r>
+            <a:endParaRPr sz="1190" b="0" u="none" strike="noStrike">
+              <a:solidFill>
+                <a:srgbClr val="000000"/>
+              </a:solidFill>
+              <a:latin typeface="Arial"/>
+              <a:ea typeface="Arial"/>
+              <a:cs typeface="Arial"/>
+            </a:endParaRPr>
           </a:p>
         </p:txBody>
       </p:sp>
@@ -4471,7 +4639,7 @@
           <p:cNvPr id="49" name="Text 19">
             <a:extLst xmlns:a="http://schemas.openxmlformats.org/drawingml/2006/main">
               <a:ext uri="{FF2B5EF4-FFF2-40B4-BE49-F238E27FC236}">
-                <a16:creationId xmlns:a16="http://schemas.microsoft.com/office/drawing/2014/main" id="{6DBE52B5-6BCC-4328-81A6-D1605934C681}"/>
+                <a16:creationId xmlns:a16="http://schemas.microsoft.com/office/drawing/2014/main" id="{A6E6477E-5100-4683-AA70-7BE888A447C4}"/>
               </a:ext>
             </a:extLst>
           </p:cNvPr>
@@ -4510,12 +4678,64 @@
           </a:bodyPr>
           <a:lstStyle xmlns:a="http://schemas.openxmlformats.org/drawingml/2006/main"/>
           <a:p xmlns:a="http://schemas.openxmlformats.org/drawingml/2006/main">
-            <a:r>
-              <a:rPr>
-                <a:hlinkClick xmlns:r="http://schemas.openxmlformats.org/officeDocument/2006/relationships" r:id="R551002fb0cb04ab1"/>
+            <a:pPr defTabSz="914400">
+              <a:lnSpc>
+                <a:spcPct val="100000"/>
+              </a:lnSpc>
+              <a:buNone/>
+              <a:tabLst>
+                <a:tab pos="0" algn="l"/>
+              </a:tabLst>
+            </a:pPr>
+            <a:r>
+              <a:rPr sz="1190" b="0" u="none" strike="noStrike">
+                <a:solidFill>
+                  <a:srgbClr val="26354B"/>
+                </a:solidFill>
+                <a:latin typeface="Arial"/>
+                <a:ea typeface="Arial"/>
+                <a:cs typeface="Arial"/>
               </a:rPr>
               <a:t>YES</a:t>
             </a:r>
+            <a:endParaRPr sz="1190" b="0" u="none" strike="noStrike">
+              <a:solidFill>
+                <a:srgbClr val="000000"/>
+              </a:solidFill>
+              <a:latin typeface="Arial"/>
+              <a:ea typeface="Arial"/>
+              <a:cs typeface="Arial"/>
+            </a:endParaRPr>
+          </a:p>
+          <a:p xmlns:a="http://schemas.openxmlformats.org/drawingml/2006/main">
+            <a:pPr defTabSz="914400">
+              <a:lnSpc>
+                <a:spcPct val="100000"/>
+              </a:lnSpc>
+              <a:buNone/>
+              <a:tabLst>
+                <a:tab pos="0" algn="l"/>
+              </a:tabLst>
+            </a:pPr>
+            <a:r>
+              <a:rPr sz="1190" b="0" u="none" strike="noStrike">
+                <a:solidFill>
+                  <a:srgbClr val="26354B"/>
+                </a:solidFill>
+                <a:latin typeface="Arial"/>
+                <a:ea typeface="Arial"/>
+                <a:cs typeface="Arial"/>
+              </a:rPr>
+              <a:t>I1</a:t>
+            </a:r>
+            <a:endParaRPr sz="1190" b="0" u="none" strike="noStrike">
+              <a:solidFill>
+                <a:srgbClr val="000000"/>
+              </a:solidFill>
+              <a:latin typeface="Arial"/>
+              <a:ea typeface="Arial"/>
+              <a:cs typeface="Arial"/>
+            </a:endParaRPr>
           </a:p>
         </p:txBody>
       </p:sp>
@@ -4524,7 +4744,7 @@
           <p:cNvPr id="50" name="Text 20">
             <a:extLst xmlns:a="http://schemas.openxmlformats.org/drawingml/2006/main">
               <a:ext uri="{FF2B5EF4-FFF2-40B4-BE49-F238E27FC236}">
-                <a16:creationId xmlns:a16="http://schemas.microsoft.com/office/drawing/2014/main" id="{29086539-02B8-46F0-880D-0727540E1F9A}"/>
+                <a16:creationId xmlns:a16="http://schemas.microsoft.com/office/drawing/2014/main" id="{0DDEE1C9-BA37-4C3A-B2BC-A14291B96612}"/>
               </a:ext>
             </a:extLst>
           </p:cNvPr>
@@ -4563,12 +4783,64 @@
           </a:bodyPr>
           <a:lstStyle xmlns:a="http://schemas.openxmlformats.org/drawingml/2006/main"/>
           <a:p xmlns:a="http://schemas.openxmlformats.org/drawingml/2006/main">
-            <a:r>
-              <a:rPr>
-                <a:hlinkClick xmlns:r="http://schemas.openxmlformats.org/officeDocument/2006/relationships" r:id="Rb9d064a716274f5b"/>
+            <a:pPr defTabSz="914400">
+              <a:lnSpc>
+                <a:spcPct val="100000"/>
+              </a:lnSpc>
+              <a:buNone/>
+              <a:tabLst>
+                <a:tab pos="0" algn="l"/>
+              </a:tabLst>
+            </a:pPr>
+            <a:r>
+              <a:rPr sz="1190" b="0" u="none" strike="noStrike">
+                <a:solidFill>
+                  <a:srgbClr val="26354B"/>
+                </a:solidFill>
+                <a:latin typeface="Arial"/>
+                <a:ea typeface="Arial"/>
+                <a:cs typeface="Arial"/>
               </a:rPr>
               <a:t>YES</a:t>
             </a:r>
+            <a:endParaRPr sz="1190" b="0" u="none" strike="noStrike">
+              <a:solidFill>
+                <a:srgbClr val="000000"/>
+              </a:solidFill>
+              <a:latin typeface="Arial"/>
+              <a:ea typeface="Arial"/>
+              <a:cs typeface="Arial"/>
+            </a:endParaRPr>
+          </a:p>
+          <a:p xmlns:a="http://schemas.openxmlformats.org/drawingml/2006/main">
+            <a:pPr defTabSz="914400">
+              <a:lnSpc>
+                <a:spcPct val="100000"/>
+              </a:lnSpc>
+              <a:buNone/>
+              <a:tabLst>
+                <a:tab pos="0" algn="l"/>
+              </a:tabLst>
+            </a:pPr>
+            <a:r>
+              <a:rPr sz="1190" b="0" u="none" strike="noStrike">
+                <a:solidFill>
+                  <a:srgbClr val="26354B"/>
+                </a:solidFill>
+                <a:latin typeface="Arial"/>
+                <a:ea typeface="Arial"/>
+                <a:cs typeface="Arial"/>
+              </a:rPr>
+              <a:t>T1</a:t>
+            </a:r>
+            <a:endParaRPr sz="1190" b="0" u="none" strike="noStrike">
+              <a:solidFill>
+                <a:srgbClr val="000000"/>
+              </a:solidFill>
+              <a:latin typeface="Arial"/>
+              <a:ea typeface="Arial"/>
+              <a:cs typeface="Arial"/>
+            </a:endParaRPr>
           </a:p>
         </p:txBody>
       </p:sp>
@@ -4577,7 +4849,7 @@
           <p:cNvPr id="51" name="Text 21">
             <a:extLst xmlns:a="http://schemas.openxmlformats.org/drawingml/2006/main">
               <a:ext uri="{FF2B5EF4-FFF2-40B4-BE49-F238E27FC236}">
-                <a16:creationId xmlns:a16="http://schemas.microsoft.com/office/drawing/2014/main" id="{41490A8D-A620-4361-A99D-8F3ACA31BA5B}"/>
+                <a16:creationId xmlns:a16="http://schemas.microsoft.com/office/drawing/2014/main" id="{C81D102F-129C-4066-8075-8786F841DA64}"/>
               </a:ext>
             </a:extLst>
           </p:cNvPr>
@@ -4616,15 +4888,64 @@
           </a:bodyPr>
           <a:lstStyle xmlns:a="http://schemas.openxmlformats.org/drawingml/2006/main"/>
           <a:p xmlns:a="http://schemas.openxmlformats.org/drawingml/2006/main">
-            <a:r>
-              <a:rPr u="none">
+            <a:pPr defTabSz="914400">
+              <a:lnSpc>
+                <a:spcPct val="100000"/>
+              </a:lnSpc>
+              <a:buNone/>
+              <a:tabLst>
+                <a:tab pos="0" algn="l"/>
+              </a:tabLst>
+            </a:pPr>
+            <a:r>
+              <a:rPr sz="1190" b="0" u="none" strike="noStrike">
                 <a:solidFill>
                   <a:srgbClr val="26354B"/>
                 </a:solidFill>
-                <a:hlinkClick xmlns:r="http://schemas.openxmlformats.org/officeDocument/2006/relationships" r:id="Rafaef1614aca4cf9"/>
-              </a:rPr>
-              <a:t>OP-01, doména a vytvoření návrhu přes HTTP.</a:t>
-            </a:r>
+                <a:latin typeface="Arial"/>
+                <a:ea typeface="Arial"/>
+                <a:cs typeface="Arial"/>
+              </a:rPr>
+              <a:t>I1: ReservationService.createReservation</a:t>
+            </a:r>
+            <a:endParaRPr sz="1190" b="0" u="none" strike="noStrike">
+              <a:solidFill>
+                <a:srgbClr val="000000"/>
+              </a:solidFill>
+              <a:latin typeface="Arial"/>
+              <a:ea typeface="Arial"/>
+              <a:cs typeface="Arial"/>
+            </a:endParaRPr>
+          </a:p>
+          <a:p xmlns:a="http://schemas.openxmlformats.org/drawingml/2006/main">
+            <a:pPr defTabSz="914400">
+              <a:lnSpc>
+                <a:spcPct val="100000"/>
+              </a:lnSpc>
+              <a:buNone/>
+              <a:tabLst>
+                <a:tab pos="0" algn="l"/>
+              </a:tabLst>
+            </a:pPr>
+            <a:r>
+              <a:rPr sz="1190" b="0" u="none" strike="noStrike">
+                <a:solidFill>
+                  <a:srgbClr val="26354B"/>
+                </a:solidFill>
+                <a:latin typeface="Arial"/>
+                <a:ea typeface="Arial"/>
+                <a:cs typeface="Arial"/>
+              </a:rPr>
+              <a:t>T1: ReservationServiceTest</a:t>
+            </a:r>
+            <a:endParaRPr sz="1190" b="0" u="none" strike="noStrike">
+              <a:solidFill>
+                <a:srgbClr val="000000"/>
+              </a:solidFill>
+              <a:latin typeface="Arial"/>
+              <a:ea typeface="Arial"/>
+              <a:cs typeface="Arial"/>
+            </a:endParaRPr>
           </a:p>
         </p:txBody>
       </p:sp>
@@ -4633,7 +4954,7 @@
           <p:cNvPr id="52" name="Text 22">
             <a:extLst xmlns:a="http://schemas.openxmlformats.org/drawingml/2006/main">
               <a:ext uri="{FF2B5EF4-FFF2-40B4-BE49-F238E27FC236}">
-                <a16:creationId xmlns:a16="http://schemas.microsoft.com/office/drawing/2014/main" id="{ED7B02CF-8E0B-4516-8825-2E6A37401E82}"/>
+                <a16:creationId xmlns:a16="http://schemas.microsoft.com/office/drawing/2014/main" id="{904EE957-A099-45B6-AE2F-8F473B0B517D}"/>
               </a:ext>
             </a:extLst>
           </p:cNvPr>
@@ -4708,7 +5029,7 @@
           <p:cNvPr id="53" name="Text 23">
             <a:extLst xmlns:a="http://schemas.openxmlformats.org/drawingml/2006/main">
               <a:ext uri="{FF2B5EF4-FFF2-40B4-BE49-F238E27FC236}">
-                <a16:creationId xmlns:a16="http://schemas.microsoft.com/office/drawing/2014/main" id="{51C67064-80F4-4A7D-9FE3-94695A72C2ED}"/>
+                <a16:creationId xmlns:a16="http://schemas.microsoft.com/office/drawing/2014/main" id="{4FC43D57-B281-4743-AD32-F1209AB4A16D}"/>
               </a:ext>
             </a:extLst>
           </p:cNvPr>
@@ -4747,12 +5068,64 @@
           </a:bodyPr>
           <a:lstStyle xmlns:a="http://schemas.openxmlformats.org/drawingml/2006/main"/>
           <a:p xmlns:a="http://schemas.openxmlformats.org/drawingml/2006/main">
-            <a:r>
-              <a:rPr>
-                <a:hlinkClick xmlns:r="http://schemas.openxmlformats.org/officeDocument/2006/relationships" r:id="R3e48af81a952477c"/>
+            <a:pPr defTabSz="914400">
+              <a:lnSpc>
+                <a:spcPct val="100000"/>
+              </a:lnSpc>
+              <a:buNone/>
+              <a:tabLst>
+                <a:tab pos="0" algn="l"/>
+              </a:tabLst>
+            </a:pPr>
+            <a:r>
+              <a:rPr sz="1190" b="0" u="none" strike="noStrike">
+                <a:solidFill>
+                  <a:srgbClr val="26354B"/>
+                </a:solidFill>
+                <a:latin typeface="Arial"/>
+                <a:ea typeface="Arial"/>
+                <a:cs typeface="Arial"/>
               </a:rPr>
               <a:t>YES</a:t>
             </a:r>
+            <a:endParaRPr sz="1190" b="0" u="none" strike="noStrike">
+              <a:solidFill>
+                <a:srgbClr val="000000"/>
+              </a:solidFill>
+              <a:latin typeface="Arial"/>
+              <a:ea typeface="Arial"/>
+              <a:cs typeface="Arial"/>
+            </a:endParaRPr>
+          </a:p>
+          <a:p xmlns:a="http://schemas.openxmlformats.org/drawingml/2006/main">
+            <a:pPr defTabSz="914400">
+              <a:lnSpc>
+                <a:spcPct val="100000"/>
+              </a:lnSpc>
+              <a:buNone/>
+              <a:tabLst>
+                <a:tab pos="0" algn="l"/>
+              </a:tabLst>
+            </a:pPr>
+            <a:r>
+              <a:rPr sz="1190" b="0" u="none" strike="noStrike">
+                <a:solidFill>
+                  <a:srgbClr val="26354B"/>
+                </a:solidFill>
+                <a:latin typeface="Arial"/>
+                <a:ea typeface="Arial"/>
+                <a:cs typeface="Arial"/>
+              </a:rPr>
+              <a:t>OP-02</a:t>
+            </a:r>
+            <a:endParaRPr sz="1190" b="0" u="none" strike="noStrike">
+              <a:solidFill>
+                <a:srgbClr val="000000"/>
+              </a:solidFill>
+              <a:latin typeface="Arial"/>
+              <a:ea typeface="Arial"/>
+              <a:cs typeface="Arial"/>
+            </a:endParaRPr>
           </a:p>
         </p:txBody>
       </p:sp>
@@ -4761,7 +5134,7 @@
           <p:cNvPr id="54" name="Text 24">
             <a:extLst xmlns:a="http://schemas.openxmlformats.org/drawingml/2006/main">
               <a:ext uri="{FF2B5EF4-FFF2-40B4-BE49-F238E27FC236}">
-                <a16:creationId xmlns:a16="http://schemas.microsoft.com/office/drawing/2014/main" id="{9C5FC37D-21B9-4BAF-A3B6-755FAC032AA8}"/>
+                <a16:creationId xmlns:a16="http://schemas.microsoft.com/office/drawing/2014/main" id="{9F93E6FF-4697-461B-AACC-777DFF1A31BC}"/>
               </a:ext>
             </a:extLst>
           </p:cNvPr>
@@ -4800,12 +5173,64 @@
           </a:bodyPr>
           <a:lstStyle xmlns:a="http://schemas.openxmlformats.org/drawingml/2006/main"/>
           <a:p xmlns:a="http://schemas.openxmlformats.org/drawingml/2006/main">
-            <a:r>
-              <a:rPr>
-                <a:hlinkClick xmlns:r="http://schemas.openxmlformats.org/officeDocument/2006/relationships" r:id="R8b9a656b0a9c4bd7"/>
+            <a:pPr defTabSz="914400">
+              <a:lnSpc>
+                <a:spcPct val="100000"/>
+              </a:lnSpc>
+              <a:buNone/>
+              <a:tabLst>
+                <a:tab pos="0" algn="l"/>
+              </a:tabLst>
+            </a:pPr>
+            <a:r>
+              <a:rPr sz="1190" b="0" u="none" strike="noStrike">
+                <a:solidFill>
+                  <a:srgbClr val="26354B"/>
+                </a:solidFill>
+                <a:latin typeface="Arial"/>
+                <a:ea typeface="Arial"/>
+                <a:cs typeface="Arial"/>
               </a:rPr>
               <a:t>YES</a:t>
             </a:r>
+            <a:endParaRPr sz="1190" b="0" u="none" strike="noStrike">
+              <a:solidFill>
+                <a:srgbClr val="000000"/>
+              </a:solidFill>
+              <a:latin typeface="Arial"/>
+              <a:ea typeface="Arial"/>
+              <a:cs typeface="Arial"/>
+            </a:endParaRPr>
+          </a:p>
+          <a:p xmlns:a="http://schemas.openxmlformats.org/drawingml/2006/main">
+            <a:pPr defTabSz="914400">
+              <a:lnSpc>
+                <a:spcPct val="100000"/>
+              </a:lnSpc>
+              <a:buNone/>
+              <a:tabLst>
+                <a:tab pos="0" algn="l"/>
+              </a:tabLst>
+            </a:pPr>
+            <a:r>
+              <a:rPr sz="1190" b="0" u="none" strike="noStrike">
+                <a:solidFill>
+                  <a:srgbClr val="26354B"/>
+                </a:solidFill>
+                <a:latin typeface="Arial"/>
+                <a:ea typeface="Arial"/>
+                <a:cs typeface="Arial"/>
+              </a:rPr>
+              <a:t>ADR-001</a:t>
+            </a:r>
+            <a:endParaRPr sz="1190" b="0" u="none" strike="noStrike">
+              <a:solidFill>
+                <a:srgbClr val="000000"/>
+              </a:solidFill>
+              <a:latin typeface="Arial"/>
+              <a:ea typeface="Arial"/>
+              <a:cs typeface="Arial"/>
+            </a:endParaRPr>
           </a:p>
         </p:txBody>
       </p:sp>
@@ -4814,7 +5239,7 @@
           <p:cNvPr id="55" name="Text 25">
             <a:extLst xmlns:a="http://schemas.openxmlformats.org/drawingml/2006/main">
               <a:ext uri="{FF2B5EF4-FFF2-40B4-BE49-F238E27FC236}">
-                <a16:creationId xmlns:a16="http://schemas.microsoft.com/office/drawing/2014/main" id="{0F7FBDDC-27C0-455B-9F45-42C9302A26F1}"/>
+                <a16:creationId xmlns:a16="http://schemas.microsoft.com/office/drawing/2014/main" id="{6B8E5ED7-B451-4F33-9C0F-C9A95E5BEFFC}"/>
               </a:ext>
             </a:extLst>
           </p:cNvPr>
@@ -4853,12 +5278,64 @@
           </a:bodyPr>
           <a:lstStyle xmlns:a="http://schemas.openxmlformats.org/drawingml/2006/main"/>
           <a:p xmlns:a="http://schemas.openxmlformats.org/drawingml/2006/main">
-            <a:r>
-              <a:rPr>
-                <a:hlinkClick xmlns:r="http://schemas.openxmlformats.org/officeDocument/2006/relationships" r:id="R391b0b65a6c64dd9"/>
+            <a:pPr defTabSz="914400">
+              <a:lnSpc>
+                <a:spcPct val="100000"/>
+              </a:lnSpc>
+              <a:buNone/>
+              <a:tabLst>
+                <a:tab pos="0" algn="l"/>
+              </a:tabLst>
+            </a:pPr>
+            <a:r>
+              <a:rPr sz="1190" b="0" u="none" strike="noStrike">
+                <a:solidFill>
+                  <a:srgbClr val="26354B"/>
+                </a:solidFill>
+                <a:latin typeface="Arial"/>
+                <a:ea typeface="Arial"/>
+                <a:cs typeface="Arial"/>
               </a:rPr>
               <a:t>YES</a:t>
             </a:r>
+            <a:endParaRPr sz="1190" b="0" u="none" strike="noStrike">
+              <a:solidFill>
+                <a:srgbClr val="000000"/>
+              </a:solidFill>
+              <a:latin typeface="Arial"/>
+              <a:ea typeface="Arial"/>
+              <a:cs typeface="Arial"/>
+            </a:endParaRPr>
+          </a:p>
+          <a:p xmlns:a="http://schemas.openxmlformats.org/drawingml/2006/main">
+            <a:pPr defTabSz="914400">
+              <a:lnSpc>
+                <a:spcPct val="100000"/>
+              </a:lnSpc>
+              <a:buNone/>
+              <a:tabLst>
+                <a:tab pos="0" algn="l"/>
+              </a:tabLst>
+            </a:pPr>
+            <a:r>
+              <a:rPr sz="1190" b="0" u="none" strike="noStrike">
+                <a:solidFill>
+                  <a:srgbClr val="26354B"/>
+                </a:solidFill>
+                <a:latin typeface="Arial"/>
+                <a:ea typeface="Arial"/>
+                <a:cs typeface="Arial"/>
+              </a:rPr>
+              <a:t>I2</a:t>
+            </a:r>
+            <a:endParaRPr sz="1190" b="0" u="none" strike="noStrike">
+              <a:solidFill>
+                <a:srgbClr val="000000"/>
+              </a:solidFill>
+              <a:latin typeface="Arial"/>
+              <a:ea typeface="Arial"/>
+              <a:cs typeface="Arial"/>
+            </a:endParaRPr>
           </a:p>
         </p:txBody>
       </p:sp>
@@ -4867,7 +5344,7 @@
           <p:cNvPr id="56" name="Text 26">
             <a:extLst xmlns:a="http://schemas.openxmlformats.org/drawingml/2006/main">
               <a:ext uri="{FF2B5EF4-FFF2-40B4-BE49-F238E27FC236}">
-                <a16:creationId xmlns:a16="http://schemas.microsoft.com/office/drawing/2014/main" id="{F033BCB9-03AA-479A-85B2-3AC797C52073}"/>
+                <a16:creationId xmlns:a16="http://schemas.microsoft.com/office/drawing/2014/main" id="{73B61084-EF46-429A-8E23-989472C666F7}"/>
               </a:ext>
             </a:extLst>
           </p:cNvPr>
@@ -4906,12 +5383,64 @@
           </a:bodyPr>
           <a:lstStyle xmlns:a="http://schemas.openxmlformats.org/drawingml/2006/main"/>
           <a:p xmlns:a="http://schemas.openxmlformats.org/drawingml/2006/main">
-            <a:r>
-              <a:rPr>
-                <a:hlinkClick xmlns:r="http://schemas.openxmlformats.org/officeDocument/2006/relationships" r:id="R332d568df4434989"/>
+            <a:pPr defTabSz="914400">
+              <a:lnSpc>
+                <a:spcPct val="100000"/>
+              </a:lnSpc>
+              <a:buNone/>
+              <a:tabLst>
+                <a:tab pos="0" algn="l"/>
+              </a:tabLst>
+            </a:pPr>
+            <a:r>
+              <a:rPr sz="1190" b="0" u="none" strike="noStrike">
+                <a:solidFill>
+                  <a:srgbClr val="26354B"/>
+                </a:solidFill>
+                <a:latin typeface="Arial"/>
+                <a:ea typeface="Arial"/>
+                <a:cs typeface="Arial"/>
               </a:rPr>
               <a:t>YES</a:t>
             </a:r>
+            <a:endParaRPr sz="1190" b="0" u="none" strike="noStrike">
+              <a:solidFill>
+                <a:srgbClr val="000000"/>
+              </a:solidFill>
+              <a:latin typeface="Arial"/>
+              <a:ea typeface="Arial"/>
+              <a:cs typeface="Arial"/>
+            </a:endParaRPr>
+          </a:p>
+          <a:p xmlns:a="http://schemas.openxmlformats.org/drawingml/2006/main">
+            <a:pPr defTabSz="914400">
+              <a:lnSpc>
+                <a:spcPct val="100000"/>
+              </a:lnSpc>
+              <a:buNone/>
+              <a:tabLst>
+                <a:tab pos="0" algn="l"/>
+              </a:tabLst>
+            </a:pPr>
+            <a:r>
+              <a:rPr sz="1190" b="0" u="none" strike="noStrike">
+                <a:solidFill>
+                  <a:srgbClr val="26354B"/>
+                </a:solidFill>
+                <a:latin typeface="Arial"/>
+                <a:ea typeface="Arial"/>
+                <a:cs typeface="Arial"/>
+              </a:rPr>
+              <a:t>T2</a:t>
+            </a:r>
+            <a:endParaRPr sz="1190" b="0" u="none" strike="noStrike">
+              <a:solidFill>
+                <a:srgbClr val="000000"/>
+              </a:solidFill>
+              <a:latin typeface="Arial"/>
+              <a:ea typeface="Arial"/>
+              <a:cs typeface="Arial"/>
+            </a:endParaRPr>
           </a:p>
         </p:txBody>
       </p:sp>
@@ -4920,7 +5449,7 @@
           <p:cNvPr id="57" name="Text 27">
             <a:extLst xmlns:a="http://schemas.openxmlformats.org/drawingml/2006/main">
               <a:ext uri="{FF2B5EF4-FFF2-40B4-BE49-F238E27FC236}">
-                <a16:creationId xmlns:a16="http://schemas.microsoft.com/office/drawing/2014/main" id="{6B98A471-0603-4245-A37A-FE6A12A65107}"/>
+                <a16:creationId xmlns:a16="http://schemas.microsoft.com/office/drawing/2014/main" id="{5B5AC5E7-C66F-4AB2-A271-C7C27CCC61C9}"/>
               </a:ext>
             </a:extLst>
           </p:cNvPr>
@@ -4959,15 +5488,64 @@
           </a:bodyPr>
           <a:lstStyle xmlns:a="http://schemas.openxmlformats.org/drawingml/2006/main"/>
           <a:p xmlns:a="http://schemas.openxmlformats.org/drawingml/2006/main">
-            <a:r>
-              <a:rPr u="none">
+            <a:pPr defTabSz="914400">
+              <a:lnSpc>
+                <a:spcPct val="100000"/>
+              </a:lnSpc>
+              <a:buNone/>
+              <a:tabLst>
+                <a:tab pos="0" algn="l"/>
+              </a:tabLst>
+            </a:pPr>
+            <a:r>
+              <a:rPr sz="1190" b="0" u="none" strike="noStrike">
                 <a:solidFill>
                   <a:srgbClr val="26354B"/>
                 </a:solidFill>
-                <a:hlinkClick xmlns:r="http://schemas.openxmlformats.org/officeDocument/2006/relationships" r:id="R8cf0dcbe96e24a69"/>
-              </a:rPr>
-              <a:t>OP-02, dostupnost a navazující intervaly.</a:t>
-            </a:r>
+                <a:latin typeface="Arial"/>
+                <a:ea typeface="Arial"/>
+                <a:cs typeface="Arial"/>
+              </a:rPr>
+              <a:t>I2: ReservationService.checkAvailability</a:t>
+            </a:r>
+            <a:endParaRPr sz="1190" b="0" u="none" strike="noStrike">
+              <a:solidFill>
+                <a:srgbClr val="000000"/>
+              </a:solidFill>
+              <a:latin typeface="Arial"/>
+              <a:ea typeface="Arial"/>
+              <a:cs typeface="Arial"/>
+            </a:endParaRPr>
+          </a:p>
+          <a:p xmlns:a="http://schemas.openxmlformats.org/drawingml/2006/main">
+            <a:pPr defTabSz="914400">
+              <a:lnSpc>
+                <a:spcPct val="100000"/>
+              </a:lnSpc>
+              <a:buNone/>
+              <a:tabLst>
+                <a:tab pos="0" algn="l"/>
+              </a:tabLst>
+            </a:pPr>
+            <a:r>
+              <a:rPr sz="1190" b="0" u="none" strike="noStrike">
+                <a:solidFill>
+                  <a:srgbClr val="26354B"/>
+                </a:solidFill>
+                <a:latin typeface="Arial"/>
+                <a:ea typeface="Arial"/>
+                <a:cs typeface="Arial"/>
+              </a:rPr>
+              <a:t>T2: ReservationLifecycleApiTest</a:t>
+            </a:r>
+            <a:endParaRPr sz="1190" b="0" u="none" strike="noStrike">
+              <a:solidFill>
+                <a:srgbClr val="000000"/>
+              </a:solidFill>
+              <a:latin typeface="Arial"/>
+              <a:ea typeface="Arial"/>
+              <a:cs typeface="Arial"/>
+            </a:endParaRPr>
           </a:p>
         </p:txBody>
       </p:sp>
@@ -4976,7 +5554,7 @@
           <p:cNvPr id="58" name="Text 28">
             <a:extLst xmlns:a="http://schemas.openxmlformats.org/drawingml/2006/main">
               <a:ext uri="{FF2B5EF4-FFF2-40B4-BE49-F238E27FC236}">
-                <a16:creationId xmlns:a16="http://schemas.microsoft.com/office/drawing/2014/main" id="{319B1CC4-701F-4AA0-9472-0B7EF235C1DF}"/>
+                <a16:creationId xmlns:a16="http://schemas.microsoft.com/office/drawing/2014/main" id="{B6989FF8-8B6C-4AE3-9B25-914BBAF87ACB}"/>
               </a:ext>
             </a:extLst>
           </p:cNvPr>
@@ -5051,7 +5629,7 @@
           <p:cNvPr id="59" name="Text 29">
             <a:extLst xmlns:a="http://schemas.openxmlformats.org/drawingml/2006/main">
               <a:ext uri="{FF2B5EF4-FFF2-40B4-BE49-F238E27FC236}">
-                <a16:creationId xmlns:a16="http://schemas.microsoft.com/office/drawing/2014/main" id="{3FB19AA5-A1F8-4525-A1C6-E43FFEBD854C}"/>
+                <a16:creationId xmlns:a16="http://schemas.microsoft.com/office/drawing/2014/main" id="{93823A2A-DC39-4B94-B196-7D6FAE7C47DE}"/>
               </a:ext>
             </a:extLst>
           </p:cNvPr>
@@ -5090,12 +5668,64 @@
           </a:bodyPr>
           <a:lstStyle xmlns:a="http://schemas.openxmlformats.org/drawingml/2006/main"/>
           <a:p xmlns:a="http://schemas.openxmlformats.org/drawingml/2006/main">
-            <a:r>
-              <a:rPr>
-                <a:hlinkClick xmlns:r="http://schemas.openxmlformats.org/officeDocument/2006/relationships" r:id="R8867e5f35ba14cd2"/>
+            <a:pPr defTabSz="914400">
+              <a:lnSpc>
+                <a:spcPct val="100000"/>
+              </a:lnSpc>
+              <a:buNone/>
+              <a:tabLst>
+                <a:tab pos="0" algn="l"/>
+              </a:tabLst>
+            </a:pPr>
+            <a:r>
+              <a:rPr sz="1190" b="0" u="none" strike="noStrike">
+                <a:solidFill>
+                  <a:srgbClr val="26354B"/>
+                </a:solidFill>
+                <a:latin typeface="Arial"/>
+                <a:ea typeface="Arial"/>
+                <a:cs typeface="Arial"/>
               </a:rPr>
               <a:t>YES</a:t>
             </a:r>
+            <a:endParaRPr sz="1190" b="0" u="none" strike="noStrike">
+              <a:solidFill>
+                <a:srgbClr val="000000"/>
+              </a:solidFill>
+              <a:latin typeface="Arial"/>
+              <a:ea typeface="Arial"/>
+              <a:cs typeface="Arial"/>
+            </a:endParaRPr>
+          </a:p>
+          <a:p xmlns:a="http://schemas.openxmlformats.org/drawingml/2006/main">
+            <a:pPr defTabSz="914400">
+              <a:lnSpc>
+                <a:spcPct val="100000"/>
+              </a:lnSpc>
+              <a:buNone/>
+              <a:tabLst>
+                <a:tab pos="0" algn="l"/>
+              </a:tabLst>
+            </a:pPr>
+            <a:r>
+              <a:rPr sz="1190" b="0" u="none" strike="noStrike">
+                <a:solidFill>
+                  <a:srgbClr val="26354B"/>
+                </a:solidFill>
+                <a:latin typeface="Arial"/>
+                <a:ea typeface="Arial"/>
+                <a:cs typeface="Arial"/>
+              </a:rPr>
+              <a:t>OP-03/05</a:t>
+            </a:r>
+            <a:endParaRPr sz="1190" b="0" u="none" strike="noStrike">
+              <a:solidFill>
+                <a:srgbClr val="000000"/>
+              </a:solidFill>
+              <a:latin typeface="Arial"/>
+              <a:ea typeface="Arial"/>
+              <a:cs typeface="Arial"/>
+            </a:endParaRPr>
           </a:p>
         </p:txBody>
       </p:sp>
@@ -5104,7 +5734,7 @@
           <p:cNvPr id="60" name="Text 30">
             <a:extLst xmlns:a="http://schemas.openxmlformats.org/drawingml/2006/main">
               <a:ext uri="{FF2B5EF4-FFF2-40B4-BE49-F238E27FC236}">
-                <a16:creationId xmlns:a16="http://schemas.microsoft.com/office/drawing/2014/main" id="{C55E055C-9E6A-4A9B-9019-3B4AF2AA4671}"/>
+                <a16:creationId xmlns:a16="http://schemas.microsoft.com/office/drawing/2014/main" id="{8C915981-E3F9-42E7-8AEB-4FAC2AC14BA5}"/>
               </a:ext>
             </a:extLst>
           </p:cNvPr>
@@ -5143,12 +5773,64 @@
           </a:bodyPr>
           <a:lstStyle xmlns:a="http://schemas.openxmlformats.org/drawingml/2006/main"/>
           <a:p xmlns:a="http://schemas.openxmlformats.org/drawingml/2006/main">
-            <a:r>
-              <a:rPr>
-                <a:hlinkClick xmlns:r="http://schemas.openxmlformats.org/officeDocument/2006/relationships" r:id="Rd852625c4c414300"/>
+            <a:pPr defTabSz="914400">
+              <a:lnSpc>
+                <a:spcPct val="100000"/>
+              </a:lnSpc>
+              <a:buNone/>
+              <a:tabLst>
+                <a:tab pos="0" algn="l"/>
+              </a:tabLst>
+            </a:pPr>
+            <a:r>
+              <a:rPr sz="1190" b="0" u="none" strike="noStrike">
+                <a:solidFill>
+                  <a:srgbClr val="26354B"/>
+                </a:solidFill>
+                <a:latin typeface="Arial"/>
+                <a:ea typeface="Arial"/>
+                <a:cs typeface="Arial"/>
               </a:rPr>
               <a:t>YES</a:t>
             </a:r>
+            <a:endParaRPr sz="1190" b="0" u="none" strike="noStrike">
+              <a:solidFill>
+                <a:srgbClr val="000000"/>
+              </a:solidFill>
+              <a:latin typeface="Arial"/>
+              <a:ea typeface="Arial"/>
+              <a:cs typeface="Arial"/>
+            </a:endParaRPr>
+          </a:p>
+          <a:p xmlns:a="http://schemas.openxmlformats.org/drawingml/2006/main">
+            <a:pPr defTabSz="914400">
+              <a:lnSpc>
+                <a:spcPct val="100000"/>
+              </a:lnSpc>
+              <a:buNone/>
+              <a:tabLst>
+                <a:tab pos="0" algn="l"/>
+              </a:tabLst>
+            </a:pPr>
+            <a:r>
+              <a:rPr sz="1190" b="0" u="none" strike="noStrike">
+                <a:solidFill>
+                  <a:srgbClr val="26354B"/>
+                </a:solidFill>
+                <a:latin typeface="Arial"/>
+                <a:ea typeface="Arial"/>
+                <a:cs typeface="Arial"/>
+              </a:rPr>
+              <a:t>C05 / ADR-007</a:t>
+            </a:r>
+            <a:endParaRPr sz="1190" b="0" u="none" strike="noStrike">
+              <a:solidFill>
+                <a:srgbClr val="000000"/>
+              </a:solidFill>
+              <a:latin typeface="Arial"/>
+              <a:ea typeface="Arial"/>
+              <a:cs typeface="Arial"/>
+            </a:endParaRPr>
           </a:p>
         </p:txBody>
       </p:sp>
@@ -5157,7 +5839,7 @@
           <p:cNvPr id="61" name="Text 31">
             <a:extLst xmlns:a="http://schemas.openxmlformats.org/drawingml/2006/main">
               <a:ext uri="{FF2B5EF4-FFF2-40B4-BE49-F238E27FC236}">
-                <a16:creationId xmlns:a16="http://schemas.microsoft.com/office/drawing/2014/main" id="{298F1362-8BC1-484D-87E4-CEA3585E4184}"/>
+                <a16:creationId xmlns:a16="http://schemas.microsoft.com/office/drawing/2014/main" id="{E0B1C5A8-B765-4C47-9019-FA822B956B57}"/>
               </a:ext>
             </a:extLst>
           </p:cNvPr>
@@ -5196,12 +5878,64 @@
           </a:bodyPr>
           <a:lstStyle xmlns:a="http://schemas.openxmlformats.org/drawingml/2006/main"/>
           <a:p xmlns:a="http://schemas.openxmlformats.org/drawingml/2006/main">
-            <a:r>
-              <a:rPr>
-                <a:hlinkClick xmlns:r="http://schemas.openxmlformats.org/officeDocument/2006/relationships" r:id="R5deb2490aa354355"/>
+            <a:pPr defTabSz="914400">
+              <a:lnSpc>
+                <a:spcPct val="100000"/>
+              </a:lnSpc>
+              <a:buNone/>
+              <a:tabLst>
+                <a:tab pos="0" algn="l"/>
+              </a:tabLst>
+            </a:pPr>
+            <a:r>
+              <a:rPr sz="1190" b="0" u="none" strike="noStrike">
+                <a:solidFill>
+                  <a:srgbClr val="26354B"/>
+                </a:solidFill>
+                <a:latin typeface="Arial"/>
+                <a:ea typeface="Arial"/>
+                <a:cs typeface="Arial"/>
               </a:rPr>
               <a:t>YES</a:t>
             </a:r>
+            <a:endParaRPr sz="1190" b="0" u="none" strike="noStrike">
+              <a:solidFill>
+                <a:srgbClr val="000000"/>
+              </a:solidFill>
+              <a:latin typeface="Arial"/>
+              <a:ea typeface="Arial"/>
+              <a:cs typeface="Arial"/>
+            </a:endParaRPr>
+          </a:p>
+          <a:p xmlns:a="http://schemas.openxmlformats.org/drawingml/2006/main">
+            <a:pPr defTabSz="914400">
+              <a:lnSpc>
+                <a:spcPct val="100000"/>
+              </a:lnSpc>
+              <a:buNone/>
+              <a:tabLst>
+                <a:tab pos="0" algn="l"/>
+              </a:tabLst>
+            </a:pPr>
+            <a:r>
+              <a:rPr sz="1190" b="0" u="none" strike="noStrike">
+                <a:solidFill>
+                  <a:srgbClr val="26354B"/>
+                </a:solidFill>
+                <a:latin typeface="Arial"/>
+                <a:ea typeface="Arial"/>
+                <a:cs typeface="Arial"/>
+              </a:rPr>
+              <a:t>I3</a:t>
+            </a:r>
+            <a:endParaRPr sz="1190" b="0" u="none" strike="noStrike">
+              <a:solidFill>
+                <a:srgbClr val="000000"/>
+              </a:solidFill>
+              <a:latin typeface="Arial"/>
+              <a:ea typeface="Arial"/>
+              <a:cs typeface="Arial"/>
+            </a:endParaRPr>
           </a:p>
         </p:txBody>
       </p:sp>
@@ -5210,7 +5944,7 @@
           <p:cNvPr id="62" name="Text 32">
             <a:extLst xmlns:a="http://schemas.openxmlformats.org/drawingml/2006/main">
               <a:ext uri="{FF2B5EF4-FFF2-40B4-BE49-F238E27FC236}">
-                <a16:creationId xmlns:a16="http://schemas.microsoft.com/office/drawing/2014/main" id="{3861E74D-2883-4C27-AC44-C9F5A664385D}"/>
+                <a16:creationId xmlns:a16="http://schemas.microsoft.com/office/drawing/2014/main" id="{4F1FCF3E-EC66-4C29-BB35-857E03C55605}"/>
               </a:ext>
             </a:extLst>
           </p:cNvPr>
@@ -5249,12 +5983,64 @@
           </a:bodyPr>
           <a:lstStyle xmlns:a="http://schemas.openxmlformats.org/drawingml/2006/main"/>
           <a:p xmlns:a="http://schemas.openxmlformats.org/drawingml/2006/main">
-            <a:r>
-              <a:rPr>
-                <a:hlinkClick xmlns:r="http://schemas.openxmlformats.org/officeDocument/2006/relationships" r:id="R7267a89326ff4148"/>
+            <a:pPr defTabSz="914400">
+              <a:lnSpc>
+                <a:spcPct val="100000"/>
+              </a:lnSpc>
+              <a:buNone/>
+              <a:tabLst>
+                <a:tab pos="0" algn="l"/>
+              </a:tabLst>
+            </a:pPr>
+            <a:r>
+              <a:rPr sz="1190" b="0" u="none" strike="noStrike">
+                <a:solidFill>
+                  <a:srgbClr val="26354B"/>
+                </a:solidFill>
+                <a:latin typeface="Arial"/>
+                <a:ea typeface="Arial"/>
+                <a:cs typeface="Arial"/>
               </a:rPr>
               <a:t>YES</a:t>
             </a:r>
+            <a:endParaRPr sz="1190" b="0" u="none" strike="noStrike">
+              <a:solidFill>
+                <a:srgbClr val="000000"/>
+              </a:solidFill>
+              <a:latin typeface="Arial"/>
+              <a:ea typeface="Arial"/>
+              <a:cs typeface="Arial"/>
+            </a:endParaRPr>
+          </a:p>
+          <a:p xmlns:a="http://schemas.openxmlformats.org/drawingml/2006/main">
+            <a:pPr defTabSz="914400">
+              <a:lnSpc>
+                <a:spcPct val="100000"/>
+              </a:lnSpc>
+              <a:buNone/>
+              <a:tabLst>
+                <a:tab pos="0" algn="l"/>
+              </a:tabLst>
+            </a:pPr>
+            <a:r>
+              <a:rPr sz="1190" b="0" u="none" strike="noStrike">
+                <a:solidFill>
+                  <a:srgbClr val="26354B"/>
+                </a:solidFill>
+                <a:latin typeface="Arial"/>
+                <a:ea typeface="Arial"/>
+                <a:cs typeface="Arial"/>
+              </a:rPr>
+              <a:t>T3</a:t>
+            </a:r>
+            <a:endParaRPr sz="1190" b="0" u="none" strike="noStrike">
+              <a:solidFill>
+                <a:srgbClr val="000000"/>
+              </a:solidFill>
+              <a:latin typeface="Arial"/>
+              <a:ea typeface="Arial"/>
+              <a:cs typeface="Arial"/>
+            </a:endParaRPr>
           </a:p>
         </p:txBody>
       </p:sp>
@@ -5263,7 +6049,7 @@
           <p:cNvPr id="63" name="Text 33">
             <a:extLst xmlns:a="http://schemas.openxmlformats.org/drawingml/2006/main">
               <a:ext uri="{FF2B5EF4-FFF2-40B4-BE49-F238E27FC236}">
-                <a16:creationId xmlns:a16="http://schemas.microsoft.com/office/drawing/2014/main" id="{1E1B7632-320D-46BA-89CE-DF6C9C86B585}"/>
+                <a16:creationId xmlns:a16="http://schemas.microsoft.com/office/drawing/2014/main" id="{4BAAC7E8-C87D-44A4-8917-8209FA10F15B}"/>
               </a:ext>
             </a:extLst>
           </p:cNvPr>
@@ -5302,15 +6088,64 @@
           </a:bodyPr>
           <a:lstStyle xmlns:a="http://schemas.openxmlformats.org/drawingml/2006/main"/>
           <a:p xmlns:a="http://schemas.openxmlformats.org/drawingml/2006/main">
-            <a:r>
-              <a:rPr u="none">
+            <a:pPr defTabSz="914400">
+              <a:lnSpc>
+                <a:spcPct val="100000"/>
+              </a:lnSpc>
+              <a:buNone/>
+              <a:tabLst>
+                <a:tab pos="0" algn="l"/>
+              </a:tabLst>
+            </a:pPr>
+            <a:r>
+              <a:rPr sz="1190" b="0" u="none" strike="noStrike">
                 <a:solidFill>
                   <a:srgbClr val="26354B"/>
                 </a:solidFill>
-                <a:hlinkClick xmlns:r="http://schemas.openxmlformats.org/officeDocument/2006/relationships" r:id="R376179c2342c4308"/>
-              </a:rPr>
-              <a:t>OP-03/05/08, schválení, kolize a expirace.</a:t>
-            </a:r>
+                <a:latin typeface="Arial"/>
+                <a:ea typeface="Arial"/>
+                <a:cs typeface="Arial"/>
+              </a:rPr>
+              <a:t>I3: confirmReservation / approveReservation</a:t>
+            </a:r>
+            <a:endParaRPr sz="1190" b="0" u="none" strike="noStrike">
+              <a:solidFill>
+                <a:srgbClr val="000000"/>
+              </a:solidFill>
+              <a:latin typeface="Arial"/>
+              <a:ea typeface="Arial"/>
+              <a:cs typeface="Arial"/>
+            </a:endParaRPr>
+          </a:p>
+          <a:p xmlns:a="http://schemas.openxmlformats.org/drawingml/2006/main">
+            <a:pPr defTabSz="914400">
+              <a:lnSpc>
+                <a:spcPct val="100000"/>
+              </a:lnSpc>
+              <a:buNone/>
+              <a:tabLst>
+                <a:tab pos="0" algn="l"/>
+              </a:tabLst>
+            </a:pPr>
+            <a:r>
+              <a:rPr sz="1190" b="0" u="none" strike="noStrike">
+                <a:solidFill>
+                  <a:srgbClr val="26354B"/>
+                </a:solidFill>
+                <a:latin typeface="Arial"/>
+                <a:ea typeface="Arial"/>
+                <a:cs typeface="Arial"/>
+              </a:rPr>
+              <a:t>T3: ApprovalWorkflowApiTest + T2</a:t>
+            </a:r>
+            <a:endParaRPr sz="1190" b="0" u="none" strike="noStrike">
+              <a:solidFill>
+                <a:srgbClr val="000000"/>
+              </a:solidFill>
+              <a:latin typeface="Arial"/>
+              <a:ea typeface="Arial"/>
+              <a:cs typeface="Arial"/>
+            </a:endParaRPr>
           </a:p>
         </p:txBody>
       </p:sp>
@@ -5319,7 +6154,7 @@
           <p:cNvPr id="64" name="Text 34">
             <a:extLst xmlns:a="http://schemas.openxmlformats.org/drawingml/2006/main">
               <a:ext uri="{FF2B5EF4-FFF2-40B4-BE49-F238E27FC236}">
-                <a16:creationId xmlns:a16="http://schemas.microsoft.com/office/drawing/2014/main" id="{A3639F27-159C-4F26-BF22-F44E55E078EB}"/>
+                <a16:creationId xmlns:a16="http://schemas.microsoft.com/office/drawing/2014/main" id="{F5891332-A853-4B14-A7AE-5A43A9413D7B}"/>
               </a:ext>
             </a:extLst>
           </p:cNvPr>
@@ -5394,7 +6229,7 @@
           <p:cNvPr id="65" name="Text 35">
             <a:extLst xmlns:a="http://schemas.openxmlformats.org/drawingml/2006/main">
               <a:ext uri="{FF2B5EF4-FFF2-40B4-BE49-F238E27FC236}">
-                <a16:creationId xmlns:a16="http://schemas.microsoft.com/office/drawing/2014/main" id="{BECAC469-CDF3-4062-B8F2-6FA7FBD4F2CA}"/>
+                <a16:creationId xmlns:a16="http://schemas.microsoft.com/office/drawing/2014/main" id="{BE3802C1-783E-4807-A318-BA53105971A1}"/>
               </a:ext>
             </a:extLst>
           </p:cNvPr>
@@ -5433,12 +6268,64 @@
           </a:bodyPr>
           <a:lstStyle xmlns:a="http://schemas.openxmlformats.org/drawingml/2006/main"/>
           <a:p xmlns:a="http://schemas.openxmlformats.org/drawingml/2006/main">
-            <a:r>
-              <a:rPr>
-                <a:hlinkClick xmlns:r="http://schemas.openxmlformats.org/officeDocument/2006/relationships" r:id="R41ff3ed0dca74dc2"/>
+            <a:pPr defTabSz="914400">
+              <a:lnSpc>
+                <a:spcPct val="100000"/>
+              </a:lnSpc>
+              <a:buNone/>
+              <a:tabLst>
+                <a:tab pos="0" algn="l"/>
+              </a:tabLst>
+            </a:pPr>
+            <a:r>
+              <a:rPr sz="1190" b="0" u="none" strike="noStrike">
+                <a:solidFill>
+                  <a:srgbClr val="26354B"/>
+                </a:solidFill>
+                <a:latin typeface="Arial"/>
+                <a:ea typeface="Arial"/>
+                <a:cs typeface="Arial"/>
               </a:rPr>
               <a:t>YES</a:t>
             </a:r>
+            <a:endParaRPr sz="1190" b="0" u="none" strike="noStrike">
+              <a:solidFill>
+                <a:srgbClr val="000000"/>
+              </a:solidFill>
+              <a:latin typeface="Arial"/>
+              <a:ea typeface="Arial"/>
+              <a:cs typeface="Arial"/>
+            </a:endParaRPr>
+          </a:p>
+          <a:p xmlns:a="http://schemas.openxmlformats.org/drawingml/2006/main">
+            <a:pPr defTabSz="914400">
+              <a:lnSpc>
+                <a:spcPct val="100000"/>
+              </a:lnSpc>
+              <a:buNone/>
+              <a:tabLst>
+                <a:tab pos="0" algn="l"/>
+              </a:tabLst>
+            </a:pPr>
+            <a:r>
+              <a:rPr sz="1190" b="0" u="none" strike="noStrike">
+                <a:solidFill>
+                  <a:srgbClr val="26354B"/>
+                </a:solidFill>
+                <a:latin typeface="Arial"/>
+                <a:ea typeface="Arial"/>
+                <a:cs typeface="Arial"/>
+              </a:rPr>
+              <a:t>OP-04</a:t>
+            </a:r>
+            <a:endParaRPr sz="1190" b="0" u="none" strike="noStrike">
+              <a:solidFill>
+                <a:srgbClr val="000000"/>
+              </a:solidFill>
+              <a:latin typeface="Arial"/>
+              <a:ea typeface="Arial"/>
+              <a:cs typeface="Arial"/>
+            </a:endParaRPr>
           </a:p>
         </p:txBody>
       </p:sp>
@@ -5447,7 +6334,7 @@
           <p:cNvPr id="66" name="Text 36">
             <a:extLst xmlns:a="http://schemas.openxmlformats.org/drawingml/2006/main">
               <a:ext uri="{FF2B5EF4-FFF2-40B4-BE49-F238E27FC236}">
-                <a16:creationId xmlns:a16="http://schemas.microsoft.com/office/drawing/2014/main" id="{3F324FBA-3A97-4747-9B12-04F4D9568450}"/>
+                <a16:creationId xmlns:a16="http://schemas.microsoft.com/office/drawing/2014/main" id="{B2E8443A-9D2C-4CBF-A255-4910ECACD7DA}"/>
               </a:ext>
             </a:extLst>
           </p:cNvPr>
@@ -5486,12 +6373,64 @@
           </a:bodyPr>
           <a:lstStyle xmlns:a="http://schemas.openxmlformats.org/drawingml/2006/main"/>
           <a:p xmlns:a="http://schemas.openxmlformats.org/drawingml/2006/main">
-            <a:r>
-              <a:rPr>
-                <a:hlinkClick xmlns:r="http://schemas.openxmlformats.org/officeDocument/2006/relationships" r:id="R53609e36aa1943c7"/>
+            <a:pPr defTabSz="914400">
+              <a:lnSpc>
+                <a:spcPct val="100000"/>
+              </a:lnSpc>
+              <a:buNone/>
+              <a:tabLst>
+                <a:tab pos="0" algn="l"/>
+              </a:tabLst>
+            </a:pPr>
+            <a:r>
+              <a:rPr sz="1190" b="0" u="none" strike="noStrike">
+                <a:solidFill>
+                  <a:srgbClr val="26354B"/>
+                </a:solidFill>
+                <a:latin typeface="Arial"/>
+                <a:ea typeface="Arial"/>
+                <a:cs typeface="Arial"/>
               </a:rPr>
               <a:t>YES</a:t>
             </a:r>
+            <a:endParaRPr sz="1190" b="0" u="none" strike="noStrike">
+              <a:solidFill>
+                <a:srgbClr val="000000"/>
+              </a:solidFill>
+              <a:latin typeface="Arial"/>
+              <a:ea typeface="Arial"/>
+              <a:cs typeface="Arial"/>
+            </a:endParaRPr>
+          </a:p>
+          <a:p xmlns:a="http://schemas.openxmlformats.org/drawingml/2006/main">
+            <a:pPr defTabSz="914400">
+              <a:lnSpc>
+                <a:spcPct val="100000"/>
+              </a:lnSpc>
+              <a:buNone/>
+              <a:tabLst>
+                <a:tab pos="0" algn="l"/>
+              </a:tabLst>
+            </a:pPr>
+            <a:r>
+              <a:rPr sz="1190" b="0" u="none" strike="noStrike">
+                <a:solidFill>
+                  <a:srgbClr val="26354B"/>
+                </a:solidFill>
+                <a:latin typeface="Arial"/>
+                <a:ea typeface="Arial"/>
+                <a:cs typeface="Arial"/>
+              </a:rPr>
+              <a:t>ADR-005</a:t>
+            </a:r>
+            <a:endParaRPr sz="1190" b="0" u="none" strike="noStrike">
+              <a:solidFill>
+                <a:srgbClr val="000000"/>
+              </a:solidFill>
+              <a:latin typeface="Arial"/>
+              <a:ea typeface="Arial"/>
+              <a:cs typeface="Arial"/>
+            </a:endParaRPr>
           </a:p>
         </p:txBody>
       </p:sp>
@@ -5500,7 +6439,7 @@
           <p:cNvPr id="67" name="Text 37">
             <a:extLst xmlns:a="http://schemas.openxmlformats.org/drawingml/2006/main">
               <a:ext uri="{FF2B5EF4-FFF2-40B4-BE49-F238E27FC236}">
-                <a16:creationId xmlns:a16="http://schemas.microsoft.com/office/drawing/2014/main" id="{C2F09216-0FBD-47CC-A459-469716D9F7BB}"/>
+                <a16:creationId xmlns:a16="http://schemas.microsoft.com/office/drawing/2014/main" id="{A1316876-45CF-4823-B34B-C9B7B1979A42}"/>
               </a:ext>
             </a:extLst>
           </p:cNvPr>
@@ -5539,12 +6478,64 @@
           </a:bodyPr>
           <a:lstStyle xmlns:a="http://schemas.openxmlformats.org/drawingml/2006/main"/>
           <a:p xmlns:a="http://schemas.openxmlformats.org/drawingml/2006/main">
-            <a:r>
-              <a:rPr>
-                <a:hlinkClick xmlns:r="http://schemas.openxmlformats.org/officeDocument/2006/relationships" r:id="R51f0b62786374806"/>
+            <a:pPr defTabSz="914400">
+              <a:lnSpc>
+                <a:spcPct val="100000"/>
+              </a:lnSpc>
+              <a:buNone/>
+              <a:tabLst>
+                <a:tab pos="0" algn="l"/>
+              </a:tabLst>
+            </a:pPr>
+            <a:r>
+              <a:rPr sz="1190" b="0" u="none" strike="noStrike">
+                <a:solidFill>
+                  <a:srgbClr val="26354B"/>
+                </a:solidFill>
+                <a:latin typeface="Arial"/>
+                <a:ea typeface="Arial"/>
+                <a:cs typeface="Arial"/>
               </a:rPr>
               <a:t>YES</a:t>
             </a:r>
+            <a:endParaRPr sz="1190" b="0" u="none" strike="noStrike">
+              <a:solidFill>
+                <a:srgbClr val="000000"/>
+              </a:solidFill>
+              <a:latin typeface="Arial"/>
+              <a:ea typeface="Arial"/>
+              <a:cs typeface="Arial"/>
+            </a:endParaRPr>
+          </a:p>
+          <a:p xmlns:a="http://schemas.openxmlformats.org/drawingml/2006/main">
+            <a:pPr defTabSz="914400">
+              <a:lnSpc>
+                <a:spcPct val="100000"/>
+              </a:lnSpc>
+              <a:buNone/>
+              <a:tabLst>
+                <a:tab pos="0" algn="l"/>
+              </a:tabLst>
+            </a:pPr>
+            <a:r>
+              <a:rPr sz="1190" b="0" u="none" strike="noStrike">
+                <a:solidFill>
+                  <a:srgbClr val="26354B"/>
+                </a:solidFill>
+                <a:latin typeface="Arial"/>
+                <a:ea typeface="Arial"/>
+                <a:cs typeface="Arial"/>
+              </a:rPr>
+              <a:t>I4</a:t>
+            </a:r>
+            <a:endParaRPr sz="1190" b="0" u="none" strike="noStrike">
+              <a:solidFill>
+                <a:srgbClr val="000000"/>
+              </a:solidFill>
+              <a:latin typeface="Arial"/>
+              <a:ea typeface="Arial"/>
+              <a:cs typeface="Arial"/>
+            </a:endParaRPr>
           </a:p>
         </p:txBody>
       </p:sp>
@@ -5553,7 +6544,7 @@
           <p:cNvPr id="68" name="Text 38">
             <a:extLst xmlns:a="http://schemas.openxmlformats.org/drawingml/2006/main">
               <a:ext uri="{FF2B5EF4-FFF2-40B4-BE49-F238E27FC236}">
-                <a16:creationId xmlns:a16="http://schemas.microsoft.com/office/drawing/2014/main" id="{5B72815B-85D6-4887-B601-B46265248213}"/>
+                <a16:creationId xmlns:a16="http://schemas.microsoft.com/office/drawing/2014/main" id="{1FF28848-7608-4932-80D2-B8779DFDC833}"/>
               </a:ext>
             </a:extLst>
           </p:cNvPr>
@@ -5592,12 +6583,64 @@
           </a:bodyPr>
           <a:lstStyle xmlns:a="http://schemas.openxmlformats.org/drawingml/2006/main"/>
           <a:p xmlns:a="http://schemas.openxmlformats.org/drawingml/2006/main">
-            <a:r>
-              <a:rPr>
-                <a:hlinkClick xmlns:r="http://schemas.openxmlformats.org/officeDocument/2006/relationships" r:id="Rb286af970e704cd6"/>
+            <a:pPr defTabSz="914400">
+              <a:lnSpc>
+                <a:spcPct val="100000"/>
+              </a:lnSpc>
+              <a:buNone/>
+              <a:tabLst>
+                <a:tab pos="0" algn="l"/>
+              </a:tabLst>
+            </a:pPr>
+            <a:r>
+              <a:rPr sz="1190" b="0" u="none" strike="noStrike">
+                <a:solidFill>
+                  <a:srgbClr val="26354B"/>
+                </a:solidFill>
+                <a:latin typeface="Arial"/>
+                <a:ea typeface="Arial"/>
+                <a:cs typeface="Arial"/>
               </a:rPr>
               <a:t>YES</a:t>
             </a:r>
+            <a:endParaRPr sz="1190" b="0" u="none" strike="noStrike">
+              <a:solidFill>
+                <a:srgbClr val="000000"/>
+              </a:solidFill>
+              <a:latin typeface="Arial"/>
+              <a:ea typeface="Arial"/>
+              <a:cs typeface="Arial"/>
+            </a:endParaRPr>
+          </a:p>
+          <a:p xmlns:a="http://schemas.openxmlformats.org/drawingml/2006/main">
+            <a:pPr defTabSz="914400">
+              <a:lnSpc>
+                <a:spcPct val="100000"/>
+              </a:lnSpc>
+              <a:buNone/>
+              <a:tabLst>
+                <a:tab pos="0" algn="l"/>
+              </a:tabLst>
+            </a:pPr>
+            <a:r>
+              <a:rPr sz="1190" b="0" u="none" strike="noStrike">
+                <a:solidFill>
+                  <a:srgbClr val="26354B"/>
+                </a:solidFill>
+                <a:latin typeface="Arial"/>
+                <a:ea typeface="Arial"/>
+                <a:cs typeface="Arial"/>
+              </a:rPr>
+              <a:t>T2</a:t>
+            </a:r>
+            <a:endParaRPr sz="1190" b="0" u="none" strike="noStrike">
+              <a:solidFill>
+                <a:srgbClr val="000000"/>
+              </a:solidFill>
+              <a:latin typeface="Arial"/>
+              <a:ea typeface="Arial"/>
+              <a:cs typeface="Arial"/>
+            </a:endParaRPr>
           </a:p>
         </p:txBody>
       </p:sp>
@@ -5606,7 +6649,7 @@
           <p:cNvPr id="69" name="Text 39">
             <a:extLst xmlns:a="http://schemas.openxmlformats.org/drawingml/2006/main">
               <a:ext uri="{FF2B5EF4-FFF2-40B4-BE49-F238E27FC236}">
-                <a16:creationId xmlns:a16="http://schemas.microsoft.com/office/drawing/2014/main" id="{18D453C0-AE82-4B20-AE3D-9BF740FA6757}"/>
+                <a16:creationId xmlns:a16="http://schemas.microsoft.com/office/drawing/2014/main" id="{FDC22CB6-97F7-474F-81C9-2F6717A94D42}"/>
               </a:ext>
             </a:extLst>
           </p:cNvPr>
@@ -5645,15 +6688,64 @@
           </a:bodyPr>
           <a:lstStyle xmlns:a="http://schemas.openxmlformats.org/drawingml/2006/main"/>
           <a:p xmlns:a="http://schemas.openxmlformats.org/drawingml/2006/main">
-            <a:r>
-              <a:rPr u="none">
+            <a:pPr defTabSz="914400">
+              <a:lnSpc>
+                <a:spcPct val="100000"/>
+              </a:lnSpc>
+              <a:buNone/>
+              <a:tabLst>
+                <a:tab pos="0" algn="l"/>
+              </a:tabLst>
+            </a:pPr>
+            <a:r>
+              <a:rPr sz="1190" b="0" u="none" strike="noStrike">
                 <a:solidFill>
                   <a:srgbClr val="26354B"/>
                 </a:solidFill>
-                <a:hlinkClick xmlns:r="http://schemas.openxmlformats.org/officeDocument/2006/relationships" r:id="R0525d0c000ba4bd4"/>
-              </a:rPr>
-              <a:t>OP-04, vlastník, stavy a hranice 2 hodin.</a:t>
-            </a:r>
+                <a:latin typeface="Arial"/>
+                <a:ea typeface="Arial"/>
+                <a:cs typeface="Arial"/>
+              </a:rPr>
+              <a:t>I4: ReservationService.cancelReservation</a:t>
+            </a:r>
+            <a:endParaRPr sz="1190" b="0" u="none" strike="noStrike">
+              <a:solidFill>
+                <a:srgbClr val="000000"/>
+              </a:solidFill>
+              <a:latin typeface="Arial"/>
+              <a:ea typeface="Arial"/>
+              <a:cs typeface="Arial"/>
+            </a:endParaRPr>
+          </a:p>
+          <a:p xmlns:a="http://schemas.openxmlformats.org/drawingml/2006/main">
+            <a:pPr defTabSz="914400">
+              <a:lnSpc>
+                <a:spcPct val="100000"/>
+              </a:lnSpc>
+              <a:buNone/>
+              <a:tabLst>
+                <a:tab pos="0" algn="l"/>
+              </a:tabLst>
+            </a:pPr>
+            <a:r>
+              <a:rPr sz="1190" b="0" u="none" strike="noStrike">
+                <a:solidFill>
+                  <a:srgbClr val="26354B"/>
+                </a:solidFill>
+                <a:latin typeface="Arial"/>
+                <a:ea typeface="Arial"/>
+                <a:cs typeface="Arial"/>
+              </a:rPr>
+              <a:t>T2: ReservationLifecycleApiTest</a:t>
+            </a:r>
+            <a:endParaRPr sz="1190" b="0" u="none" strike="noStrike">
+              <a:solidFill>
+                <a:srgbClr val="000000"/>
+              </a:solidFill>
+              <a:latin typeface="Arial"/>
+              <a:ea typeface="Arial"/>
+              <a:cs typeface="Arial"/>
+            </a:endParaRPr>
           </a:p>
         </p:txBody>
       </p:sp>
@@ -5662,7 +6754,7 @@
           <p:cNvPr id="70" name="Text 40">
             <a:extLst xmlns:a="http://schemas.openxmlformats.org/drawingml/2006/main">
               <a:ext uri="{FF2B5EF4-FFF2-40B4-BE49-F238E27FC236}">
-                <a16:creationId xmlns:a16="http://schemas.microsoft.com/office/drawing/2014/main" id="{FAD1F99B-56A1-4ED2-8948-CB2E5C66C652}"/>
+                <a16:creationId xmlns:a16="http://schemas.microsoft.com/office/drawing/2014/main" id="{535152CF-D8A0-4207-9723-0BDB0EEB96CC}"/>
               </a:ext>
             </a:extLst>
           </p:cNvPr>
@@ -5737,7 +6829,7 @@
           <p:cNvPr id="71" name="Text 41">
             <a:extLst xmlns:a="http://schemas.openxmlformats.org/drawingml/2006/main">
               <a:ext uri="{FF2B5EF4-FFF2-40B4-BE49-F238E27FC236}">
-                <a16:creationId xmlns:a16="http://schemas.microsoft.com/office/drawing/2014/main" id="{B0476980-B55F-4573-9758-6D54556A29C9}"/>
+                <a16:creationId xmlns:a16="http://schemas.microsoft.com/office/drawing/2014/main" id="{5BF2170D-8435-40FB-84FE-3BA19D7FF014}"/>
               </a:ext>
             </a:extLst>
           </p:cNvPr>
@@ -5776,12 +6868,64 @@
           </a:bodyPr>
           <a:lstStyle xmlns:a="http://schemas.openxmlformats.org/drawingml/2006/main"/>
           <a:p xmlns:a="http://schemas.openxmlformats.org/drawingml/2006/main">
-            <a:r>
-              <a:rPr>
-                <a:hlinkClick xmlns:r="http://schemas.openxmlformats.org/officeDocument/2006/relationships" r:id="R708d4e0b10224eb5"/>
+            <a:pPr defTabSz="914400">
+              <a:lnSpc>
+                <a:spcPct val="100000"/>
+              </a:lnSpc>
+              <a:buNone/>
+              <a:tabLst>
+                <a:tab pos="0" algn="l"/>
+              </a:tabLst>
+            </a:pPr>
+            <a:r>
+              <a:rPr sz="1190" b="0" u="none" strike="noStrike">
+                <a:solidFill>
+                  <a:srgbClr val="26354B"/>
+                </a:solidFill>
+                <a:latin typeface="Arial"/>
+                <a:ea typeface="Arial"/>
+                <a:cs typeface="Arial"/>
               </a:rPr>
               <a:t>YES</a:t>
             </a:r>
+            <a:endParaRPr sz="1190" b="0" u="none" strike="noStrike">
+              <a:solidFill>
+                <a:srgbClr val="000000"/>
+              </a:solidFill>
+              <a:latin typeface="Arial"/>
+              <a:ea typeface="Arial"/>
+              <a:cs typeface="Arial"/>
+            </a:endParaRPr>
+          </a:p>
+          <a:p xmlns:a="http://schemas.openxmlformats.org/drawingml/2006/main">
+            <a:pPr defTabSz="914400">
+              <a:lnSpc>
+                <a:spcPct val="100000"/>
+              </a:lnSpc>
+              <a:buNone/>
+              <a:tabLst>
+                <a:tab pos="0" algn="l"/>
+              </a:tabLst>
+            </a:pPr>
+            <a:r>
+              <a:rPr sz="1190" b="0" u="none" strike="noStrike">
+                <a:solidFill>
+                  <a:srgbClr val="26354B"/>
+                </a:solidFill>
+                <a:latin typeface="Arial"/>
+                <a:ea typeface="Arial"/>
+                <a:cs typeface="Arial"/>
+              </a:rPr>
+              <a:t>BR-02/03</a:t>
+            </a:r>
+            <a:endParaRPr sz="1190" b="0" u="none" strike="noStrike">
+              <a:solidFill>
+                <a:srgbClr val="000000"/>
+              </a:solidFill>
+              <a:latin typeface="Arial"/>
+              <a:ea typeface="Arial"/>
+              <a:cs typeface="Arial"/>
+            </a:endParaRPr>
           </a:p>
         </p:txBody>
       </p:sp>
@@ -5790,7 +6934,7 @@
           <p:cNvPr id="72" name="Text 42">
             <a:extLst xmlns:a="http://schemas.openxmlformats.org/drawingml/2006/main">
               <a:ext uri="{FF2B5EF4-FFF2-40B4-BE49-F238E27FC236}">
-                <a16:creationId xmlns:a16="http://schemas.microsoft.com/office/drawing/2014/main" id="{81B37E88-26FB-4736-B0B3-94782CB333DB}"/>
+                <a16:creationId xmlns:a16="http://schemas.microsoft.com/office/drawing/2014/main" id="{FBADE2C3-8FBB-4E43-9057-3C81F513C7AC}"/>
               </a:ext>
             </a:extLst>
           </p:cNvPr>
@@ -5829,12 +6973,64 @@
           </a:bodyPr>
           <a:lstStyle xmlns:a="http://schemas.openxmlformats.org/drawingml/2006/main"/>
           <a:p xmlns:a="http://schemas.openxmlformats.org/drawingml/2006/main">
-            <a:r>
-              <a:rPr>
-                <a:hlinkClick xmlns:r="http://schemas.openxmlformats.org/officeDocument/2006/relationships" r:id="R691f048b929b4e87"/>
+            <a:pPr defTabSz="914400">
+              <a:lnSpc>
+                <a:spcPct val="100000"/>
+              </a:lnSpc>
+              <a:buNone/>
+              <a:tabLst>
+                <a:tab pos="0" algn="l"/>
+              </a:tabLst>
+            </a:pPr>
+            <a:r>
+              <a:rPr sz="1190" b="0" u="none" strike="noStrike">
+                <a:solidFill>
+                  <a:srgbClr val="26354B"/>
+                </a:solidFill>
+                <a:latin typeface="Arial"/>
+                <a:ea typeface="Arial"/>
+                <a:cs typeface="Arial"/>
               </a:rPr>
               <a:t>YES</a:t>
             </a:r>
+            <a:endParaRPr sz="1190" b="0" u="none" strike="noStrike">
+              <a:solidFill>
+                <a:srgbClr val="000000"/>
+              </a:solidFill>
+              <a:latin typeface="Arial"/>
+              <a:ea typeface="Arial"/>
+              <a:cs typeface="Arial"/>
+            </a:endParaRPr>
+          </a:p>
+          <a:p xmlns:a="http://schemas.openxmlformats.org/drawingml/2006/main">
+            <a:pPr defTabSz="914400">
+              <a:lnSpc>
+                <a:spcPct val="100000"/>
+              </a:lnSpc>
+              <a:buNone/>
+              <a:tabLst>
+                <a:tab pos="0" algn="l"/>
+              </a:tabLst>
+            </a:pPr>
+            <a:r>
+              <a:rPr sz="1190" b="0" u="none" strike="noStrike">
+                <a:solidFill>
+                  <a:srgbClr val="26354B"/>
+                </a:solidFill>
+                <a:latin typeface="Arial"/>
+                <a:ea typeface="Arial"/>
+                <a:cs typeface="Arial"/>
+              </a:rPr>
+              <a:t>ADR-002</a:t>
+            </a:r>
+            <a:endParaRPr sz="1190" b="0" u="none" strike="noStrike">
+              <a:solidFill>
+                <a:srgbClr val="000000"/>
+              </a:solidFill>
+              <a:latin typeface="Arial"/>
+              <a:ea typeface="Arial"/>
+              <a:cs typeface="Arial"/>
+            </a:endParaRPr>
           </a:p>
         </p:txBody>
       </p:sp>
@@ -5843,7 +7039,7 @@
           <p:cNvPr id="73" name="Text 43">
             <a:extLst xmlns:a="http://schemas.openxmlformats.org/drawingml/2006/main">
               <a:ext uri="{FF2B5EF4-FFF2-40B4-BE49-F238E27FC236}">
-                <a16:creationId xmlns:a16="http://schemas.microsoft.com/office/drawing/2014/main" id="{51C69AA9-509B-4391-92A5-0B2B2740FEC8}"/>
+                <a16:creationId xmlns:a16="http://schemas.microsoft.com/office/drawing/2014/main" id="{288251F1-35ED-4560-9826-D90880F1F02B}"/>
               </a:ext>
             </a:extLst>
           </p:cNvPr>
@@ -5882,12 +7078,64 @@
           </a:bodyPr>
           <a:lstStyle xmlns:a="http://schemas.openxmlformats.org/drawingml/2006/main"/>
           <a:p xmlns:a="http://schemas.openxmlformats.org/drawingml/2006/main">
-            <a:r>
-              <a:rPr>
-                <a:hlinkClick xmlns:r="http://schemas.openxmlformats.org/officeDocument/2006/relationships" r:id="Rbbbbf87328b24d5f"/>
+            <a:pPr defTabSz="914400">
+              <a:lnSpc>
+                <a:spcPct val="100000"/>
+              </a:lnSpc>
+              <a:buNone/>
+              <a:tabLst>
+                <a:tab pos="0" algn="l"/>
+              </a:tabLst>
+            </a:pPr>
+            <a:r>
+              <a:rPr sz="1190" b="0" u="none" strike="noStrike">
+                <a:solidFill>
+                  <a:srgbClr val="26354B"/>
+                </a:solidFill>
+                <a:latin typeface="Arial"/>
+                <a:ea typeface="Arial"/>
+                <a:cs typeface="Arial"/>
               </a:rPr>
               <a:t>YES</a:t>
             </a:r>
+            <a:endParaRPr sz="1190" b="0" u="none" strike="noStrike">
+              <a:solidFill>
+                <a:srgbClr val="000000"/>
+              </a:solidFill>
+              <a:latin typeface="Arial"/>
+              <a:ea typeface="Arial"/>
+              <a:cs typeface="Arial"/>
+            </a:endParaRPr>
+          </a:p>
+          <a:p xmlns:a="http://schemas.openxmlformats.org/drawingml/2006/main">
+            <a:pPr defTabSz="914400">
+              <a:lnSpc>
+                <a:spcPct val="100000"/>
+              </a:lnSpc>
+              <a:buNone/>
+              <a:tabLst>
+                <a:tab pos="0" algn="l"/>
+              </a:tabLst>
+            </a:pPr>
+            <a:r>
+              <a:rPr sz="1190" b="0" u="none" strike="noStrike">
+                <a:solidFill>
+                  <a:srgbClr val="26354B"/>
+                </a:solidFill>
+                <a:latin typeface="Arial"/>
+                <a:ea typeface="Arial"/>
+                <a:cs typeface="Arial"/>
+              </a:rPr>
+              <a:t>DB / model</a:t>
+            </a:r>
+            <a:endParaRPr sz="1190" b="0" u="none" strike="noStrike">
+              <a:solidFill>
+                <a:srgbClr val="000000"/>
+              </a:solidFill>
+              <a:latin typeface="Arial"/>
+              <a:ea typeface="Arial"/>
+              <a:cs typeface="Arial"/>
+            </a:endParaRPr>
           </a:p>
         </p:txBody>
       </p:sp>
@@ -5896,7 +7144,7 @@
           <p:cNvPr id="74" name="Text 44">
             <a:extLst xmlns:a="http://schemas.openxmlformats.org/drawingml/2006/main">
               <a:ext uri="{FF2B5EF4-FFF2-40B4-BE49-F238E27FC236}">
-                <a16:creationId xmlns:a16="http://schemas.microsoft.com/office/drawing/2014/main" id="{CFB56E88-BEEC-4E3C-B144-9926D5F89CF5}"/>
+                <a16:creationId xmlns:a16="http://schemas.microsoft.com/office/drawing/2014/main" id="{A213B248-2B28-4F37-A8DE-C066D684717A}"/>
               </a:ext>
             </a:extLst>
           </p:cNvPr>
@@ -5935,12 +7183,64 @@
           </a:bodyPr>
           <a:lstStyle xmlns:a="http://schemas.openxmlformats.org/drawingml/2006/main"/>
           <a:p xmlns:a="http://schemas.openxmlformats.org/drawingml/2006/main">
-            <a:r>
-              <a:rPr>
-                <a:hlinkClick xmlns:r="http://schemas.openxmlformats.org/officeDocument/2006/relationships" r:id="R242047a0452440a7"/>
+            <a:pPr defTabSz="914400">
+              <a:lnSpc>
+                <a:spcPct val="100000"/>
+              </a:lnSpc>
+              <a:buNone/>
+              <a:tabLst>
+                <a:tab pos="0" algn="l"/>
+              </a:tabLst>
+            </a:pPr>
+            <a:r>
+              <a:rPr sz="1190" b="0" u="none" strike="noStrike">
+                <a:solidFill>
+                  <a:srgbClr val="26354B"/>
+                </a:solidFill>
+                <a:latin typeface="Arial"/>
+                <a:ea typeface="Arial"/>
+                <a:cs typeface="Arial"/>
               </a:rPr>
               <a:t>YES</a:t>
             </a:r>
+            <a:endParaRPr sz="1190" b="0" u="none" strike="noStrike">
+              <a:solidFill>
+                <a:srgbClr val="000000"/>
+              </a:solidFill>
+              <a:latin typeface="Arial"/>
+              <a:ea typeface="Arial"/>
+              <a:cs typeface="Arial"/>
+            </a:endParaRPr>
+          </a:p>
+          <a:p xmlns:a="http://schemas.openxmlformats.org/drawingml/2006/main">
+            <a:pPr defTabSz="914400">
+              <a:lnSpc>
+                <a:spcPct val="100000"/>
+              </a:lnSpc>
+              <a:buNone/>
+              <a:tabLst>
+                <a:tab pos="0" algn="l"/>
+              </a:tabLst>
+            </a:pPr>
+            <a:r>
+              <a:rPr sz="1190" b="0" u="none" strike="noStrike">
+                <a:solidFill>
+                  <a:srgbClr val="26354B"/>
+                </a:solidFill>
+                <a:latin typeface="Arial"/>
+                <a:ea typeface="Arial"/>
+                <a:cs typeface="Arial"/>
+              </a:rPr>
+              <a:t>T4</a:t>
+            </a:r>
+            <a:endParaRPr sz="1190" b="0" u="none" strike="noStrike">
+              <a:solidFill>
+                <a:srgbClr val="000000"/>
+              </a:solidFill>
+              <a:latin typeface="Arial"/>
+              <a:ea typeface="Arial"/>
+              <a:cs typeface="Arial"/>
+            </a:endParaRPr>
           </a:p>
         </p:txBody>
       </p:sp>
@@ -5949,7 +7249,7 @@
           <p:cNvPr id="75" name="Text 45">
             <a:extLst xmlns:a="http://schemas.openxmlformats.org/drawingml/2006/main">
               <a:ext uri="{FF2B5EF4-FFF2-40B4-BE49-F238E27FC236}">
-                <a16:creationId xmlns:a16="http://schemas.microsoft.com/office/drawing/2014/main" id="{7F663504-13EE-47C1-86B6-ED9CBEDB43B6}"/>
+                <a16:creationId xmlns:a16="http://schemas.microsoft.com/office/drawing/2014/main" id="{30191C0E-73E3-4584-8B86-058F4ADB69F3}"/>
               </a:ext>
             </a:extLst>
           </p:cNvPr>
@@ -5988,15 +7288,64 @@
           </a:bodyPr>
           <a:lstStyle xmlns:a="http://schemas.openxmlformats.org/drawingml/2006/main"/>
           <a:p xmlns:a="http://schemas.openxmlformats.org/drawingml/2006/main">
-            <a:r>
-              <a:rPr u="none">
+            <a:pPr defTabSz="914400">
+              <a:lnSpc>
+                <a:spcPct val="100000"/>
+              </a:lnSpc>
+              <a:buNone/>
+              <a:tabLst>
+                <a:tab pos="0" algn="l"/>
+              </a:tabLst>
+            </a:pPr>
+            <a:r>
+              <a:rPr sz="1190" b="0" u="none" strike="noStrike">
                 <a:solidFill>
                   <a:srgbClr val="26354B"/>
                 </a:solidFill>
-                <a:hlinkClick xmlns:r="http://schemas.openxmlformats.org/officeDocument/2006/relationships" r:id="R774c8280645345d3"/>
-              </a:rPr>
-              <a:t>Zákaz překryvu, kapacita, souběžné požadavky.</a:t>
-            </a:r>
+                <a:latin typeface="Arial"/>
+                <a:ea typeface="Arial"/>
+                <a:cs typeface="Arial"/>
+              </a:rPr>
+              <a:t>T4: ReservationTest + souběh v T2 a T3</a:t>
+            </a:r>
+            <a:endParaRPr sz="1190" b="0" u="none" strike="noStrike">
+              <a:solidFill>
+                <a:srgbClr val="000000"/>
+              </a:solidFill>
+              <a:latin typeface="Arial"/>
+              <a:ea typeface="Arial"/>
+              <a:cs typeface="Arial"/>
+            </a:endParaRPr>
+          </a:p>
+          <a:p xmlns:a="http://schemas.openxmlformats.org/drawingml/2006/main">
+            <a:pPr defTabSz="914400">
+              <a:lnSpc>
+                <a:spcPct val="100000"/>
+              </a:lnSpc>
+              <a:buNone/>
+              <a:tabLst>
+                <a:tab pos="0" algn="l"/>
+              </a:tabLst>
+            </a:pPr>
+            <a:r>
+              <a:rPr sz="1190" b="0" u="none" strike="noStrike">
+                <a:solidFill>
+                  <a:srgbClr val="26354B"/>
+                </a:solidFill>
+                <a:latin typeface="Arial"/>
+                <a:ea typeface="Arial"/>
+                <a:cs typeface="Arial"/>
+              </a:rPr>
+              <a:t>DB: V1__init.sql, model: Reservation.java</a:t>
+            </a:r>
+            <a:endParaRPr sz="1190" b="0" u="none" strike="noStrike">
+              <a:solidFill>
+                <a:srgbClr val="000000"/>
+              </a:solidFill>
+              <a:latin typeface="Arial"/>
+              <a:ea typeface="Arial"/>
+              <a:cs typeface="Arial"/>
+            </a:endParaRPr>
           </a:p>
         </p:txBody>
       </p:sp>
@@ -6005,7 +7354,7 @@
           <p:cNvPr id="76" name="Text 46">
             <a:extLst xmlns:a="http://schemas.openxmlformats.org/drawingml/2006/main">
               <a:ext uri="{FF2B5EF4-FFF2-40B4-BE49-F238E27FC236}">
-                <a16:creationId xmlns:a16="http://schemas.microsoft.com/office/drawing/2014/main" id="{DE07F658-551A-49AC-AC90-43D2DCC669D6}"/>
+                <a16:creationId xmlns:a16="http://schemas.microsoft.com/office/drawing/2014/main" id="{92E46BB0-5754-4F7A-996F-C0CDBC440290}"/>
               </a:ext>
             </a:extLst>
           </p:cNvPr>
@@ -6080,7 +7429,7 @@
           <p:cNvPr id="77" name="Text 47">
             <a:extLst xmlns:a="http://schemas.openxmlformats.org/drawingml/2006/main">
               <a:ext uri="{FF2B5EF4-FFF2-40B4-BE49-F238E27FC236}">
-                <a16:creationId xmlns:a16="http://schemas.microsoft.com/office/drawing/2014/main" id="{4B5E0235-546D-4C6A-A93F-711AB4ED0199}"/>
+                <a16:creationId xmlns:a16="http://schemas.microsoft.com/office/drawing/2014/main" id="{49803B2B-0A19-4FFA-9CF4-9FB3C17B3641}"/>
               </a:ext>
             </a:extLst>
           </p:cNvPr>
@@ -6119,15 +7468,64 @@
           </a:bodyPr>
           <a:lstStyle xmlns:a="http://schemas.openxmlformats.org/drawingml/2006/main"/>
           <a:p xmlns:a="http://schemas.openxmlformats.org/drawingml/2006/main">
-            <a:r>
-              <a:rPr u="none">
+            <a:pPr defTabSz="914400">
+              <a:lnSpc>
+                <a:spcPct val="100000"/>
+              </a:lnSpc>
+              <a:buNone/>
+              <a:tabLst>
+                <a:tab pos="0" algn="l"/>
+              </a:tabLst>
+            </a:pPr>
+            <a:r>
+              <a:rPr sz="1190" b="0" u="none" strike="noStrike">
                 <a:solidFill>
                   <a:srgbClr val="26354B"/>
                 </a:solidFill>
-                <a:hlinkClick xmlns:r="http://schemas.openxmlformats.org/officeDocument/2006/relationships" r:id="R914f5ed71d4c4f17"/>
+                <a:latin typeface="Arial"/>
+                <a:ea typeface="Arial"/>
+                <a:cs typeface="Arial"/>
               </a:rPr>
               <a:t>PARTLY</a:t>
             </a:r>
+            <a:endParaRPr sz="1190" b="0" u="none" strike="noStrike">
+              <a:solidFill>
+                <a:srgbClr val="000000"/>
+              </a:solidFill>
+              <a:latin typeface="Arial"/>
+              <a:ea typeface="Arial"/>
+              <a:cs typeface="Arial"/>
+            </a:endParaRPr>
+          </a:p>
+          <a:p xmlns:a="http://schemas.openxmlformats.org/drawingml/2006/main">
+            <a:pPr defTabSz="914400">
+              <a:lnSpc>
+                <a:spcPct val="100000"/>
+              </a:lnSpc>
+              <a:buNone/>
+              <a:tabLst>
+                <a:tab pos="0" algn="l"/>
+              </a:tabLst>
+            </a:pPr>
+            <a:r>
+              <a:rPr sz="1190" b="0" u="none" strike="noStrike">
+                <a:solidFill>
+                  <a:srgbClr val="26354B"/>
+                </a:solidFill>
+                <a:latin typeface="Arial"/>
+                <a:ea typeface="Arial"/>
+                <a:cs typeface="Arial"/>
+              </a:rPr>
+              <a:t>Project Frame</a:t>
+            </a:r>
+            <a:endParaRPr sz="1190" b="0" u="none" strike="noStrike">
+              <a:solidFill>
+                <a:srgbClr val="000000"/>
+              </a:solidFill>
+              <a:latin typeface="Arial"/>
+              <a:ea typeface="Arial"/>
+              <a:cs typeface="Arial"/>
+            </a:endParaRPr>
           </a:p>
         </p:txBody>
       </p:sp>
@@ -6136,7 +7534,7 @@
           <p:cNvPr id="78" name="Text 48">
             <a:extLst xmlns:a="http://schemas.openxmlformats.org/drawingml/2006/main">
               <a:ext uri="{FF2B5EF4-FFF2-40B4-BE49-F238E27FC236}">
-                <a16:creationId xmlns:a16="http://schemas.microsoft.com/office/drawing/2014/main" id="{618D51A4-84D8-41EF-8D4D-604A8E161A92}"/>
+                <a16:creationId xmlns:a16="http://schemas.microsoft.com/office/drawing/2014/main" id="{1D67FB50-9AFD-4395-9C8F-8E6659AE0407}"/>
               </a:ext>
             </a:extLst>
           </p:cNvPr>
@@ -6175,15 +7573,64 @@
           </a:bodyPr>
           <a:lstStyle xmlns:a="http://schemas.openxmlformats.org/drawingml/2006/main"/>
           <a:p xmlns:a="http://schemas.openxmlformats.org/drawingml/2006/main">
-            <a:r>
-              <a:rPr u="none">
+            <a:pPr defTabSz="914400">
+              <a:lnSpc>
+                <a:spcPct val="100000"/>
+              </a:lnSpc>
+              <a:buNone/>
+              <a:tabLst>
+                <a:tab pos="0" algn="l"/>
+              </a:tabLst>
+            </a:pPr>
+            <a:r>
+              <a:rPr sz="1190" b="0" u="none" strike="noStrike">
                 <a:solidFill>
                   <a:srgbClr val="26354B"/>
                 </a:solidFill>
-                <a:hlinkClick xmlns:r="http://schemas.openxmlformats.org/officeDocument/2006/relationships" r:id="R7b6f5c6b99d14793"/>
+                <a:latin typeface="Arial"/>
+                <a:ea typeface="Arial"/>
+                <a:cs typeface="Arial"/>
               </a:rPr>
               <a:t>NO</a:t>
             </a:r>
+            <a:endParaRPr sz="1190" b="0" u="none" strike="noStrike">
+              <a:solidFill>
+                <a:srgbClr val="000000"/>
+              </a:solidFill>
+              <a:latin typeface="Arial"/>
+              <a:ea typeface="Arial"/>
+              <a:cs typeface="Arial"/>
+            </a:endParaRPr>
+          </a:p>
+          <a:p xmlns:a="http://schemas.openxmlformats.org/drawingml/2006/main">
+            <a:pPr defTabSz="914400">
+              <a:lnSpc>
+                <a:spcPct val="100000"/>
+              </a:lnSpc>
+              <a:buNone/>
+              <a:tabLst>
+                <a:tab pos="0" algn="l"/>
+              </a:tabLst>
+            </a:pPr>
+            <a:r>
+              <a:rPr sz="1190" b="0" u="none" strike="noStrike">
+                <a:solidFill>
+                  <a:srgbClr val="26354B"/>
+                </a:solidFill>
+                <a:latin typeface="Arial"/>
+                <a:ea typeface="Arial"/>
+                <a:cs typeface="Arial"/>
+              </a:rPr>
+              <a:t>F1</a:t>
+            </a:r>
+            <a:endParaRPr sz="1190" b="0" u="none" strike="noStrike">
+              <a:solidFill>
+                <a:srgbClr val="000000"/>
+              </a:solidFill>
+              <a:latin typeface="Arial"/>
+              <a:ea typeface="Arial"/>
+              <a:cs typeface="Arial"/>
+            </a:endParaRPr>
           </a:p>
         </p:txBody>
       </p:sp>
@@ -6192,7 +7639,7 @@
           <p:cNvPr id="79" name="Text 49">
             <a:extLst xmlns:a="http://schemas.openxmlformats.org/drawingml/2006/main">
               <a:ext uri="{FF2B5EF4-FFF2-40B4-BE49-F238E27FC236}">
-                <a16:creationId xmlns:a16="http://schemas.microsoft.com/office/drawing/2014/main" id="{228F5621-4651-4FEC-9024-B7E2FF959257}"/>
+                <a16:creationId xmlns:a16="http://schemas.microsoft.com/office/drawing/2014/main" id="{FF6CEFD0-FE39-4201-9569-CA9649B83EE8}"/>
               </a:ext>
             </a:extLst>
           </p:cNvPr>
@@ -6231,15 +7678,64 @@
           </a:bodyPr>
           <a:lstStyle xmlns:a="http://schemas.openxmlformats.org/drawingml/2006/main"/>
           <a:p xmlns:a="http://schemas.openxmlformats.org/drawingml/2006/main">
-            <a:r>
-              <a:rPr u="none">
+            <a:pPr defTabSz="914400">
+              <a:lnSpc>
+                <a:spcPct val="100000"/>
+              </a:lnSpc>
+              <a:buNone/>
+              <a:tabLst>
+                <a:tab pos="0" algn="l"/>
+              </a:tabLst>
+            </a:pPr>
+            <a:r>
+              <a:rPr sz="1190" b="0" u="none" strike="noStrike">
                 <a:solidFill>
                   <a:srgbClr val="26354B"/>
                 </a:solidFill>
-                <a:hlinkClick xmlns:r="http://schemas.openxmlformats.org/officeDocument/2006/relationships" r:id="Rb434a570b90c46c7"/>
+                <a:latin typeface="Arial"/>
+                <a:ea typeface="Arial"/>
+                <a:cs typeface="Arial"/>
               </a:rPr>
               <a:t>NO</a:t>
             </a:r>
+            <a:endParaRPr sz="1190" b="0" u="none" strike="noStrike">
+              <a:solidFill>
+                <a:srgbClr val="000000"/>
+              </a:solidFill>
+              <a:latin typeface="Arial"/>
+              <a:ea typeface="Arial"/>
+              <a:cs typeface="Arial"/>
+            </a:endParaRPr>
+          </a:p>
+          <a:p xmlns:a="http://schemas.openxmlformats.org/drawingml/2006/main">
+            <a:pPr defTabSz="914400">
+              <a:lnSpc>
+                <a:spcPct val="100000"/>
+              </a:lnSpc>
+              <a:buNone/>
+              <a:tabLst>
+                <a:tab pos="0" algn="l"/>
+              </a:tabLst>
+            </a:pPr>
+            <a:r>
+              <a:rPr sz="1190" b="0" u="none" strike="noStrike">
+                <a:solidFill>
+                  <a:srgbClr val="26354B"/>
+                </a:solidFill>
+                <a:latin typeface="Arial"/>
+                <a:ea typeface="Arial"/>
+                <a:cs typeface="Arial"/>
+              </a:rPr>
+              <a:t>F1</a:t>
+            </a:r>
+            <a:endParaRPr sz="1190" b="0" u="none" strike="noStrike">
+              <a:solidFill>
+                <a:srgbClr val="000000"/>
+              </a:solidFill>
+              <a:latin typeface="Arial"/>
+              <a:ea typeface="Arial"/>
+              <a:cs typeface="Arial"/>
+            </a:endParaRPr>
           </a:p>
         </p:txBody>
       </p:sp>
@@ -6248,7 +7744,7 @@
           <p:cNvPr id="80" name="Text 50">
             <a:extLst xmlns:a="http://schemas.openxmlformats.org/drawingml/2006/main">
               <a:ext uri="{FF2B5EF4-FFF2-40B4-BE49-F238E27FC236}">
-                <a16:creationId xmlns:a16="http://schemas.microsoft.com/office/drawing/2014/main" id="{A787393B-3A33-4671-AF67-31BEBE0D9B86}"/>
+                <a16:creationId xmlns:a16="http://schemas.microsoft.com/office/drawing/2014/main" id="{74A1C44D-0902-40F0-8268-76883BA4F692}"/>
               </a:ext>
             </a:extLst>
           </p:cNvPr>
@@ -6287,15 +7783,64 @@
           </a:bodyPr>
           <a:lstStyle xmlns:a="http://schemas.openxmlformats.org/drawingml/2006/main"/>
           <a:p xmlns:a="http://schemas.openxmlformats.org/drawingml/2006/main">
-            <a:r>
-              <a:rPr u="none">
+            <a:pPr defTabSz="914400">
+              <a:lnSpc>
+                <a:spcPct val="100000"/>
+              </a:lnSpc>
+              <a:buNone/>
+              <a:tabLst>
+                <a:tab pos="0" algn="l"/>
+              </a:tabLst>
+            </a:pPr>
+            <a:r>
+              <a:rPr sz="1190" b="0" u="none" strike="noStrike">
                 <a:solidFill>
                   <a:srgbClr val="26354B"/>
                 </a:solidFill>
-                <a:hlinkClick xmlns:r="http://schemas.openxmlformats.org/officeDocument/2006/relationships" r:id="Rc0891c9b0cb14aca"/>
+                <a:latin typeface="Arial"/>
+                <a:ea typeface="Arial"/>
+                <a:cs typeface="Arial"/>
               </a:rPr>
               <a:t>NO</a:t>
             </a:r>
+            <a:endParaRPr sz="1190" b="0" u="none" strike="noStrike">
+              <a:solidFill>
+                <a:srgbClr val="000000"/>
+              </a:solidFill>
+              <a:latin typeface="Arial"/>
+              <a:ea typeface="Arial"/>
+              <a:cs typeface="Arial"/>
+            </a:endParaRPr>
+          </a:p>
+          <a:p xmlns:a="http://schemas.openxmlformats.org/drawingml/2006/main">
+            <a:pPr defTabSz="914400">
+              <a:lnSpc>
+                <a:spcPct val="100000"/>
+              </a:lnSpc>
+              <a:buNone/>
+              <a:tabLst>
+                <a:tab pos="0" algn="l"/>
+              </a:tabLst>
+            </a:pPr>
+            <a:r>
+              <a:rPr sz="1190" b="0" u="none" strike="noStrike">
+                <a:solidFill>
+                  <a:srgbClr val="26354B"/>
+                </a:solidFill>
+                <a:latin typeface="Arial"/>
+                <a:ea typeface="Arial"/>
+                <a:cs typeface="Arial"/>
+              </a:rPr>
+              <a:t>F1</a:t>
+            </a:r>
+            <a:endParaRPr sz="1190" b="0" u="none" strike="noStrike">
+              <a:solidFill>
+                <a:srgbClr val="000000"/>
+              </a:solidFill>
+              <a:latin typeface="Arial"/>
+              <a:ea typeface="Arial"/>
+              <a:cs typeface="Arial"/>
+            </a:endParaRPr>
           </a:p>
         </p:txBody>
       </p:sp>
@@ -6304,7 +7849,7 @@
           <p:cNvPr id="81" name="Text 51">
             <a:extLst xmlns:a="http://schemas.openxmlformats.org/drawingml/2006/main">
               <a:ext uri="{FF2B5EF4-FFF2-40B4-BE49-F238E27FC236}">
-                <a16:creationId xmlns:a16="http://schemas.microsoft.com/office/drawing/2014/main" id="{CF147089-C949-43F4-A329-C4E3FCA81BBD}"/>
+                <a16:creationId xmlns:a16="http://schemas.microsoft.com/office/drawing/2014/main" id="{B17D9A6A-DEE2-4D36-AF5D-E4C65107FA2E}"/>
               </a:ext>
             </a:extLst>
           </p:cNvPr>
@@ -6343,15 +7888,64 @@
           </a:bodyPr>
           <a:lstStyle xmlns:a="http://schemas.openxmlformats.org/drawingml/2006/main"/>
           <a:p xmlns:a="http://schemas.openxmlformats.org/drawingml/2006/main">
-            <a:r>
-              <a:rPr u="none">
+            <a:pPr defTabSz="914400">
+              <a:lnSpc>
+                <a:spcPct val="100000"/>
+              </a:lnSpc>
+              <a:buNone/>
+              <a:tabLst>
+                <a:tab pos="0" algn="l"/>
+              </a:tabLst>
+            </a:pPr>
+            <a:r>
+              <a:rPr sz="1190" b="0" u="none" strike="noStrike">
                 <a:solidFill>
                   <a:srgbClr val="26354B"/>
                 </a:solidFill>
-                <a:hlinkClick xmlns:r="http://schemas.openxmlformats.org/officeDocument/2006/relationships" r:id="R1170023617f646a7"/>
-              </a:rPr>
-              <a:t>F1 OPEN. Tlak je popsán, kritérium a měření chybí.</a:t>
-            </a:r>
+                <a:latin typeface="Arial"/>
+                <a:ea typeface="Arial"/>
+                <a:cs typeface="Arial"/>
+              </a:rPr>
+              <a:t>intent-and-change.md: Changeability</a:t>
+            </a:r>
+            <a:endParaRPr sz="1190" b="0" u="none" strike="noStrike">
+              <a:solidFill>
+                <a:srgbClr val="000000"/>
+              </a:solidFill>
+              <a:latin typeface="Arial"/>
+              <a:ea typeface="Arial"/>
+              <a:cs typeface="Arial"/>
+            </a:endParaRPr>
+          </a:p>
+          <a:p xmlns:a="http://schemas.openxmlformats.org/drawingml/2006/main">
+            <a:pPr defTabSz="914400">
+              <a:lnSpc>
+                <a:spcPct val="100000"/>
+              </a:lnSpc>
+              <a:buNone/>
+              <a:tabLst>
+                <a:tab pos="0" algn="l"/>
+              </a:tabLst>
+            </a:pPr>
+            <a:r>
+              <a:rPr sz="1190" b="0" u="none" strike="noStrike">
+                <a:solidFill>
+                  <a:srgbClr val="26354B"/>
+                </a:solidFill>
+                <a:latin typeface="Arial"/>
+                <a:ea typeface="Arial"/>
+                <a:cs typeface="Arial"/>
+              </a:rPr>
+              <a:t>F1 OPEN. Kritérium a měření chybí.</a:t>
+            </a:r>
+            <a:endParaRPr sz="1190" b="0" u="none" strike="noStrike">
+              <a:solidFill>
+                <a:srgbClr val="000000"/>
+              </a:solidFill>
+              <a:latin typeface="Arial"/>
+              <a:ea typeface="Arial"/>
+              <a:cs typeface="Arial"/>
+            </a:endParaRPr>
           </a:p>
         </p:txBody>
       </p:sp>
@@ -6360,7 +7954,7 @@
           <p:cNvPr id="82" name="Text 52">
             <a:extLst xmlns:a="http://schemas.openxmlformats.org/drawingml/2006/main">
               <a:ext uri="{FF2B5EF4-FFF2-40B4-BE49-F238E27FC236}">
-                <a16:creationId xmlns:a16="http://schemas.microsoft.com/office/drawing/2014/main" id="{9D8141C2-A4E2-44BA-84A8-A44092B8226C}"/>
+                <a16:creationId xmlns:a16="http://schemas.microsoft.com/office/drawing/2014/main" id="{ABB48152-4AB1-4451-ABD1-D8D790A78083}"/>
               </a:ext>
             </a:extLst>
           </p:cNvPr>
@@ -6435,7 +8029,7 @@
           <p:cNvPr id="83" name="Text 53">
             <a:extLst xmlns:a="http://schemas.openxmlformats.org/drawingml/2006/main">
               <a:ext uri="{FF2B5EF4-FFF2-40B4-BE49-F238E27FC236}">
-                <a16:creationId xmlns:a16="http://schemas.microsoft.com/office/drawing/2014/main" id="{D88FF533-F014-4B7D-B27F-191C49EA07E6}"/>
+                <a16:creationId xmlns:a16="http://schemas.microsoft.com/office/drawing/2014/main" id="{A44D7FB5-2F91-4DB8-B417-F127D6E13066}"/>
               </a:ext>
             </a:extLst>
           </p:cNvPr>
@@ -6474,22 +8068,41 @@
           </a:bodyPr>
           <a:lstStyle xmlns:a="http://schemas.openxmlformats.org/drawingml/2006/main"/>
           <a:p xmlns:a="http://schemas.openxmlformats.org/drawingml/2006/main">
-            <a:r>
-              <a:rPr u="none">
+            <a:pPr defTabSz="914400">
+              <a:lnSpc>
+                <a:spcPct val="100000"/>
+              </a:lnSpc>
+              <a:buNone/>
+              <a:tabLst>
+                <a:tab pos="0" algn="l"/>
+              </a:tabLst>
+            </a:pPr>
+            <a:r>
+              <a:rPr sz="1260" b="0" u="none" strike="noStrike">
                 <a:solidFill>
                   <a:srgbClr val="26354B"/>
                 </a:solidFill>
-                <a:hlinkClick xmlns:r="http://schemas.openxmlformats.org/officeDocument/2006/relationships" r:id="R56d548be5065455a"/>
+                <a:latin typeface="Arial"/>
+                <a:ea typeface="Arial"/>
+                <a:cs typeface="Arial"/>
               </a:rPr>
               <a:t>F1 ACCEPTED / OPEN. Úspěšné funkční testy nenahrazují chybějící C04.</a:t>
             </a:r>
+            <a:endParaRPr sz="1260" b="0" u="none" strike="noStrike">
+              <a:solidFill>
+                <a:srgbClr val="000000"/>
+              </a:solidFill>
+              <a:latin typeface="Arial"/>
+              <a:ea typeface="Arial"/>
+              <a:cs typeface="Arial"/>
+            </a:endParaRPr>
           </a:p>
         </p:txBody>
       </p:sp>
     </p:spTree>
     <p:extLst>
       <p:ext uri="{BB962C8B-B14F-4D97-AF65-F5344CB8AC3E}">
-        <p14:creationId xmlns:p14="http://schemas.microsoft.com/office/powerpoint/2010/main" val="621840655"/>
+        <p14:creationId xmlns:p14="http://schemas.microsoft.com/office/powerpoint/2010/main" val="500267642"/>
       </p:ext>
     </p:extLst>
   </p:cSld>
@@ -6513,7 +8126,7 @@
           <p:cNvPr id="84" name="Shape 0">
             <a:extLst xmlns:a="http://schemas.openxmlformats.org/drawingml/2006/main">
               <a:ext uri="{FF2B5EF4-FFF2-40B4-BE49-F238E27FC236}">
-                <a16:creationId xmlns:a16="http://schemas.microsoft.com/office/drawing/2014/main" id="{455FBFC6-5A08-422D-BE80-A29223D1FBAA}"/>
+                <a16:creationId xmlns:a16="http://schemas.microsoft.com/office/drawing/2014/main" id="{AF5C2754-E9D0-4DEB-AC3C-18F46E8D7AC2}"/>
               </a:ext>
             </a:extLst>
           </p:cNvPr>
@@ -6570,7 +8183,7 @@
           <p:cNvPr id="85" name="Text 1">
             <a:extLst xmlns:a="http://schemas.openxmlformats.org/drawingml/2006/main">
               <a:ext uri="{FF2B5EF4-FFF2-40B4-BE49-F238E27FC236}">
-                <a16:creationId xmlns:a16="http://schemas.microsoft.com/office/drawing/2014/main" id="{ED82DDE0-BEC2-420B-ADD2-73FD6099C208}"/>
+                <a16:creationId xmlns:a16="http://schemas.microsoft.com/office/drawing/2014/main" id="{4C0E9807-71E8-4CA2-8C99-14FEA240F7D1}"/>
               </a:ext>
             </a:extLst>
           </p:cNvPr>
@@ -6640,7 +8253,7 @@
           <p:cNvPr id="86" name="Text 2">
             <a:extLst xmlns:a="http://schemas.openxmlformats.org/drawingml/2006/main">
               <a:ext uri="{FF2B5EF4-FFF2-40B4-BE49-F238E27FC236}">
-                <a16:creationId xmlns:a16="http://schemas.microsoft.com/office/drawing/2014/main" id="{C8A356D4-ED38-4C48-A60F-488CA8969CA6}"/>
+                <a16:creationId xmlns:a16="http://schemas.microsoft.com/office/drawing/2014/main" id="{AEB6714A-6929-4B34-ADD8-CDA955444C2F}"/>
               </a:ext>
             </a:extLst>
           </p:cNvPr>
@@ -6710,7 +8323,7 @@
           <p:cNvPr id="87" name="Text 3">
             <a:extLst xmlns:a="http://schemas.openxmlformats.org/drawingml/2006/main">
               <a:ext uri="{FF2B5EF4-FFF2-40B4-BE49-F238E27FC236}">
-                <a16:creationId xmlns:a16="http://schemas.microsoft.com/office/drawing/2014/main" id="{B4A207EA-0E5E-4F7C-84CD-EB6340E1832E}"/>
+                <a16:creationId xmlns:a16="http://schemas.microsoft.com/office/drawing/2014/main" id="{C6BDDE7F-FF70-4913-A21E-24EA93F4610D}"/>
               </a:ext>
             </a:extLst>
           </p:cNvPr>
@@ -6762,7 +8375,7 @@
                 <a:ea typeface="Arial"/>
                 <a:cs typeface="Arial"/>
               </a:rPr>
-              <a:t>PLÁN A KAPACITY</a:t>
+              <a:t>DOKONČENÉ ČÁSTI A ZBÝVAJÍCÍ PRÁCE</a:t>
             </a:r>
             <a:endParaRPr sz="2650" b="0" u="none" strike="noStrike">
               <a:solidFill>
@@ -6780,7 +8393,7 @@
           <p:cNvPr id="88" name="Text 4">
             <a:extLst xmlns:a="http://schemas.openxmlformats.org/drawingml/2006/main">
               <a:ext uri="{FF2B5EF4-FFF2-40B4-BE49-F238E27FC236}">
-                <a16:creationId xmlns:a16="http://schemas.microsoft.com/office/drawing/2014/main" id="{A36EC135-806C-46DB-B6D7-75AFC0692676}"/>
+                <a16:creationId xmlns:a16="http://schemas.microsoft.com/office/drawing/2014/main" id="{9801CEB0-CAA7-4DD5-A8AB-74580CEFB64F}"/>
               </a:ext>
             </a:extLst>
           </p:cNvPr>
@@ -6832,7 +8445,7 @@
                 <a:ea typeface="Arial"/>
                 <a:cs typeface="Arial"/>
               </a:rPr>
-              <a:t>Ověření je hotové. Termín obhajoby, kapacity a uzavření C04 zůstávají otevřené.</a:t>
+              <a:t>Dokumentace a funkční ověření jsou připravené. Zbývající práce se týká C04.</a:t>
             </a:r>
             <a:endParaRPr sz="1210" b="0" u="none" strike="noStrike">
               <a:solidFill>
@@ -6850,7 +8463,7 @@
           <p:cNvPr id="89" name="Text 5">
             <a:extLst xmlns:a="http://schemas.openxmlformats.org/drawingml/2006/main">
               <a:ext uri="{FF2B5EF4-FFF2-40B4-BE49-F238E27FC236}">
-                <a16:creationId xmlns:a16="http://schemas.microsoft.com/office/drawing/2014/main" id="{0FC09D43-D29A-49C2-878C-C10AAC2A42BF}"/>
+                <a16:creationId xmlns:a16="http://schemas.microsoft.com/office/drawing/2014/main" id="{848E3B92-94BA-437B-9367-9A3D9B581C66}"/>
               </a:ext>
             </a:extLst>
           </p:cNvPr>
@@ -6925,7 +8538,7 @@
           <p:cNvPr id="90" name="Text 6">
             <a:extLst xmlns:a="http://schemas.openxmlformats.org/drawingml/2006/main">
               <a:ext uri="{FF2B5EF4-FFF2-40B4-BE49-F238E27FC236}">
-                <a16:creationId xmlns:a16="http://schemas.microsoft.com/office/drawing/2014/main" id="{FD16784D-FD6E-4FAF-867D-72EAB3E06448}"/>
+                <a16:creationId xmlns:a16="http://schemas.microsoft.com/office/drawing/2014/main" id="{2A33FD5F-9244-47EC-B4EF-F1BAA54B6D81}"/>
               </a:ext>
             </a:extLst>
           </p:cNvPr>
@@ -6982,7 +8595,7 @@
                 <a:ea typeface="Arial"/>
                 <a:cs typeface="Arial"/>
               </a:rPr>
-              <a:t>BASELINE: c08-report-2026-10-30</a:t>
+              <a:t>BASELINE: c08-report-2026-10-30-v4</a:t>
             </a:r>
             <a:endParaRPr sz="1040" b="0" u="none" strike="noStrike">
               <a:solidFill>
@@ -7000,7 +8613,7 @@
           <p:cNvPr id="91" name="Text 7">
             <a:extLst xmlns:a="http://schemas.openxmlformats.org/drawingml/2006/main">
               <a:ext uri="{FF2B5EF4-FFF2-40B4-BE49-F238E27FC236}">
-                <a16:creationId xmlns:a16="http://schemas.microsoft.com/office/drawing/2014/main" id="{E2FDC406-B8E3-4E06-BEC5-0D0DCA2583BA}"/>
+                <a16:creationId xmlns:a16="http://schemas.microsoft.com/office/drawing/2014/main" id="{6A838B27-2610-4A5B-9BEC-4DFDD75F5351}"/>
               </a:ext>
             </a:extLst>
           </p:cNvPr>
@@ -7075,7 +8688,7 @@
           <p:cNvPr id="92" name="Shape 8">
             <a:extLst xmlns:a="http://schemas.openxmlformats.org/drawingml/2006/main">
               <a:ext uri="{FF2B5EF4-FFF2-40B4-BE49-F238E27FC236}">
-                <a16:creationId xmlns:a16="http://schemas.microsoft.com/office/drawing/2014/main" id="{C00C7ACA-518C-40AD-AD84-BB9E8D13E959}"/>
+                <a16:creationId xmlns:a16="http://schemas.microsoft.com/office/drawing/2014/main" id="{39676045-56FA-46F2-9BE6-BC076F175078}"/>
               </a:ext>
             </a:extLst>
           </p:cNvPr>
@@ -7127,7 +8740,7 @@
           <p:cNvPr id="93" name="Text 9">
             <a:extLst xmlns:a="http://schemas.openxmlformats.org/drawingml/2006/main">
               <a:ext uri="{FF2B5EF4-FFF2-40B4-BE49-F238E27FC236}">
-                <a16:creationId xmlns:a16="http://schemas.microsoft.com/office/drawing/2014/main" id="{891E9EF7-E47A-4D13-A162-9FF42C21D552}"/>
+                <a16:creationId xmlns:a16="http://schemas.microsoft.com/office/drawing/2014/main" id="{2F24EFD4-4499-4C10-BE2C-C7ED318036EC}"/>
               </a:ext>
             </a:extLst>
           </p:cNvPr>
@@ -7179,7 +8792,7 @@
                 <a:ea typeface="Arial"/>
                 <a:cs typeface="Arial"/>
               </a:rPr>
-              <a:t>SWI C08   Baseline: c08-report-2026-10-30   Stav k 30. 10. 2026</a:t>
+              <a:t>SWI C08   Baseline: c08-report-2026-10-30-v4   Stav k 30. 10. 2026</a:t>
             </a:r>
             <a:endParaRPr sz="880" b="0" u="none" strike="noStrike">
               <a:solidFill>
@@ -7197,7 +8810,7 @@
           <p:cNvPr id="94" name="Text 10">
             <a:extLst xmlns:a="http://schemas.openxmlformats.org/drawingml/2006/main">
               <a:ext uri="{FF2B5EF4-FFF2-40B4-BE49-F238E27FC236}">
-                <a16:creationId xmlns:a16="http://schemas.microsoft.com/office/drawing/2014/main" id="{4E73BCD6-E2B6-4285-B8FE-73BBAE114565}"/>
+                <a16:creationId xmlns:a16="http://schemas.microsoft.com/office/drawing/2014/main" id="{9DE760A8-6FCC-4D40-A55C-B658B3DB8BBC}"/>
               </a:ext>
             </a:extLst>
           </p:cNvPr>
@@ -7254,7 +8867,7 @@
                 <a:ea typeface="Arial"/>
                 <a:cs typeface="Arial"/>
               </a:rPr>
-              <a:t>Práce / milník</a:t>
+              <a:t>Část projektu</a:t>
             </a:r>
             <a:endParaRPr sz="1130" b="0" u="none" strike="noStrike">
               <a:solidFill>
@@ -7272,7 +8885,7 @@
           <p:cNvPr id="95" name="Text 11">
             <a:extLst xmlns:a="http://schemas.openxmlformats.org/drawingml/2006/main">
               <a:ext uri="{FF2B5EF4-FFF2-40B4-BE49-F238E27FC236}">
-                <a16:creationId xmlns:a16="http://schemas.microsoft.com/office/drawing/2014/main" id="{D7F7FAF3-4632-4CA7-9E7B-0A2ADFC41E60}"/>
+                <a16:creationId xmlns:a16="http://schemas.microsoft.com/office/drawing/2014/main" id="{47D390FA-9300-4572-A764-52BA680371E9}"/>
               </a:ext>
             </a:extLst>
           </p:cNvPr>
@@ -7329,7 +8942,7 @@
                 <a:ea typeface="Arial"/>
                 <a:cs typeface="Arial"/>
               </a:rPr>
-              <a:t>Vlastník</a:t>
+              <a:t>Odpovědnost</a:t>
             </a:r>
             <a:endParaRPr sz="1130" b="0" u="none" strike="noStrike">
               <a:solidFill>
@@ -7347,7 +8960,7 @@
           <p:cNvPr id="96" name="Text 12">
             <a:extLst xmlns:a="http://schemas.openxmlformats.org/drawingml/2006/main">
               <a:ext uri="{FF2B5EF4-FFF2-40B4-BE49-F238E27FC236}">
-                <a16:creationId xmlns:a16="http://schemas.microsoft.com/office/drawing/2014/main" id="{53229005-B744-40A5-AA55-E74168705B64}"/>
+                <a16:creationId xmlns:a16="http://schemas.microsoft.com/office/drawing/2014/main" id="{E8B287D6-7AE8-4A8B-B271-9C3D11EC5C15}"/>
               </a:ext>
             </a:extLst>
           </p:cNvPr>
@@ -7422,7 +9035,7 @@
           <p:cNvPr id="97" name="Text 13">
             <a:extLst xmlns:a="http://schemas.openxmlformats.org/drawingml/2006/main">
               <a:ext uri="{FF2B5EF4-FFF2-40B4-BE49-F238E27FC236}">
-                <a16:creationId xmlns:a16="http://schemas.microsoft.com/office/drawing/2014/main" id="{31E5AD39-9926-41D1-B241-F78D566C056E}"/>
+                <a16:creationId xmlns:a16="http://schemas.microsoft.com/office/drawing/2014/main" id="{3EE29AE0-4D10-44B0-A3A2-801EEEDB9E5E}"/>
               </a:ext>
             </a:extLst>
           </p:cNvPr>
@@ -7479,7 +9092,7 @@
                 <a:ea typeface="Arial"/>
                 <a:cs typeface="Arial"/>
               </a:rPr>
-              <a:t>Skutečnost / odhad</a:t>
+              <a:t>Skutečnost / výhled</a:t>
             </a:r>
             <a:endParaRPr sz="1130" b="0" u="none" strike="noStrike">
               <a:solidFill>
@@ -7497,7 +9110,7 @@
           <p:cNvPr id="98" name="Text 14">
             <a:extLst xmlns:a="http://schemas.openxmlformats.org/drawingml/2006/main">
               <a:ext uri="{FF2B5EF4-FFF2-40B4-BE49-F238E27FC236}">
-                <a16:creationId xmlns:a16="http://schemas.microsoft.com/office/drawing/2014/main" id="{CB48F76A-1EFA-4579-8AEA-8A8F91D2ED58}"/>
+                <a16:creationId xmlns:a16="http://schemas.microsoft.com/office/drawing/2014/main" id="{FB5D6791-CA3B-468C-954A-37ECE42ADA45}"/>
               </a:ext>
             </a:extLst>
           </p:cNvPr>
@@ -7554,7 +9167,7 @@
                 <a:ea typeface="Arial"/>
                 <a:cs typeface="Arial"/>
               </a:rPr>
-              <a:t>Stav a důkaz</a:t>
+              <a:t>Stav</a:t>
             </a:r>
             <a:endParaRPr sz="1130" b="0" u="none" strike="noStrike">
               <a:solidFill>
@@ -7572,7 +9185,7 @@
           <p:cNvPr id="99" name="Text 15">
             <a:extLst xmlns:a="http://schemas.openxmlformats.org/drawingml/2006/main">
               <a:ext uri="{FF2B5EF4-FFF2-40B4-BE49-F238E27FC236}">
-                <a16:creationId xmlns:a16="http://schemas.microsoft.com/office/drawing/2014/main" id="{7012A4CF-1EB0-4DE2-A524-F29633CACE09}"/>
+                <a16:creationId xmlns:a16="http://schemas.microsoft.com/office/drawing/2014/main" id="{7067E532-B2C0-4C0D-8EDB-0042C58C097D}"/>
               </a:ext>
             </a:extLst>
           </p:cNvPr>
@@ -7629,7 +9242,7 @@
                 <a:ea typeface="Arial"/>
                 <a:cs typeface="Arial"/>
               </a:rPr>
-              <a:t>Ověření řešení</a:t>
+              <a:t>A: technická obhajoba</a:t>
             </a:r>
             <a:endParaRPr sz="1180" b="0" u="none" strike="noStrike">
               <a:solidFill>
@@ -7647,7 +9260,7 @@
           <p:cNvPr id="100" name="Text 16">
             <a:extLst xmlns:a="http://schemas.openxmlformats.org/drawingml/2006/main">
               <a:ext uri="{FF2B5EF4-FFF2-40B4-BE49-F238E27FC236}">
-                <a16:creationId xmlns:a16="http://schemas.microsoft.com/office/drawing/2014/main" id="{F81BB85A-8E65-47B1-8E8C-FAD2BEDBE0DE}"/>
+                <a16:creationId xmlns:a16="http://schemas.microsoft.com/office/drawing/2014/main" id="{F3F733FA-2DF0-4768-B8AD-138CC2242E2F}"/>
               </a:ext>
             </a:extLst>
           </p:cNvPr>
@@ -7704,7 +9317,7 @@
                 <a:ea typeface="Arial"/>
                 <a:cs typeface="Arial"/>
               </a:rPr>
-              <a:t>Jakub Juchelka</a:t>
+              <a:t>Tým</a:t>
             </a:r>
             <a:endParaRPr sz="1180" b="0" u="none" strike="noStrike">
               <a:solidFill>
@@ -7722,7 +9335,7 @@
           <p:cNvPr id="101" name="Text 17">
             <a:extLst xmlns:a="http://schemas.openxmlformats.org/drawingml/2006/main">
               <a:ext uri="{FF2B5EF4-FFF2-40B4-BE49-F238E27FC236}">
-                <a16:creationId xmlns:a16="http://schemas.microsoft.com/office/drawing/2014/main" id="{C0E39292-1460-4062-B17E-B1744DEFBC43}"/>
+                <a16:creationId xmlns:a16="http://schemas.microsoft.com/office/drawing/2014/main" id="{F54C2839-4B66-4089-A773-9FBA5D08BEC7}"/>
               </a:ext>
             </a:extLst>
           </p:cNvPr>
@@ -7797,7 +9410,7 @@
           <p:cNvPr id="102" name="Text 18">
             <a:extLst xmlns:a="http://schemas.openxmlformats.org/drawingml/2006/main">
               <a:ext uri="{FF2B5EF4-FFF2-40B4-BE49-F238E27FC236}">
-                <a16:creationId xmlns:a16="http://schemas.microsoft.com/office/drawing/2014/main" id="{C944AD2E-6971-43A1-B222-48088D43D389}"/>
+                <a16:creationId xmlns:a16="http://schemas.microsoft.com/office/drawing/2014/main" id="{759A60D9-D731-4597-AE15-9B59F3818D0E}"/>
               </a:ext>
             </a:extLst>
           </p:cNvPr>
@@ -7854,7 +9467,7 @@
                 <a:ea typeface="Arial"/>
                 <a:cs typeface="Arial"/>
               </a:rPr>
-              <a:t>Hotovo 30. 10.</a:t>
+              <a:t>Zpracováno 30. 10.</a:t>
             </a:r>
             <a:endParaRPr sz="1180" b="0" u="none" strike="noStrike">
               <a:solidFill>
@@ -7872,7 +9485,7 @@
           <p:cNvPr id="103" name="Text 19">
             <a:extLst xmlns:a="http://schemas.openxmlformats.org/drawingml/2006/main">
               <a:ext uri="{FF2B5EF4-FFF2-40B4-BE49-F238E27FC236}">
-                <a16:creationId xmlns:a16="http://schemas.microsoft.com/office/drawing/2014/main" id="{9EFDF04B-984E-499F-A741-99424FCBE8D5}"/>
+                <a16:creationId xmlns:a16="http://schemas.microsoft.com/office/drawing/2014/main" id="{D3702CB3-0F40-403B-91F5-4091F324CE4F}"/>
               </a:ext>
             </a:extLst>
           </p:cNvPr>
@@ -7911,15 +9524,64 @@
           </a:bodyPr>
           <a:lstStyle xmlns:a="http://schemas.openxmlformats.org/drawingml/2006/main"/>
           <a:p xmlns:a="http://schemas.openxmlformats.org/drawingml/2006/main">
-            <a:r>
-              <a:rPr u="none">
+            <a:pPr defTabSz="914400">
+              <a:lnSpc>
+                <a:spcPct val="100000"/>
+              </a:lnSpc>
+              <a:buNone/>
+              <a:tabLst>
+                <a:tab pos="0" algn="l"/>
+              </a:tabLst>
+            </a:pPr>
+            <a:r>
+              <a:rPr sz="1180" b="0" u="none" strike="noStrike">
                 <a:solidFill>
                   <a:srgbClr val="26354B"/>
                 </a:solidFill>
-                <a:hlinkClick xmlns:r="http://schemas.openxmlformats.org/officeDocument/2006/relationships" r:id="Rcbcf4e35aaca4a69"/>
-              </a:rPr>
-              <a:t>GREEN. 97 testů prošlo.</a:t>
-            </a:r>
+                <a:latin typeface="Arial"/>
+                <a:ea typeface="Arial"/>
+                <a:cs typeface="Arial"/>
+              </a:rPr>
+              <a:t>GREEN. Požadavky, návrh,</a:t>
+            </a:r>
+            <a:endParaRPr sz="1180" b="0" u="none" strike="noStrike">
+              <a:solidFill>
+                <a:srgbClr val="000000"/>
+              </a:solidFill>
+              <a:latin typeface="Arial"/>
+              <a:ea typeface="Arial"/>
+              <a:cs typeface="Arial"/>
+            </a:endParaRPr>
+          </a:p>
+          <a:p xmlns:a="http://schemas.openxmlformats.org/drawingml/2006/main">
+            <a:pPr defTabSz="914400">
+              <a:lnSpc>
+                <a:spcPct val="100000"/>
+              </a:lnSpc>
+              <a:buNone/>
+              <a:tabLst>
+                <a:tab pos="0" algn="l"/>
+              </a:tabLst>
+            </a:pPr>
+            <a:r>
+              <a:rPr sz="1180" b="0" u="none" strike="noStrike">
+                <a:solidFill>
+                  <a:srgbClr val="26354B"/>
+                </a:solidFill>
+                <a:latin typeface="Arial"/>
+                <a:ea typeface="Arial"/>
+                <a:cs typeface="Arial"/>
+              </a:rPr>
+              <a:t>kód a důkazy.</a:t>
+            </a:r>
+            <a:endParaRPr sz="1180" b="0" u="none" strike="noStrike">
+              <a:solidFill>
+                <a:srgbClr val="000000"/>
+              </a:solidFill>
+              <a:latin typeface="Arial"/>
+              <a:ea typeface="Arial"/>
+              <a:cs typeface="Arial"/>
+            </a:endParaRPr>
           </a:p>
         </p:txBody>
       </p:sp>
@@ -7928,7 +9590,7 @@
           <p:cNvPr id="104" name="Text 20">
             <a:extLst xmlns:a="http://schemas.openxmlformats.org/drawingml/2006/main">
               <a:ext uri="{FF2B5EF4-FFF2-40B4-BE49-F238E27FC236}">
-                <a16:creationId xmlns:a16="http://schemas.microsoft.com/office/drawing/2014/main" id="{9CCFEC05-E188-46D0-BB17-194D5A33DB30}"/>
+                <a16:creationId xmlns:a16="http://schemas.microsoft.com/office/drawing/2014/main" id="{E3480028-2049-47DE-BC11-79752B6EE668}"/>
               </a:ext>
             </a:extLst>
           </p:cNvPr>
@@ -7985,7 +9647,7 @@
                 <a:ea typeface="Arial"/>
                 <a:cs typeface="Arial"/>
               </a:rPr>
-              <a:t>Kontrola dokumentace</a:t>
+              <a:t>Ověření řešení</a:t>
             </a:r>
             <a:endParaRPr sz="1180" b="0" u="none" strike="noStrike">
               <a:solidFill>
@@ -7996,36 +9658,6 @@
               <a:cs typeface="Arial"/>
             </a:endParaRPr>
           </a:p>
-          <a:p xmlns:a="http://schemas.openxmlformats.org/drawingml/2006/main">
-            <a:pPr defTabSz="914400">
-              <a:lnSpc>
-                <a:spcPct val="100000"/>
-              </a:lnSpc>
-              <a:buNone/>
-              <a:tabLst>
-                <a:tab pos="0" algn="l"/>
-              </a:tabLst>
-            </a:pPr>
-            <a:r>
-              <a:rPr sz="1180" b="0" u="none" strike="noStrike">
-                <a:solidFill>
-                  <a:srgbClr val="26354B"/>
-                </a:solidFill>
-                <a:latin typeface="Arial"/>
-                <a:ea typeface="Arial"/>
-                <a:cs typeface="Arial"/>
-              </a:rPr>
-              <a:t>a zastoupení</a:t>
-            </a:r>
-            <a:endParaRPr sz="1180" b="0" u="none" strike="noStrike">
-              <a:solidFill>
-                <a:srgbClr val="000000"/>
-              </a:solidFill>
-              <a:latin typeface="Arial"/>
-              <a:ea typeface="Arial"/>
-              <a:cs typeface="Arial"/>
-            </a:endParaRPr>
-          </a:p>
         </p:txBody>
       </p:sp>
       <p:sp>
@@ -8033,7 +9665,7 @@
           <p:cNvPr id="105" name="Text 21">
             <a:extLst xmlns:a="http://schemas.openxmlformats.org/drawingml/2006/main">
               <a:ext uri="{FF2B5EF4-FFF2-40B4-BE49-F238E27FC236}">
-                <a16:creationId xmlns:a16="http://schemas.microsoft.com/office/drawing/2014/main" id="{A83EEB6D-3B71-4715-A131-1FBAAB3AB127}"/>
+                <a16:creationId xmlns:a16="http://schemas.microsoft.com/office/drawing/2014/main" id="{9B5B8895-A806-4148-8D3A-594757FA3A08}"/>
               </a:ext>
             </a:extLst>
           </p:cNvPr>
@@ -8090,7 +9722,7 @@
                 <a:ea typeface="Arial"/>
                 <a:cs typeface="Arial"/>
               </a:rPr>
-              <a:t>Jakub / Filip</a:t>
+              <a:t>Jakub Juchelka</a:t>
             </a:r>
             <a:endParaRPr sz="1180" b="0" u="none" strike="noStrike">
               <a:solidFill>
@@ -8108,7 +9740,7 @@
           <p:cNvPr id="106" name="Text 22">
             <a:extLst xmlns:a="http://schemas.openxmlformats.org/drawingml/2006/main">
               <a:ext uri="{FF2B5EF4-FFF2-40B4-BE49-F238E27FC236}">
-                <a16:creationId xmlns:a16="http://schemas.microsoft.com/office/drawing/2014/main" id="{4B8E0EE2-228B-40C5-AF1E-83539428665E}"/>
+                <a16:creationId xmlns:a16="http://schemas.microsoft.com/office/drawing/2014/main" id="{1E0F5EFD-3EA0-455A-AD56-295EC65127D7}"/>
               </a:ext>
             </a:extLst>
           </p:cNvPr>
@@ -8183,7 +9815,7 @@
           <p:cNvPr id="107" name="Text 23">
             <a:extLst xmlns:a="http://schemas.openxmlformats.org/drawingml/2006/main">
               <a:ext uri="{FF2B5EF4-FFF2-40B4-BE49-F238E27FC236}">
-                <a16:creationId xmlns:a16="http://schemas.microsoft.com/office/drawing/2014/main" id="{B4C7A837-8EBE-4FA8-A1BB-22B1216465AC}"/>
+                <a16:creationId xmlns:a16="http://schemas.microsoft.com/office/drawing/2014/main" id="{674977A8-78A0-4BD5-A453-438FCAFD261C}"/>
               </a:ext>
             </a:extLst>
           </p:cNvPr>
@@ -8240,7 +9872,7 @@
                 <a:ea typeface="Arial"/>
                 <a:cs typeface="Arial"/>
               </a:rPr>
-              <a:t>Výsledek nedoložen</a:t>
+              <a:t>Ověřeno 30. 10.</a:t>
             </a:r>
             <a:endParaRPr sz="1180" b="0" u="none" strike="noStrike">
               <a:solidFill>
@@ -8258,7 +9890,7 @@
           <p:cNvPr id="108" name="Text 24">
             <a:extLst xmlns:a="http://schemas.openxmlformats.org/drawingml/2006/main">
               <a:ext uri="{FF2B5EF4-FFF2-40B4-BE49-F238E27FC236}">
-                <a16:creationId xmlns:a16="http://schemas.microsoft.com/office/drawing/2014/main" id="{9ED740D1-71E1-48FE-A96A-63D111F81C99}"/>
+                <a16:creationId xmlns:a16="http://schemas.microsoft.com/office/drawing/2014/main" id="{F4A198E6-E446-4027-9CC0-901FAED10181}"/>
               </a:ext>
             </a:extLst>
           </p:cNvPr>
@@ -8297,32 +9929,34 @@
           </a:bodyPr>
           <a:lstStyle xmlns:a="http://schemas.openxmlformats.org/drawingml/2006/main"/>
           <a:p xmlns:a="http://schemas.openxmlformats.org/drawingml/2006/main">
-            <a:r>
-              <a:rPr u="none">
+            <a:pPr defTabSz="914400">
+              <a:lnSpc>
+                <a:spcPct val="100000"/>
+              </a:lnSpc>
+              <a:buNone/>
+              <a:tabLst>
+                <a:tab pos="0" algn="l"/>
+              </a:tabLst>
+            </a:pPr>
+            <a:r>
+              <a:rPr sz="1180" b="0" u="none" strike="noStrike">
                 <a:solidFill>
                   <a:srgbClr val="26354B"/>
                 </a:solidFill>
-                <a:hlinkClick xmlns:r="http://schemas.openxmlformats.org/officeDocument/2006/relationships" r:id="Re9c9451ec90c491b"/>
-              </a:rPr>
-              <a:t>AMBER. R-01 / R-02</a:t>
-            </a:r>
-            <a:br>
-              <a:rPr u="none">
-                <a:solidFill>
-                  <a:srgbClr val="26354B"/>
-                </a:solidFill>
-                <a:hlinkClick xmlns:r="http://schemas.openxmlformats.org/officeDocument/2006/relationships" r:id="Re9c9451ec90c491b"/>
-              </a:rPr>
-            </a:br>
-            <a:r>
-              <a:rPr u="none">
-                <a:solidFill>
-                  <a:srgbClr val="26354B"/>
-                </a:solidFill>
-                <a:hlinkClick xmlns:r="http://schemas.openxmlformats.org/officeDocument/2006/relationships" r:id="Re9c9451ec90c491b"/>
-              </a:rPr>
-              <a:t>NOT VERIFIED.</a:t>
-            </a:r>
+                <a:latin typeface="Arial"/>
+                <a:ea typeface="Arial"/>
+                <a:cs typeface="Arial"/>
+              </a:rPr>
+              <a:t>GREEN. 97 testů prošlo.</a:t>
+            </a:r>
+            <a:endParaRPr sz="1180" b="0" u="none" strike="noStrike">
+              <a:solidFill>
+                <a:srgbClr val="000000"/>
+              </a:solidFill>
+              <a:latin typeface="Arial"/>
+              <a:ea typeface="Arial"/>
+              <a:cs typeface="Arial"/>
+            </a:endParaRPr>
           </a:p>
         </p:txBody>
       </p:sp>
@@ -8331,7 +9965,7 @@
           <p:cNvPr id="109" name="Text 25">
             <a:extLst xmlns:a="http://schemas.openxmlformats.org/drawingml/2006/main">
               <a:ext uri="{FF2B5EF4-FFF2-40B4-BE49-F238E27FC236}">
-                <a16:creationId xmlns:a16="http://schemas.microsoft.com/office/drawing/2014/main" id="{7EBAE99B-396F-430D-97B3-26084B4299C2}"/>
+                <a16:creationId xmlns:a16="http://schemas.microsoft.com/office/drawing/2014/main" id="{41D5088D-9351-4BB3-8039-7DBF101C875B}"/>
               </a:ext>
             </a:extLst>
           </p:cNvPr>
@@ -8388,7 +10022,7 @@
                 <a:ea typeface="Arial"/>
                 <a:cs typeface="Arial"/>
               </a:rPr>
-              <a:t>Nácvik obhajoby A</a:t>
+              <a:t>B: registr rizik</a:t>
             </a:r>
             <a:endParaRPr sz="1180" b="0" u="none" strike="noStrike">
               <a:solidFill>
@@ -8406,7 +10040,7 @@
           <p:cNvPr id="110" name="Text 26">
             <a:extLst xmlns:a="http://schemas.openxmlformats.org/drawingml/2006/main">
               <a:ext uri="{FF2B5EF4-FFF2-40B4-BE49-F238E27FC236}">
-                <a16:creationId xmlns:a16="http://schemas.microsoft.com/office/drawing/2014/main" id="{44B857FF-8AB9-4A57-B4D9-939BC185CA51}"/>
+                <a16:creationId xmlns:a16="http://schemas.microsoft.com/office/drawing/2014/main" id="{549D3F1F-F357-41D6-9B02-867DEB56139F}"/>
               </a:ext>
             </a:extLst>
           </p:cNvPr>
@@ -8463,7 +10097,7 @@
                 <a:ea typeface="Arial"/>
                 <a:cs typeface="Arial"/>
               </a:rPr>
-              <a:t>Kryštof Lalošák</a:t>
+              <a:t>Tým</a:t>
             </a:r>
             <a:endParaRPr sz="1180" b="0" u="none" strike="noStrike">
               <a:solidFill>
@@ -8481,7 +10115,7 @@
           <p:cNvPr id="111" name="Text 27">
             <a:extLst xmlns:a="http://schemas.openxmlformats.org/drawingml/2006/main">
               <a:ext uri="{FF2B5EF4-FFF2-40B4-BE49-F238E27FC236}">
-                <a16:creationId xmlns:a16="http://schemas.microsoft.com/office/drawing/2014/main" id="{6C0307A1-A97D-4F8C-9C63-3AC573D9CED7}"/>
+                <a16:creationId xmlns:a16="http://schemas.microsoft.com/office/drawing/2014/main" id="{89E33D83-3417-45F8-979C-9C8A0BC9505D}"/>
               </a:ext>
             </a:extLst>
           </p:cNvPr>
@@ -8538,7 +10172,7 @@
                 <a:ea typeface="Arial"/>
                 <a:cs typeface="Arial"/>
               </a:rPr>
-              <a:t>2. 11. 2026</a:t>
+              <a:t>30. 10. 2026</a:t>
             </a:r>
             <a:endParaRPr sz="1180" b="0" u="none" strike="noStrike">
               <a:solidFill>
@@ -8556,7 +10190,7 @@
           <p:cNvPr id="112" name="Text 28">
             <a:extLst xmlns:a="http://schemas.openxmlformats.org/drawingml/2006/main">
               <a:ext uri="{FF2B5EF4-FFF2-40B4-BE49-F238E27FC236}">
-                <a16:creationId xmlns:a16="http://schemas.microsoft.com/office/drawing/2014/main" id="{C2FD3B45-3F76-49B2-99F9-5DC84F31AC0E}"/>
+                <a16:creationId xmlns:a16="http://schemas.microsoft.com/office/drawing/2014/main" id="{07A81277-2C76-4879-BCAA-510258CBD807}"/>
               </a:ext>
             </a:extLst>
           </p:cNvPr>
@@ -8613,7 +10247,7 @@
                 <a:ea typeface="Arial"/>
                 <a:cs typeface="Arial"/>
               </a:rPr>
-              <a:t>Zatím neověřen</a:t>
+              <a:t>Zpracováno 30. 10.</a:t>
             </a:r>
             <a:endParaRPr sz="1180" b="0" u="none" strike="noStrike">
               <a:solidFill>
@@ -8631,7 +10265,7 @@
           <p:cNvPr id="113" name="Text 29">
             <a:extLst xmlns:a="http://schemas.openxmlformats.org/drawingml/2006/main">
               <a:ext uri="{FF2B5EF4-FFF2-40B4-BE49-F238E27FC236}">
-                <a16:creationId xmlns:a16="http://schemas.microsoft.com/office/drawing/2014/main" id="{B72C9374-8E9D-44D7-8228-B690DCC3520C}"/>
+                <a16:creationId xmlns:a16="http://schemas.microsoft.com/office/drawing/2014/main" id="{F7776F09-BCF0-493A-8B2D-D87A61E9C41D}"/>
               </a:ext>
             </a:extLst>
           </p:cNvPr>
@@ -8670,32 +10304,64 @@
           </a:bodyPr>
           <a:lstStyle xmlns:a="http://schemas.openxmlformats.org/drawingml/2006/main"/>
           <a:p xmlns:a="http://schemas.openxmlformats.org/drawingml/2006/main">
-            <a:r>
-              <a:rPr u="none">
+            <a:pPr defTabSz="914400">
+              <a:lnSpc>
+                <a:spcPct val="100000"/>
+              </a:lnSpc>
+              <a:buNone/>
+              <a:tabLst>
+                <a:tab pos="0" algn="l"/>
+              </a:tabLst>
+            </a:pPr>
+            <a:r>
+              <a:rPr sz="1180" b="0" u="none" strike="noStrike">
                 <a:solidFill>
                   <a:srgbClr val="26354B"/>
                 </a:solidFill>
-                <a:hlinkClick xmlns:r="http://schemas.openxmlformats.org/officeDocument/2006/relationships" r:id="R8886f555dfb5426d"/>
-              </a:rPr>
-              <a:t>AMBER. Chybí nácvik</a:t>
-            </a:r>
-            <a:br>
-              <a:rPr u="none">
+                <a:latin typeface="Arial"/>
+                <a:ea typeface="Arial"/>
+                <a:cs typeface="Arial"/>
+              </a:rPr>
+              <a:t>GREEN. Čtyři rizika</a:t>
+            </a:r>
+            <a:endParaRPr sz="1180" b="0" u="none" strike="noStrike">
+              <a:solidFill>
+                <a:srgbClr val="000000"/>
+              </a:solidFill>
+              <a:latin typeface="Arial"/>
+              <a:ea typeface="Arial"/>
+              <a:cs typeface="Arial"/>
+            </a:endParaRPr>
+          </a:p>
+          <a:p xmlns:a="http://schemas.openxmlformats.org/drawingml/2006/main">
+            <a:pPr defTabSz="914400">
+              <a:lnSpc>
+                <a:spcPct val="100000"/>
+              </a:lnSpc>
+              <a:buNone/>
+              <a:tabLst>
+                <a:tab pos="0" algn="l"/>
+              </a:tabLst>
+            </a:pPr>
+            <a:r>
+              <a:rPr sz="1180" b="0" u="none" strike="noStrike">
                 <a:solidFill>
                   <a:srgbClr val="26354B"/>
                 </a:solidFill>
-                <a:hlinkClick xmlns:r="http://schemas.openxmlformats.org/officeDocument/2006/relationships" r:id="R8886f555dfb5426d"/>
-              </a:rPr>
-            </a:br>
-            <a:r>
-              <a:rPr u="none">
-                <a:solidFill>
-                  <a:srgbClr val="26354B"/>
-                </a:solidFill>
-                <a:hlinkClick xmlns:r="http://schemas.openxmlformats.org/officeDocument/2006/relationships" r:id="R8886f555dfb5426d"/>
-              </a:rPr>
-              <a:t>a potvrzené kapacity.</a:t>
-            </a:r>
+                <a:latin typeface="Arial"/>
+                <a:ea typeface="Arial"/>
+                <a:cs typeface="Arial"/>
+              </a:rPr>
+              <a:t>se všemi položkami.</a:t>
+            </a:r>
+            <a:endParaRPr sz="1180" b="0" u="none" strike="noStrike">
+              <a:solidFill>
+                <a:srgbClr val="000000"/>
+              </a:solidFill>
+              <a:latin typeface="Arial"/>
+              <a:ea typeface="Arial"/>
+              <a:cs typeface="Arial"/>
+            </a:endParaRPr>
           </a:p>
         </p:txBody>
       </p:sp>
@@ -8704,7 +10370,7 @@
           <p:cNvPr id="114" name="Text 30">
             <a:extLst xmlns:a="http://schemas.openxmlformats.org/drawingml/2006/main">
               <a:ext uri="{FF2B5EF4-FFF2-40B4-BE49-F238E27FC236}">
-                <a16:creationId xmlns:a16="http://schemas.microsoft.com/office/drawing/2014/main" id="{3A89819B-A766-4E79-81F0-6348B000E654}"/>
+                <a16:creationId xmlns:a16="http://schemas.microsoft.com/office/drawing/2014/main" id="{D3B6D4EE-00B0-4DCB-AF5E-EAD516159738}"/>
               </a:ext>
             </a:extLst>
           </p:cNvPr>
@@ -8761,7 +10427,7 @@
                 <a:ea typeface="Arial"/>
                 <a:cs typeface="Arial"/>
               </a:rPr>
-              <a:t>Uzavření C04 / F1</a:t>
+              <a:t>C04 / F1</a:t>
             </a:r>
             <a:endParaRPr sz="1180" b="0" u="none" strike="noStrike">
               <a:solidFill>
@@ -8779,7 +10445,7 @@
           <p:cNvPr id="115" name="Text 31">
             <a:extLst xmlns:a="http://schemas.openxmlformats.org/drawingml/2006/main">
               <a:ext uri="{FF2B5EF4-FFF2-40B4-BE49-F238E27FC236}">
-                <a16:creationId xmlns:a16="http://schemas.microsoft.com/office/drawing/2014/main" id="{320A5C4C-D436-48D6-8A88-0D1C523C9F2E}"/>
+                <a16:creationId xmlns:a16="http://schemas.microsoft.com/office/drawing/2014/main" id="{0EFE6768-B377-425E-B080-9F293DD16EAF}"/>
               </a:ext>
             </a:extLst>
           </p:cNvPr>
@@ -8836,7 +10502,7 @@
                 <a:ea typeface="Arial"/>
                 <a:cs typeface="Arial"/>
               </a:rPr>
-              <a:t>Nepřiřazen</a:t>
+              <a:t>Jakub Juchelka</a:t>
             </a:r>
             <a:endParaRPr sz="1180" b="0" u="none" strike="noStrike">
               <a:solidFill>
@@ -8854,7 +10520,7 @@
           <p:cNvPr id="116" name="Text 32">
             <a:extLst xmlns:a="http://schemas.openxmlformats.org/drawingml/2006/main">
               <a:ext uri="{FF2B5EF4-FFF2-40B4-BE49-F238E27FC236}">
-                <a16:creationId xmlns:a16="http://schemas.microsoft.com/office/drawing/2014/main" id="{AA5E8C1F-E2E4-4D32-B0A2-5E26775EC69A}"/>
+                <a16:creationId xmlns:a16="http://schemas.microsoft.com/office/drawing/2014/main" id="{77FE12CC-305C-4542-A46B-D5DF7DB3FD26}"/>
               </a:ext>
             </a:extLst>
           </p:cNvPr>
@@ -8929,7 +10595,7 @@
           <p:cNvPr id="117" name="Text 33">
             <a:extLst xmlns:a="http://schemas.openxmlformats.org/drawingml/2006/main">
               <a:ext uri="{FF2B5EF4-FFF2-40B4-BE49-F238E27FC236}">
-                <a16:creationId xmlns:a16="http://schemas.microsoft.com/office/drawing/2014/main" id="{AAF05871-72BE-42AB-9438-9A30B258525F}"/>
+                <a16:creationId xmlns:a16="http://schemas.microsoft.com/office/drawing/2014/main" id="{126B35BD-1E1A-4A39-A671-85A94071A035}"/>
               </a:ext>
             </a:extLst>
           </p:cNvPr>
@@ -8986,7 +10652,7 @@
                 <a:ea typeface="Arial"/>
                 <a:cs typeface="Arial"/>
               </a:rPr>
-              <a:t>Odhad neurčen</a:t>
+              <a:t>OPEN</a:t>
             </a:r>
             <a:endParaRPr sz="1180" b="0" u="none" strike="noStrike">
               <a:solidFill>
@@ -9004,7 +10670,7 @@
           <p:cNvPr id="118" name="Text 34">
             <a:extLst xmlns:a="http://schemas.openxmlformats.org/drawingml/2006/main">
               <a:ext uri="{FF2B5EF4-FFF2-40B4-BE49-F238E27FC236}">
-                <a16:creationId xmlns:a16="http://schemas.microsoft.com/office/drawing/2014/main" id="{40906299-98F3-4191-9E30-924C73E17256}"/>
+                <a16:creationId xmlns:a16="http://schemas.microsoft.com/office/drawing/2014/main" id="{88B18ACA-A77E-4600-B508-BF91024CA453}"/>
               </a:ext>
             </a:extLst>
           </p:cNvPr>
@@ -9043,32 +10709,64 @@
           </a:bodyPr>
           <a:lstStyle xmlns:a="http://schemas.openxmlformats.org/drawingml/2006/main"/>
           <a:p xmlns:a="http://schemas.openxmlformats.org/drawingml/2006/main">
-            <a:r>
-              <a:rPr u="none">
+            <a:pPr defTabSz="914400">
+              <a:lnSpc>
+                <a:spcPct val="100000"/>
+              </a:lnSpc>
+              <a:buNone/>
+              <a:tabLst>
+                <a:tab pos="0" algn="l"/>
+              </a:tabLst>
+            </a:pPr>
+            <a:r>
+              <a:rPr sz="1180" b="0" u="none" strike="noStrike">
                 <a:solidFill>
                   <a:srgbClr val="26354B"/>
                 </a:solidFill>
-                <a:hlinkClick xmlns:r="http://schemas.openxmlformats.org/officeDocument/2006/relationships" r:id="R78ad916116b44c96"/>
-              </a:rPr>
-              <a:t>OPEN. Určit vlastníka</a:t>
-            </a:r>
-            <a:br>
-              <a:rPr u="none">
+                <a:latin typeface="Arial"/>
+                <a:ea typeface="Arial"/>
+                <a:cs typeface="Arial"/>
+              </a:rPr>
+              <a:t>Doplnit kritérium, měření</a:t>
+            </a:r>
+            <a:endParaRPr sz="1180" b="0" u="none" strike="noStrike">
+              <a:solidFill>
+                <a:srgbClr val="000000"/>
+              </a:solidFill>
+              <a:latin typeface="Arial"/>
+              <a:ea typeface="Arial"/>
+              <a:cs typeface="Arial"/>
+            </a:endParaRPr>
+          </a:p>
+          <a:p xmlns:a="http://schemas.openxmlformats.org/drawingml/2006/main">
+            <a:pPr defTabSz="914400">
+              <a:lnSpc>
+                <a:spcPct val="100000"/>
+              </a:lnSpc>
+              <a:buNone/>
+              <a:tabLst>
+                <a:tab pos="0" algn="l"/>
+              </a:tabLst>
+            </a:pPr>
+            <a:r>
+              <a:rPr sz="1180" b="0" u="none" strike="noStrike">
                 <a:solidFill>
                   <a:srgbClr val="26354B"/>
                 </a:solidFill>
-                <a:hlinkClick xmlns:r="http://schemas.openxmlformats.org/officeDocument/2006/relationships" r:id="R78ad916116b44c96"/>
-              </a:rPr>
-            </a:br>
-            <a:r>
-              <a:rPr u="none">
-                <a:solidFill>
-                  <a:srgbClr val="26354B"/>
-                </a:solidFill>
-                <a:hlinkClick xmlns:r="http://schemas.openxmlformats.org/officeDocument/2006/relationships" r:id="R78ad916116b44c96"/>
-              </a:rPr>
-              <a:t>a plán do 2. 11.</a:t>
-            </a:r>
+                <a:latin typeface="Arial"/>
+                <a:ea typeface="Arial"/>
+                <a:cs typeface="Arial"/>
+              </a:rPr>
+              <a:t>a rozhodnutí.</a:t>
+            </a:r>
+            <a:endParaRPr sz="1180" b="0" u="none" strike="noStrike">
+              <a:solidFill>
+                <a:srgbClr val="000000"/>
+              </a:solidFill>
+              <a:latin typeface="Arial"/>
+              <a:ea typeface="Arial"/>
+              <a:cs typeface="Arial"/>
+            </a:endParaRPr>
           </a:p>
         </p:txBody>
       </p:sp>
@@ -9077,7 +10775,7 @@
           <p:cNvPr id="119" name="Text 35">
             <a:extLst xmlns:a="http://schemas.openxmlformats.org/drawingml/2006/main">
               <a:ext uri="{FF2B5EF4-FFF2-40B4-BE49-F238E27FC236}">
-                <a16:creationId xmlns:a16="http://schemas.microsoft.com/office/drawing/2014/main" id="{2B3FA449-4232-4DAD-BF15-5496D2C2E0B6}"/>
+                <a16:creationId xmlns:a16="http://schemas.microsoft.com/office/drawing/2014/main" id="{13645736-2A40-4B0D-A1A0-84BF92A08484}"/>
               </a:ext>
             </a:extLst>
           </p:cNvPr>
@@ -9134,7 +10832,7 @@
                 <a:ea typeface="Arial"/>
                 <a:cs typeface="Arial"/>
               </a:rPr>
-              <a:t>KAPACITY A ZASTUPOVÁNÍ</a:t>
+              <a:t>TÝM A DOSTUPNÝ ČAS</a:t>
             </a:r>
             <a:endParaRPr sz="1060" b="0" u="none" strike="noStrike">
               <a:solidFill>
@@ -9152,7 +10850,7 @@
           <p:cNvPr id="120" name="Text 36">
             <a:extLst xmlns:a="http://schemas.openxmlformats.org/drawingml/2006/main">
               <a:ext uri="{FF2B5EF4-FFF2-40B4-BE49-F238E27FC236}">
-                <a16:creationId xmlns:a16="http://schemas.microsoft.com/office/drawing/2014/main" id="{D535A690-A5AA-4895-B9AF-759CA2481619}"/>
+                <a16:creationId xmlns:a16="http://schemas.microsoft.com/office/drawing/2014/main" id="{8DD3886A-8880-4E76-91E9-55AC6DC67D36}"/>
               </a:ext>
             </a:extLst>
           </p:cNvPr>
@@ -9191,32 +10889,64 @@
           </a:bodyPr>
           <a:lstStyle xmlns:a="http://schemas.openxmlformats.org/drawingml/2006/main"/>
           <a:p xmlns:a="http://schemas.openxmlformats.org/drawingml/2006/main">
-            <a:r>
-              <a:rPr u="none">
+            <a:pPr defTabSz="914400">
+              <a:lnSpc>
+                <a:spcPct val="100000"/>
+              </a:lnSpc>
+              <a:buNone/>
+              <a:tabLst>
+                <a:tab pos="0" algn="l"/>
+              </a:tabLst>
+            </a:pPr>
+            <a:r>
+              <a:rPr sz="1390" b="0" u="none" strike="noStrike">
                 <a:solidFill>
                   <a:srgbClr val="26354B"/>
                 </a:solidFill>
-                <a:hlinkClick xmlns:r="http://schemas.openxmlformats.org/officeDocument/2006/relationships" r:id="R5d1d317bd5ce4f10"/>
-              </a:rPr>
-              <a:t>Tři členové týmu. Dostupné hodiny nejsou potvrzené.</a:t>
-            </a:r>
-            <a:br>
-              <a:rPr u="none">
+                <a:latin typeface="Arial"/>
+                <a:ea typeface="Arial"/>
+                <a:cs typeface="Arial"/>
+              </a:rPr>
+              <a:t>Tři členové týmu.</a:t>
+            </a:r>
+            <a:endParaRPr sz="1390" b="0" u="none" strike="noStrike">
+              <a:solidFill>
+                <a:srgbClr val="000000"/>
+              </a:solidFill>
+              <a:latin typeface="Arial"/>
+              <a:ea typeface="Arial"/>
+              <a:cs typeface="Arial"/>
+            </a:endParaRPr>
+          </a:p>
+          <a:p xmlns:a="http://schemas.openxmlformats.org/drawingml/2006/main">
+            <a:pPr defTabSz="914400">
+              <a:lnSpc>
+                <a:spcPct val="100000"/>
+              </a:lnSpc>
+              <a:buNone/>
+              <a:tabLst>
+                <a:tab pos="0" algn="l"/>
+              </a:tabLst>
+            </a:pPr>
+            <a:r>
+              <a:rPr sz="1390" b="0" u="none" strike="noStrike">
                 <a:solidFill>
                   <a:srgbClr val="26354B"/>
                 </a:solidFill>
-                <a:hlinkClick xmlns:r="http://schemas.openxmlformats.org/officeDocument/2006/relationships" r:id="R5d1d317bd5ce4f10"/>
-              </a:rPr>
-            </a:br>
-            <a:r>
-              <a:rPr u="none">
-                <a:solidFill>
-                  <a:srgbClr val="26354B"/>
-                </a:solidFill>
-                <a:hlinkClick xmlns:r="http://schemas.openxmlformats.org/officeDocument/2006/relationships" r:id="R5d1d317bd5ce4f10"/>
-              </a:rPr>
-              <a:t>Zastupování je plánované, zatím NOT VERIFIED (R-02).</a:t>
-            </a:r>
+                <a:latin typeface="Arial"/>
+                <a:ea typeface="Arial"/>
+                <a:cs typeface="Arial"/>
+              </a:rPr>
+              <a:t>Tým zatím nezná dostupný čas ani termín dokončení C04.</a:t>
+            </a:r>
+            <a:endParaRPr sz="1390" b="0" u="none" strike="noStrike">
+              <a:solidFill>
+                <a:srgbClr val="000000"/>
+              </a:solidFill>
+              <a:latin typeface="Arial"/>
+              <a:ea typeface="Arial"/>
+              <a:cs typeface="Arial"/>
+            </a:endParaRPr>
           </a:p>
         </p:txBody>
       </p:sp>
@@ -9225,7 +10955,7 @@
           <p:cNvPr id="121" name="Text 37">
             <a:extLst xmlns:a="http://schemas.openxmlformats.org/drawingml/2006/main">
               <a:ext uri="{FF2B5EF4-FFF2-40B4-BE49-F238E27FC236}">
-                <a16:creationId xmlns:a16="http://schemas.microsoft.com/office/drawing/2014/main" id="{12D1FB8F-C902-4BF5-AB1B-6052F0A5362B}"/>
+                <a16:creationId xmlns:a16="http://schemas.microsoft.com/office/drawing/2014/main" id="{699ABA9F-5E08-42A3-9EB2-CC18DF9EA3BA}"/>
               </a:ext>
             </a:extLst>
           </p:cNvPr>
@@ -9282,7 +11012,7 @@
                 <a:ea typeface="Arial"/>
                 <a:cs typeface="Arial"/>
               </a:rPr>
-              <a:t>KRITICKÁ ZÁVISLOST</a:t>
+              <a:t>ZBÝVAJÍCÍ ZÁVISLOST</a:t>
             </a:r>
             <a:endParaRPr sz="1060" b="0" u="none" strike="noStrike">
               <a:solidFill>
@@ -9300,7 +11030,7 @@
           <p:cNvPr id="122" name="Text 38">
             <a:extLst xmlns:a="http://schemas.openxmlformats.org/drawingml/2006/main">
               <a:ext uri="{FF2B5EF4-FFF2-40B4-BE49-F238E27FC236}">
-                <a16:creationId xmlns:a16="http://schemas.microsoft.com/office/drawing/2014/main" id="{C197909C-B7C0-41D0-BE98-5E02A1497161}"/>
+                <a16:creationId xmlns:a16="http://schemas.microsoft.com/office/drawing/2014/main" id="{6B5DE5AF-0C54-473D-AC9C-D66E1C5C57FA}"/>
               </a:ext>
             </a:extLst>
           </p:cNvPr>
@@ -9339,39 +11069,71 @@
           </a:bodyPr>
           <a:lstStyle xmlns:a="http://schemas.openxmlformats.org/drawingml/2006/main"/>
           <a:p xmlns:a="http://schemas.openxmlformats.org/drawingml/2006/main">
-            <a:r>
-              <a:rPr u="none">
+            <a:pPr defTabSz="914400">
+              <a:lnSpc>
+                <a:spcPct val="100000"/>
+              </a:lnSpc>
+              <a:buNone/>
+              <a:tabLst>
+                <a:tab pos="0" algn="l"/>
+              </a:tabLst>
+            </a:pPr>
+            <a:r>
+              <a:rPr sz="1390" b="0" u="none" strike="noStrike">
                 <a:solidFill>
                   <a:srgbClr val="26354B"/>
                 </a:solidFill>
-                <a:hlinkClick xmlns:r="http://schemas.openxmlformats.org/officeDocument/2006/relationships" r:id="R767d9d9d11814328"/>
-              </a:rPr>
-              <a:t>C04 a potvrzení plánu jsou podmínkou doloženého dokončení.</a:t>
-            </a:r>
-            <a:br>
-              <a:rPr u="none">
+                <a:latin typeface="Arial"/>
+                <a:ea typeface="Arial"/>
+                <a:cs typeface="Arial"/>
+              </a:rPr>
+              <a:t>Dokončení evidence C04 je podmínkou uzavření F1.</a:t>
+            </a:r>
+            <a:endParaRPr sz="1390" b="0" u="none" strike="noStrike">
+              <a:solidFill>
+                <a:srgbClr val="000000"/>
+              </a:solidFill>
+              <a:latin typeface="Arial"/>
+              <a:ea typeface="Arial"/>
+              <a:cs typeface="Arial"/>
+            </a:endParaRPr>
+          </a:p>
+          <a:p xmlns:a="http://schemas.openxmlformats.org/drawingml/2006/main">
+            <a:pPr defTabSz="914400">
+              <a:lnSpc>
+                <a:spcPct val="100000"/>
+              </a:lnSpc>
+              <a:buNone/>
+              <a:tabLst>
+                <a:tab pos="0" algn="l"/>
+              </a:tabLst>
+            </a:pPr>
+            <a:r>
+              <a:rPr sz="1390" b="0" u="none" strike="noStrike">
                 <a:solidFill>
                   <a:srgbClr val="26354B"/>
                 </a:solidFill>
-                <a:hlinkClick xmlns:r="http://schemas.openxmlformats.org/officeDocument/2006/relationships" r:id="R767d9d9d11814328"/>
-              </a:rPr>
-            </a:br>
-            <a:r>
-              <a:rPr u="none">
-                <a:solidFill>
-                  <a:srgbClr val="26354B"/>
-                </a:solidFill>
-                <a:hlinkClick xmlns:r="http://schemas.openxmlformats.org/officeDocument/2006/relationships" r:id="R767d9d9d11814328"/>
-              </a:rPr>
-              <a:t>Kryštof do 2. 11. zajistí termín obhajoby a rozdělení kapacit.</a:t>
-            </a:r>
+                <a:latin typeface="Arial"/>
+                <a:ea typeface="Arial"/>
+                <a:cs typeface="Arial"/>
+              </a:rPr>
+              <a:t>Časový plán C04 zatím není stanovený.</a:t>
+            </a:r>
+            <a:endParaRPr sz="1390" b="0" u="none" strike="noStrike">
+              <a:solidFill>
+                <a:srgbClr val="000000"/>
+              </a:solidFill>
+              <a:latin typeface="Arial"/>
+              <a:ea typeface="Arial"/>
+              <a:cs typeface="Arial"/>
+            </a:endParaRPr>
           </a:p>
         </p:txBody>
       </p:sp>
     </p:spTree>
     <p:extLst>
       <p:ext uri="{BB962C8B-B14F-4D97-AF65-F5344CB8AC3E}">
-        <p14:creationId xmlns:p14="http://schemas.microsoft.com/office/powerpoint/2010/main" val="347208175"/>
+        <p14:creationId xmlns:p14="http://schemas.microsoft.com/office/powerpoint/2010/main" val="863362497"/>
       </p:ext>
     </p:extLst>
   </p:cSld>
@@ -9395,7 +11157,7 @@
           <p:cNvPr id="123" name="Shape 0">
             <a:extLst xmlns:a="http://schemas.openxmlformats.org/drawingml/2006/main">
               <a:ext uri="{FF2B5EF4-FFF2-40B4-BE49-F238E27FC236}">
-                <a16:creationId xmlns:a16="http://schemas.microsoft.com/office/drawing/2014/main" id="{790B32BB-BDEA-450C-8FB9-D2C548A33CAD}"/>
+                <a16:creationId xmlns:a16="http://schemas.microsoft.com/office/drawing/2014/main" id="{C9F38289-55AC-4E48-9D77-94034AEE14A8}"/>
               </a:ext>
             </a:extLst>
           </p:cNvPr>
@@ -9452,7 +11214,7 @@
           <p:cNvPr id="124" name="Text 1">
             <a:extLst xmlns:a="http://schemas.openxmlformats.org/drawingml/2006/main">
               <a:ext uri="{FF2B5EF4-FFF2-40B4-BE49-F238E27FC236}">
-                <a16:creationId xmlns:a16="http://schemas.microsoft.com/office/drawing/2014/main" id="{72422A2D-18CB-4590-911A-A80BADF081AC}"/>
+                <a16:creationId xmlns:a16="http://schemas.microsoft.com/office/drawing/2014/main" id="{1FCDA06A-9292-4E8A-90CF-F5A37B067448}"/>
               </a:ext>
             </a:extLst>
           </p:cNvPr>
@@ -9522,7 +11284,7 @@
           <p:cNvPr id="125" name="Text 2">
             <a:extLst xmlns:a="http://schemas.openxmlformats.org/drawingml/2006/main">
               <a:ext uri="{FF2B5EF4-FFF2-40B4-BE49-F238E27FC236}">
-                <a16:creationId xmlns:a16="http://schemas.microsoft.com/office/drawing/2014/main" id="{9FF9E7BC-1A15-42AF-85FE-456553E02D2C}"/>
+                <a16:creationId xmlns:a16="http://schemas.microsoft.com/office/drawing/2014/main" id="{F6C53878-2706-40E7-95E8-4D2A4367947E}"/>
               </a:ext>
             </a:extLst>
           </p:cNvPr>
@@ -9592,7 +11354,7 @@
           <p:cNvPr id="126" name="Text 3">
             <a:extLst xmlns:a="http://schemas.openxmlformats.org/drawingml/2006/main">
               <a:ext uri="{FF2B5EF4-FFF2-40B4-BE49-F238E27FC236}">
-                <a16:creationId xmlns:a16="http://schemas.microsoft.com/office/drawing/2014/main" id="{A1A38B3C-A670-4CFA-B491-AFBEEABBDB95}"/>
+                <a16:creationId xmlns:a16="http://schemas.microsoft.com/office/drawing/2014/main" id="{6E168856-3FC1-444A-96DC-DBBB1B094DB6}"/>
               </a:ext>
             </a:extLst>
           </p:cNvPr>
@@ -9662,7 +11424,7 @@
           <p:cNvPr id="127" name="Text 4">
             <a:extLst xmlns:a="http://schemas.openxmlformats.org/drawingml/2006/main">
               <a:ext uri="{FF2B5EF4-FFF2-40B4-BE49-F238E27FC236}">
-                <a16:creationId xmlns:a16="http://schemas.microsoft.com/office/drawing/2014/main" id="{7C1AFBD0-2C6A-4F71-A9B0-6D401BA22D9B}"/>
+                <a16:creationId xmlns:a16="http://schemas.microsoft.com/office/drawing/2014/main" id="{073AA6A5-DBD7-482D-A02D-3ACF04632721}"/>
               </a:ext>
             </a:extLst>
           </p:cNvPr>
@@ -9714,7 +11476,7 @@
                 <a:ea typeface="Arial"/>
                 <a:cs typeface="Arial"/>
               </a:rPr>
-              <a:t>Rizika jsou přijatá. Neověřená opatření zůstávají NOT VERIFIED.</a:t>
+              <a:t>Budoucí rizika jsou přijatá. Jediný otevřený nález je C04 / F1.</a:t>
             </a:r>
             <a:endParaRPr sz="1210" b="0" u="none" strike="noStrike">
               <a:solidFill>
@@ -9732,7 +11494,7 @@
           <p:cNvPr id="128" name="Text 5">
             <a:extLst xmlns:a="http://schemas.openxmlformats.org/drawingml/2006/main">
               <a:ext uri="{FF2B5EF4-FFF2-40B4-BE49-F238E27FC236}">
-                <a16:creationId xmlns:a16="http://schemas.microsoft.com/office/drawing/2014/main" id="{1559EFA5-803B-4260-B1B6-403176317269}"/>
+                <a16:creationId xmlns:a16="http://schemas.microsoft.com/office/drawing/2014/main" id="{0BA40138-8CCC-47C2-BF31-BBCB2289B331}"/>
               </a:ext>
             </a:extLst>
           </p:cNvPr>
@@ -9807,7 +11569,7 @@
           <p:cNvPr id="129" name="Text 6">
             <a:extLst xmlns:a="http://schemas.openxmlformats.org/drawingml/2006/main">
               <a:ext uri="{FF2B5EF4-FFF2-40B4-BE49-F238E27FC236}">
-                <a16:creationId xmlns:a16="http://schemas.microsoft.com/office/drawing/2014/main" id="{DC98D036-5216-4377-A433-43583F98AC61}"/>
+                <a16:creationId xmlns:a16="http://schemas.microsoft.com/office/drawing/2014/main" id="{85A3F4B9-6498-4718-BFD7-F1908A89F0B6}"/>
               </a:ext>
             </a:extLst>
           </p:cNvPr>
@@ -9864,7 +11626,7 @@
                 <a:ea typeface="Arial"/>
                 <a:cs typeface="Arial"/>
               </a:rPr>
-              <a:t>BASELINE: c08-report-2026-10-30</a:t>
+              <a:t>BASELINE: c08-report-2026-10-30-v4</a:t>
             </a:r>
             <a:endParaRPr sz="1040" b="0" u="none" strike="noStrike">
               <a:solidFill>
@@ -9882,7 +11644,7 @@
           <p:cNvPr id="130" name="Text 7">
             <a:extLst xmlns:a="http://schemas.openxmlformats.org/drawingml/2006/main">
               <a:ext uri="{FF2B5EF4-FFF2-40B4-BE49-F238E27FC236}">
-                <a16:creationId xmlns:a16="http://schemas.microsoft.com/office/drawing/2014/main" id="{91E7F811-69D9-4B5A-9E9C-67B662E8CB36}"/>
+                <a16:creationId xmlns:a16="http://schemas.microsoft.com/office/drawing/2014/main" id="{E095230F-CB00-470E-AA58-14D6A9C289DC}"/>
               </a:ext>
             </a:extLst>
           </p:cNvPr>
@@ -9957,7 +11719,7 @@
           <p:cNvPr id="131" name="Shape 8">
             <a:extLst xmlns:a="http://schemas.openxmlformats.org/drawingml/2006/main">
               <a:ext uri="{FF2B5EF4-FFF2-40B4-BE49-F238E27FC236}">
-                <a16:creationId xmlns:a16="http://schemas.microsoft.com/office/drawing/2014/main" id="{7EFD9592-D1F3-4191-9FF4-FE7A753D2E04}"/>
+                <a16:creationId xmlns:a16="http://schemas.microsoft.com/office/drawing/2014/main" id="{41229135-CBEA-4819-8BCA-FA15CFA2C847}"/>
               </a:ext>
             </a:extLst>
           </p:cNvPr>
@@ -10009,7 +11771,7 @@
           <p:cNvPr id="132" name="Text 9">
             <a:extLst xmlns:a="http://schemas.openxmlformats.org/drawingml/2006/main">
               <a:ext uri="{FF2B5EF4-FFF2-40B4-BE49-F238E27FC236}">
-                <a16:creationId xmlns:a16="http://schemas.microsoft.com/office/drawing/2014/main" id="{FE34CA98-CEC2-4C79-B606-C49E1EC04D05}"/>
+                <a16:creationId xmlns:a16="http://schemas.microsoft.com/office/drawing/2014/main" id="{523F1559-1036-430F-B73E-51FEBE4F4792}"/>
               </a:ext>
             </a:extLst>
           </p:cNvPr>
@@ -10061,7 +11823,7 @@
                 <a:ea typeface="Arial"/>
                 <a:cs typeface="Arial"/>
               </a:rPr>
-              <a:t>SWI C08   Baseline: c08-report-2026-10-30   Stav k 30. 10. 2026</a:t>
+              <a:t>SWI C08   Baseline: c08-report-2026-10-30-v4   Stav k 30. 10. 2026</a:t>
             </a:r>
             <a:endParaRPr sz="880" b="0" u="none" strike="noStrike">
               <a:solidFill>
@@ -10079,7 +11841,7 @@
           <p:cNvPr id="133" name="Text 10">
             <a:extLst xmlns:a="http://schemas.openxmlformats.org/drawingml/2006/main">
               <a:ext uri="{FF2B5EF4-FFF2-40B4-BE49-F238E27FC236}">
-                <a16:creationId xmlns:a16="http://schemas.microsoft.com/office/drawing/2014/main" id="{148EE429-04AB-4E55-99A8-0DAD17535246}"/>
+                <a16:creationId xmlns:a16="http://schemas.microsoft.com/office/drawing/2014/main" id="{DBAC188A-BF35-4142-B4C6-347554F75A97}"/>
               </a:ext>
             </a:extLst>
           </p:cNvPr>
@@ -10154,7 +11916,7 @@
           <p:cNvPr id="134" name="Text 11">
             <a:extLst xmlns:a="http://schemas.openxmlformats.org/drawingml/2006/main">
               <a:ext uri="{FF2B5EF4-FFF2-40B4-BE49-F238E27FC236}">
-                <a16:creationId xmlns:a16="http://schemas.microsoft.com/office/drawing/2014/main" id="{E4109918-C36D-4DD1-8D5B-64B76EDE118E}"/>
+                <a16:creationId xmlns:a16="http://schemas.microsoft.com/office/drawing/2014/main" id="{E4E96F30-63F8-4BA4-8D8C-79B74811AF67}"/>
               </a:ext>
             </a:extLst>
           </p:cNvPr>
@@ -10229,7 +11991,7 @@
           <p:cNvPr id="135" name="Text 12">
             <a:extLst xmlns:a="http://schemas.openxmlformats.org/drawingml/2006/main">
               <a:ext uri="{FF2B5EF4-FFF2-40B4-BE49-F238E27FC236}">
-                <a16:creationId xmlns:a16="http://schemas.microsoft.com/office/drawing/2014/main" id="{A544C135-FD26-4C4E-B4ED-A08677EE99D5}"/>
+                <a16:creationId xmlns:a16="http://schemas.microsoft.com/office/drawing/2014/main" id="{C986806C-8E9A-4AB8-B872-EE4DD2335E13}"/>
               </a:ext>
             </a:extLst>
           </p:cNvPr>
@@ -10304,7 +12066,7 @@
           <p:cNvPr id="136" name="Text 13">
             <a:extLst xmlns:a="http://schemas.openxmlformats.org/drawingml/2006/main">
               <a:ext uri="{FF2B5EF4-FFF2-40B4-BE49-F238E27FC236}">
-                <a16:creationId xmlns:a16="http://schemas.microsoft.com/office/drawing/2014/main" id="{0C39785E-C749-414B-BDF9-2A8915A36143}"/>
+                <a16:creationId xmlns:a16="http://schemas.microsoft.com/office/drawing/2014/main" id="{EB43562D-CDDA-4E65-BB1C-E374F5B795A1}"/>
               </a:ext>
             </a:extLst>
           </p:cNvPr>
@@ -10379,7 +12141,7 @@
           <p:cNvPr id="137" name="Text 14">
             <a:extLst xmlns:a="http://schemas.openxmlformats.org/drawingml/2006/main">
               <a:ext uri="{FF2B5EF4-FFF2-40B4-BE49-F238E27FC236}">
-                <a16:creationId xmlns:a16="http://schemas.microsoft.com/office/drawing/2014/main" id="{1895D19D-DCB5-4D82-98DB-7F6B70675568}"/>
+                <a16:creationId xmlns:a16="http://schemas.microsoft.com/office/drawing/2014/main" id="{24FDACA0-3790-4A2A-B609-F28942FD7D29}"/>
               </a:ext>
             </a:extLst>
           </p:cNvPr>
@@ -10454,7 +12216,7 @@
           <p:cNvPr id="138" name="Text 15">
             <a:extLst xmlns:a="http://schemas.openxmlformats.org/drawingml/2006/main">
               <a:ext uri="{FF2B5EF4-FFF2-40B4-BE49-F238E27FC236}">
-                <a16:creationId xmlns:a16="http://schemas.microsoft.com/office/drawing/2014/main" id="{DD8D8517-93AE-43F6-B381-30277777FCA0}"/>
+                <a16:creationId xmlns:a16="http://schemas.microsoft.com/office/drawing/2014/main" id="{A347946B-2B63-40F8-931A-1661EA0FFD30}"/>
               </a:ext>
             </a:extLst>
           </p:cNvPr>
@@ -10529,7 +12291,7 @@
           <p:cNvPr id="139" name="Text 16">
             <a:extLst xmlns:a="http://schemas.openxmlformats.org/drawingml/2006/main">
               <a:ext uri="{FF2B5EF4-FFF2-40B4-BE49-F238E27FC236}">
-                <a16:creationId xmlns:a16="http://schemas.microsoft.com/office/drawing/2014/main" id="{42DF9EEC-2F9E-42D5-8E84-A577A351C3BD}"/>
+                <a16:creationId xmlns:a16="http://schemas.microsoft.com/office/drawing/2014/main" id="{80C4436A-35A3-4DC5-A0F1-553BD268BE19}"/>
               </a:ext>
             </a:extLst>
           </p:cNvPr>
@@ -10568,49 +12330,94 @@
           </a:bodyPr>
           <a:lstStyle xmlns:a="http://schemas.openxmlformats.org/drawingml/2006/main"/>
           <a:p xmlns:a="http://schemas.openxmlformats.org/drawingml/2006/main">
-            <a:r>
-              <a:rPr u="none">
+            <a:pPr defTabSz="914400">
+              <a:lnSpc>
+                <a:spcPct val="100000"/>
+              </a:lnSpc>
+              <a:buNone/>
+              <a:tabLst>
+                <a:tab pos="0" algn="l"/>
+              </a:tabLst>
+            </a:pPr>
+            <a:r>
+              <a:rPr sz="1090" b="0" u="none" strike="noStrike">
                 <a:solidFill>
                   <a:srgbClr val="26354B"/>
                 </a:solidFill>
-                <a:hlinkClick xmlns:r="http://schemas.openxmlformats.org/officeDocument/2006/relationships" r:id="Rd7b6d7bccb4c49e9"/>
+                <a:latin typeface="Arial"/>
+                <a:ea typeface="Arial"/>
+                <a:cs typeface="Arial"/>
               </a:rPr>
               <a:t>R-03</a:t>
             </a:r>
-            <a:br>
-              <a:rPr u="none">
+            <a:endParaRPr sz="1090" b="0" u="none" strike="noStrike">
+              <a:solidFill>
+                <a:srgbClr val="000000"/>
+              </a:solidFill>
+              <a:latin typeface="Arial"/>
+              <a:ea typeface="Arial"/>
+              <a:cs typeface="Arial"/>
+            </a:endParaRPr>
+          </a:p>
+          <a:p xmlns:a="http://schemas.openxmlformats.org/drawingml/2006/main">
+            <a:pPr defTabSz="914400">
+              <a:lnSpc>
+                <a:spcPct val="100000"/>
+              </a:lnSpc>
+              <a:buNone/>
+              <a:tabLst>
+                <a:tab pos="0" algn="l"/>
+              </a:tabLst>
+            </a:pPr>
+            <a:r>
+              <a:rPr sz="1090" b="0" u="none" strike="noStrike">
                 <a:solidFill>
                   <a:srgbClr val="26354B"/>
                 </a:solidFill>
-                <a:hlinkClick xmlns:r="http://schemas.openxmlformats.org/officeDocument/2006/relationships" r:id="Rd7b6d7bccb4c49e9"/>
-              </a:rPr>
-            </a:br>
-            <a:r>
-              <a:rPr u="none">
+                <a:latin typeface="Arial"/>
+                <a:ea typeface="Arial"/>
+                <a:cs typeface="Arial"/>
+              </a:rPr>
+              <a:t>Dvě potvrzení</a:t>
+            </a:r>
+            <a:endParaRPr sz="1090" b="0" u="none" strike="noStrike">
+              <a:solidFill>
+                <a:srgbClr val="000000"/>
+              </a:solidFill>
+              <a:latin typeface="Arial"/>
+              <a:ea typeface="Arial"/>
+              <a:cs typeface="Arial"/>
+            </a:endParaRPr>
+          </a:p>
+          <a:p xmlns:a="http://schemas.openxmlformats.org/drawingml/2006/main">
+            <a:pPr defTabSz="914400">
+              <a:lnSpc>
+                <a:spcPct val="100000"/>
+              </a:lnSpc>
+              <a:buNone/>
+              <a:tabLst>
+                <a:tab pos="0" algn="l"/>
+              </a:tabLst>
+            </a:pPr>
+            <a:r>
+              <a:rPr sz="1090" b="0" u="none" strike="noStrike">
                 <a:solidFill>
                   <a:srgbClr val="26354B"/>
                 </a:solidFill>
-                <a:hlinkClick xmlns:r="http://schemas.openxmlformats.org/officeDocument/2006/relationships" r:id="Rd7b6d7bccb4c49e9"/>
-              </a:rPr>
-              <a:t>Dvě potvrzení</a:t>
-            </a:r>
-            <a:br>
-              <a:rPr u="none">
-                <a:solidFill>
-                  <a:srgbClr val="26354B"/>
-                </a:solidFill>
-                <a:hlinkClick xmlns:r="http://schemas.openxmlformats.org/officeDocument/2006/relationships" r:id="Rd7b6d7bccb4c49e9"/>
-              </a:rPr>
-            </a:br>
-            <a:r>
-              <a:rPr u="none">
-                <a:solidFill>
-                  <a:srgbClr val="26354B"/>
-                </a:solidFill>
-                <a:hlinkClick xmlns:r="http://schemas.openxmlformats.org/officeDocument/2006/relationships" r:id="Rd7b6d7bccb4c49e9"/>
+                <a:latin typeface="Arial"/>
+                <a:ea typeface="Arial"/>
+                <a:cs typeface="Arial"/>
               </a:rPr>
               <a:t>stejné učebny</a:t>
             </a:r>
+            <a:endParaRPr sz="1090" b="0" u="none" strike="noStrike">
+              <a:solidFill>
+                <a:srgbClr val="000000"/>
+              </a:solidFill>
+              <a:latin typeface="Arial"/>
+              <a:ea typeface="Arial"/>
+              <a:cs typeface="Arial"/>
+            </a:endParaRPr>
           </a:p>
         </p:txBody>
       </p:sp>
@@ -10619,7 +12426,7 @@
           <p:cNvPr id="140" name="Text 17">
             <a:extLst xmlns:a="http://schemas.openxmlformats.org/drawingml/2006/main">
               <a:ext uri="{FF2B5EF4-FFF2-40B4-BE49-F238E27FC236}">
-                <a16:creationId xmlns:a16="http://schemas.microsoft.com/office/drawing/2014/main" id="{FBE37DBF-762D-4F42-ABF0-BEBC589F329F}"/>
+                <a16:creationId xmlns:a16="http://schemas.microsoft.com/office/drawing/2014/main" id="{224C45CD-5BE9-42F2-839E-EB943AB0FC35}"/>
               </a:ext>
             </a:extLst>
           </p:cNvPr>
@@ -10724,7 +12531,7 @@
           <p:cNvPr id="141" name="Text 18">
             <a:extLst xmlns:a="http://schemas.openxmlformats.org/drawingml/2006/main">
               <a:ext uri="{FF2B5EF4-FFF2-40B4-BE49-F238E27FC236}">
-                <a16:creationId xmlns:a16="http://schemas.microsoft.com/office/drawing/2014/main" id="{DCC0A606-1B5C-4995-A3FB-9BCF45215C0E}"/>
+                <a16:creationId xmlns:a16="http://schemas.microsoft.com/office/drawing/2014/main" id="{A17D425E-89E0-4FEC-A306-18A1972CE16D}"/>
               </a:ext>
             </a:extLst>
           </p:cNvPr>
@@ -10799,7 +12606,7 @@
           <p:cNvPr id="142" name="Text 19">
             <a:extLst xmlns:a="http://schemas.openxmlformats.org/drawingml/2006/main">
               <a:ext uri="{FF2B5EF4-FFF2-40B4-BE49-F238E27FC236}">
-                <a16:creationId xmlns:a16="http://schemas.microsoft.com/office/drawing/2014/main" id="{B844BF9C-EE90-4AA9-A59F-D840E947DE15}"/>
+                <a16:creationId xmlns:a16="http://schemas.microsoft.com/office/drawing/2014/main" id="{8A6F547C-DCC3-4D6E-815B-AE9D2999FE7F}"/>
               </a:ext>
             </a:extLst>
           </p:cNvPr>
@@ -10838,49 +12645,94 @@
           </a:bodyPr>
           <a:lstStyle xmlns:a="http://schemas.openxmlformats.org/drawingml/2006/main"/>
           <a:p xmlns:a="http://schemas.openxmlformats.org/drawingml/2006/main">
-            <a:r>
-              <a:rPr u="none">
+            <a:pPr defTabSz="914400">
+              <a:lnSpc>
+                <a:spcPct val="100000"/>
+              </a:lnSpc>
+              <a:buNone/>
+              <a:tabLst>
+                <a:tab pos="0" algn="l"/>
+              </a:tabLst>
+            </a:pPr>
+            <a:r>
+              <a:rPr sz="1090" b="0" u="none" strike="noStrike">
                 <a:solidFill>
                   <a:srgbClr val="26354B"/>
                 </a:solidFill>
-                <a:hlinkClick xmlns:r="http://schemas.openxmlformats.org/officeDocument/2006/relationships" r:id="R73d35ea2e69b4df7"/>
+                <a:latin typeface="Arial"/>
+                <a:ea typeface="Arial"/>
+                <a:cs typeface="Arial"/>
               </a:rPr>
               <a:t>DB ochrana a souběžné testy</a:t>
             </a:r>
-            <a:br>
-              <a:rPr u="none">
+            <a:endParaRPr sz="1090" b="0" u="none" strike="noStrike">
+              <a:solidFill>
+                <a:srgbClr val="000000"/>
+              </a:solidFill>
+              <a:latin typeface="Arial"/>
+              <a:ea typeface="Arial"/>
+              <a:cs typeface="Arial"/>
+            </a:endParaRPr>
+          </a:p>
+          <a:p xmlns:a="http://schemas.openxmlformats.org/drawingml/2006/main">
+            <a:pPr defTabSz="914400">
+              <a:lnSpc>
+                <a:spcPct val="100000"/>
+              </a:lnSpc>
+              <a:buNone/>
+              <a:tabLst>
+                <a:tab pos="0" algn="l"/>
+              </a:tabLst>
+            </a:pPr>
+            <a:r>
+              <a:rPr sz="1090" b="0" u="none" strike="noStrike">
                 <a:solidFill>
                   <a:srgbClr val="26354B"/>
                 </a:solidFill>
-                <a:hlinkClick xmlns:r="http://schemas.openxmlformats.org/officeDocument/2006/relationships" r:id="R73d35ea2e69b4df7"/>
-              </a:rPr>
-            </a:br>
-            <a:r>
-              <a:rPr u="none">
+                <a:latin typeface="Arial"/>
+                <a:ea typeface="Arial"/>
+                <a:cs typeface="Arial"/>
+              </a:rPr>
+              <a:t>Jakub, 30. 10.</a:t>
+            </a:r>
+            <a:endParaRPr sz="1090" b="0" u="none" strike="noStrike">
+              <a:solidFill>
+                <a:srgbClr val="000000"/>
+              </a:solidFill>
+              <a:latin typeface="Arial"/>
+              <a:ea typeface="Arial"/>
+              <a:cs typeface="Arial"/>
+            </a:endParaRPr>
+          </a:p>
+          <a:p xmlns:a="http://schemas.openxmlformats.org/drawingml/2006/main">
+            <a:pPr defTabSz="914400">
+              <a:lnSpc>
+                <a:spcPct val="100000"/>
+              </a:lnSpc>
+              <a:buNone/>
+              <a:tabLst>
+                <a:tab pos="0" algn="l"/>
+              </a:tabLst>
+            </a:pPr>
+            <a:r>
+              <a:rPr sz="1090" b="0" u="none" strike="noStrike">
                 <a:solidFill>
                   <a:srgbClr val="26354B"/>
                 </a:solidFill>
-                <a:hlinkClick xmlns:r="http://schemas.openxmlformats.org/officeDocument/2006/relationships" r:id="R73d35ea2e69b4df7"/>
-              </a:rPr>
-              <a:t>Jakub, 30. 10.</a:t>
-            </a:r>
-            <a:br>
-              <a:rPr u="none">
-                <a:solidFill>
-                  <a:srgbClr val="26354B"/>
-                </a:solidFill>
-                <a:hlinkClick xmlns:r="http://schemas.openxmlformats.org/officeDocument/2006/relationships" r:id="R73d35ea2e69b4df7"/>
-              </a:rPr>
-            </a:br>
-            <a:r>
-              <a:rPr u="none">
-                <a:solidFill>
-                  <a:srgbClr val="26354B"/>
-                </a:solidFill>
-                <a:hlinkClick xmlns:r="http://schemas.openxmlformats.org/officeDocument/2006/relationships" r:id="R73d35ea2e69b4df7"/>
+                <a:latin typeface="Arial"/>
+                <a:ea typeface="Arial"/>
+                <a:cs typeface="Arial"/>
               </a:rPr>
               <a:t>VERIFIED</a:t>
             </a:r>
+            <a:endParaRPr sz="1090" b="0" u="none" strike="noStrike">
+              <a:solidFill>
+                <a:srgbClr val="000000"/>
+              </a:solidFill>
+              <a:latin typeface="Arial"/>
+              <a:ea typeface="Arial"/>
+              <a:cs typeface="Arial"/>
+            </a:endParaRPr>
           </a:p>
         </p:txBody>
       </p:sp>
@@ -10889,7 +12741,7 @@
           <p:cNvPr id="143" name="Text 20">
             <a:extLst xmlns:a="http://schemas.openxmlformats.org/drawingml/2006/main">
               <a:ext uri="{FF2B5EF4-FFF2-40B4-BE49-F238E27FC236}">
-                <a16:creationId xmlns:a16="http://schemas.microsoft.com/office/drawing/2014/main" id="{B844C321-A603-44D0-844C-653728D277CA}"/>
+                <a16:creationId xmlns:a16="http://schemas.microsoft.com/office/drawing/2014/main" id="{967330D1-4F0E-483B-8D1B-57A558BC4BCD}"/>
               </a:ext>
             </a:extLst>
           </p:cNvPr>
@@ -10994,7 +12846,7 @@
           <p:cNvPr id="144" name="Text 21">
             <a:extLst xmlns:a="http://schemas.openxmlformats.org/drawingml/2006/main">
               <a:ext uri="{FF2B5EF4-FFF2-40B4-BE49-F238E27FC236}">
-                <a16:creationId xmlns:a16="http://schemas.microsoft.com/office/drawing/2014/main" id="{011638A5-4839-4AAB-A5A0-B226882EDDBF}"/>
+                <a16:creationId xmlns:a16="http://schemas.microsoft.com/office/drawing/2014/main" id="{A0D798F7-B1F0-4D13-ACE8-5FBE8251BD56}"/>
               </a:ext>
             </a:extLst>
           </p:cNvPr>
@@ -11099,7 +12951,7 @@
           <p:cNvPr id="145" name="Text 22">
             <a:extLst xmlns:a="http://schemas.openxmlformats.org/drawingml/2006/main">
               <a:ext uri="{FF2B5EF4-FFF2-40B4-BE49-F238E27FC236}">
-                <a16:creationId xmlns:a16="http://schemas.microsoft.com/office/drawing/2014/main" id="{0496F487-A1EC-4FBC-8C36-089F73F249F1}"/>
+                <a16:creationId xmlns:a16="http://schemas.microsoft.com/office/drawing/2014/main" id="{1A357BCA-282D-481A-8FC2-3313352DBF8F}"/>
               </a:ext>
             </a:extLst>
           </p:cNvPr>
@@ -11138,49 +12990,94 @@
           </a:bodyPr>
           <a:lstStyle xmlns:a="http://schemas.openxmlformats.org/drawingml/2006/main"/>
           <a:p xmlns:a="http://schemas.openxmlformats.org/drawingml/2006/main">
-            <a:r>
-              <a:rPr u="none">
+            <a:pPr defTabSz="914400">
+              <a:lnSpc>
+                <a:spcPct val="100000"/>
+              </a:lnSpc>
+              <a:buNone/>
+              <a:tabLst>
+                <a:tab pos="0" algn="l"/>
+              </a:tabLst>
+            </a:pPr>
+            <a:r>
+              <a:rPr sz="1090" b="0" u="none" strike="noStrike">
                 <a:solidFill>
                   <a:srgbClr val="26354B"/>
                 </a:solidFill>
-                <a:hlinkClick xmlns:r="http://schemas.openxmlformats.org/officeDocument/2006/relationships" r:id="R464acb43eeb54844"/>
+                <a:latin typeface="Arial"/>
+                <a:ea typeface="Arial"/>
+                <a:cs typeface="Arial"/>
               </a:rPr>
               <a:t>R-01</a:t>
             </a:r>
-            <a:br>
-              <a:rPr u="none">
+            <a:endParaRPr sz="1090" b="0" u="none" strike="noStrike">
+              <a:solidFill>
+                <a:srgbClr val="000000"/>
+              </a:solidFill>
+              <a:latin typeface="Arial"/>
+              <a:ea typeface="Arial"/>
+              <a:cs typeface="Arial"/>
+            </a:endParaRPr>
+          </a:p>
+          <a:p xmlns:a="http://schemas.openxmlformats.org/drawingml/2006/main">
+            <a:pPr defTabSz="914400">
+              <a:lnSpc>
+                <a:spcPct val="100000"/>
+              </a:lnSpc>
+              <a:buNone/>
+              <a:tabLst>
+                <a:tab pos="0" algn="l"/>
+              </a:tabLst>
+            </a:pPr>
+            <a:r>
+              <a:rPr sz="1090" b="0" u="none" strike="noStrike">
                 <a:solidFill>
                   <a:srgbClr val="26354B"/>
                 </a:solidFill>
-                <a:hlinkClick xmlns:r="http://schemas.openxmlformats.org/officeDocument/2006/relationships" r:id="R464acb43eeb54844"/>
-              </a:rPr>
-            </a:br>
-            <a:r>
-              <a:rPr u="none">
+                <a:latin typeface="Arial"/>
+                <a:ea typeface="Arial"/>
+                <a:cs typeface="Arial"/>
+              </a:rPr>
+              <a:t>Dokumentace</a:t>
+            </a:r>
+            <a:endParaRPr sz="1090" b="0" u="none" strike="noStrike">
+              <a:solidFill>
+                <a:srgbClr val="000000"/>
+              </a:solidFill>
+              <a:latin typeface="Arial"/>
+              <a:ea typeface="Arial"/>
+              <a:cs typeface="Arial"/>
+            </a:endParaRPr>
+          </a:p>
+          <a:p xmlns:a="http://schemas.openxmlformats.org/drawingml/2006/main">
+            <a:pPr defTabSz="914400">
+              <a:lnSpc>
+                <a:spcPct val="100000"/>
+              </a:lnSpc>
+              <a:buNone/>
+              <a:tabLst>
+                <a:tab pos="0" algn="l"/>
+              </a:tabLst>
+            </a:pPr>
+            <a:r>
+              <a:rPr sz="1090" b="0" u="none" strike="noStrike">
                 <a:solidFill>
                   <a:srgbClr val="26354B"/>
                 </a:solidFill>
-                <a:hlinkClick xmlns:r="http://schemas.openxmlformats.org/officeDocument/2006/relationships" r:id="R464acb43eeb54844"/>
-              </a:rPr>
-              <a:t>Dokumentace</a:t>
-            </a:r>
-            <a:br>
-              <a:rPr u="none">
-                <a:solidFill>
-                  <a:srgbClr val="26354B"/>
-                </a:solidFill>
-                <a:hlinkClick xmlns:r="http://schemas.openxmlformats.org/officeDocument/2006/relationships" r:id="R464acb43eeb54844"/>
-              </a:rPr>
-            </a:br>
-            <a:r>
-              <a:rPr u="none">
-                <a:solidFill>
-                  <a:srgbClr val="26354B"/>
-                </a:solidFill>
-                <a:hlinkClick xmlns:r="http://schemas.openxmlformats.org/officeDocument/2006/relationships" r:id="R464acb43eeb54844"/>
+                <a:latin typeface="Arial"/>
+                <a:ea typeface="Arial"/>
+                <a:cs typeface="Arial"/>
               </a:rPr>
               <a:t>neodpovídá kódu</a:t>
             </a:r>
+            <a:endParaRPr sz="1090" b="0" u="none" strike="noStrike">
+              <a:solidFill>
+                <a:srgbClr val="000000"/>
+              </a:solidFill>
+              <a:latin typeface="Arial"/>
+              <a:ea typeface="Arial"/>
+              <a:cs typeface="Arial"/>
+            </a:endParaRPr>
           </a:p>
         </p:txBody>
       </p:sp>
@@ -11189,7 +13086,7 @@
           <p:cNvPr id="146" name="Text 23">
             <a:extLst xmlns:a="http://schemas.openxmlformats.org/drawingml/2006/main">
               <a:ext uri="{FF2B5EF4-FFF2-40B4-BE49-F238E27FC236}">
-                <a16:creationId xmlns:a16="http://schemas.microsoft.com/office/drawing/2014/main" id="{7EF1C325-03E6-403A-8C3B-32648C15A81B}"/>
+                <a16:creationId xmlns:a16="http://schemas.microsoft.com/office/drawing/2014/main" id="{76B4995E-CDC6-4352-B853-0F1D3E5221AD}"/>
               </a:ext>
             </a:extLst>
           </p:cNvPr>
@@ -11294,7 +13191,7 @@
           <p:cNvPr id="147" name="Text 24">
             <a:extLst xmlns:a="http://schemas.openxmlformats.org/drawingml/2006/main">
               <a:ext uri="{FF2B5EF4-FFF2-40B4-BE49-F238E27FC236}">
-                <a16:creationId xmlns:a16="http://schemas.microsoft.com/office/drawing/2014/main" id="{926AC234-382F-4BD0-A681-BF4ABAE34659}"/>
+                <a16:creationId xmlns:a16="http://schemas.microsoft.com/office/drawing/2014/main" id="{D914CAA7-7FD4-48C2-BB39-40B51A012324}"/>
               </a:ext>
             </a:extLst>
           </p:cNvPr>
@@ -11369,7 +13266,7 @@
           <p:cNvPr id="148" name="Text 25">
             <a:extLst xmlns:a="http://schemas.openxmlformats.org/drawingml/2006/main">
               <a:ext uri="{FF2B5EF4-FFF2-40B4-BE49-F238E27FC236}">
-                <a16:creationId xmlns:a16="http://schemas.microsoft.com/office/drawing/2014/main" id="{8F73F239-83DB-48F9-95B7-077E731B88D9}"/>
+                <a16:creationId xmlns:a16="http://schemas.microsoft.com/office/drawing/2014/main" id="{37A7BFB0-A4A8-4EC8-B880-BE95AB1E95F1}"/>
               </a:ext>
             </a:extLst>
           </p:cNvPr>
@@ -11504,7 +13401,7 @@
           <p:cNvPr id="149" name="Text 26">
             <a:extLst xmlns:a="http://schemas.openxmlformats.org/drawingml/2006/main">
               <a:ext uri="{FF2B5EF4-FFF2-40B4-BE49-F238E27FC236}">
-                <a16:creationId xmlns:a16="http://schemas.microsoft.com/office/drawing/2014/main" id="{0FAECED3-4910-4B52-A9D1-D2EE5155AA24}"/>
+                <a16:creationId xmlns:a16="http://schemas.microsoft.com/office/drawing/2014/main" id="{DFEBC74F-0D59-4DEC-943A-6566896A50F9}"/>
               </a:ext>
             </a:extLst>
           </p:cNvPr>
@@ -11609,7 +13506,7 @@
           <p:cNvPr id="150" name="Text 27">
             <a:extLst xmlns:a="http://schemas.openxmlformats.org/drawingml/2006/main">
               <a:ext uri="{FF2B5EF4-FFF2-40B4-BE49-F238E27FC236}">
-                <a16:creationId xmlns:a16="http://schemas.microsoft.com/office/drawing/2014/main" id="{D7BEF81C-871B-4D97-A624-2FDCE07C5027}"/>
+                <a16:creationId xmlns:a16="http://schemas.microsoft.com/office/drawing/2014/main" id="{DBDE8153-DB1E-490E-BB8C-239F3CC4BBAF}"/>
               </a:ext>
             </a:extLst>
           </p:cNvPr>
@@ -11714,7 +13611,7 @@
           <p:cNvPr id="151" name="Text 28">
             <a:extLst xmlns:a="http://schemas.openxmlformats.org/drawingml/2006/main">
               <a:ext uri="{FF2B5EF4-FFF2-40B4-BE49-F238E27FC236}">
-                <a16:creationId xmlns:a16="http://schemas.microsoft.com/office/drawing/2014/main" id="{ECF2D14A-B2D8-461B-B209-B23772B284A7}"/>
+                <a16:creationId xmlns:a16="http://schemas.microsoft.com/office/drawing/2014/main" id="{F791F44E-550C-4055-A580-6D5EB3BD2F60}"/>
               </a:ext>
             </a:extLst>
           </p:cNvPr>
@@ -11753,49 +13650,94 @@
           </a:bodyPr>
           <a:lstStyle xmlns:a="http://schemas.openxmlformats.org/drawingml/2006/main"/>
           <a:p xmlns:a="http://schemas.openxmlformats.org/drawingml/2006/main">
-            <a:r>
-              <a:rPr u="none">
+            <a:pPr defTabSz="914400">
+              <a:lnSpc>
+                <a:spcPct val="100000"/>
+              </a:lnSpc>
+              <a:buNone/>
+              <a:tabLst>
+                <a:tab pos="0" algn="l"/>
+              </a:tabLst>
+            </a:pPr>
+            <a:r>
+              <a:rPr sz="1090" b="0" u="none" strike="noStrike">
                 <a:solidFill>
                   <a:srgbClr val="26354B"/>
                 </a:solidFill>
-                <a:hlinkClick xmlns:r="http://schemas.openxmlformats.org/officeDocument/2006/relationships" r:id="Raec2925eeaaf41e2"/>
+                <a:latin typeface="Arial"/>
+                <a:ea typeface="Arial"/>
+                <a:cs typeface="Arial"/>
               </a:rPr>
               <a:t>R-04</a:t>
             </a:r>
-            <a:br>
-              <a:rPr u="none">
+            <a:endParaRPr sz="1090" b="0" u="none" strike="noStrike">
+              <a:solidFill>
+                <a:srgbClr val="000000"/>
+              </a:solidFill>
+              <a:latin typeface="Arial"/>
+              <a:ea typeface="Arial"/>
+              <a:cs typeface="Arial"/>
+            </a:endParaRPr>
+          </a:p>
+          <a:p xmlns:a="http://schemas.openxmlformats.org/drawingml/2006/main">
+            <a:pPr defTabSz="914400">
+              <a:lnSpc>
+                <a:spcPct val="100000"/>
+              </a:lnSpc>
+              <a:buNone/>
+              <a:tabLst>
+                <a:tab pos="0" algn="l"/>
+              </a:tabLst>
+            </a:pPr>
+            <a:r>
+              <a:rPr sz="1090" b="0" u="none" strike="noStrike">
                 <a:solidFill>
                   <a:srgbClr val="26354B"/>
                 </a:solidFill>
-                <a:hlinkClick xmlns:r="http://schemas.openxmlformats.org/officeDocument/2006/relationships" r:id="Raec2925eeaaf41e2"/>
-              </a:rPr>
-            </a:br>
-            <a:r>
-              <a:rPr u="none">
+                <a:latin typeface="Arial"/>
+                <a:ea typeface="Arial"/>
+                <a:cs typeface="Arial"/>
+              </a:rPr>
+              <a:t>Úkol ze cvičení</a:t>
+            </a:r>
+            <a:endParaRPr sz="1090" b="0" u="none" strike="noStrike">
+              <a:solidFill>
+                <a:srgbClr val="000000"/>
+              </a:solidFill>
+              <a:latin typeface="Arial"/>
+              <a:ea typeface="Arial"/>
+              <a:cs typeface="Arial"/>
+            </a:endParaRPr>
+          </a:p>
+          <a:p xmlns:a="http://schemas.openxmlformats.org/drawingml/2006/main">
+            <a:pPr defTabSz="914400">
+              <a:lnSpc>
+                <a:spcPct val="100000"/>
+              </a:lnSpc>
+              <a:buNone/>
+              <a:tabLst>
+                <a:tab pos="0" algn="l"/>
+              </a:tabLst>
+            </a:pPr>
+            <a:r>
+              <a:rPr sz="1090" b="0" u="none" strike="noStrike">
                 <a:solidFill>
                   <a:srgbClr val="26354B"/>
                 </a:solidFill>
-                <a:hlinkClick xmlns:r="http://schemas.openxmlformats.org/officeDocument/2006/relationships" r:id="Raec2925eeaaf41e2"/>
-              </a:rPr>
-              <a:t>Úkol ze cvičení</a:t>
-            </a:r>
-            <a:br>
-              <a:rPr u="none">
-                <a:solidFill>
-                  <a:srgbClr val="26354B"/>
-                </a:solidFill>
-                <a:hlinkClick xmlns:r="http://schemas.openxmlformats.org/officeDocument/2006/relationships" r:id="Raec2925eeaaf41e2"/>
-              </a:rPr>
-            </a:br>
-            <a:r>
-              <a:rPr u="none">
-                <a:solidFill>
-                  <a:srgbClr val="26354B"/>
-                </a:solidFill>
-                <a:hlinkClick xmlns:r="http://schemas.openxmlformats.org/officeDocument/2006/relationships" r:id="Raec2925eeaaf41e2"/>
+                <a:latin typeface="Arial"/>
+                <a:ea typeface="Arial"/>
+                <a:cs typeface="Arial"/>
               </a:rPr>
               <a:t>nebude včas</a:t>
             </a:r>
+            <a:endParaRPr sz="1090" b="0" u="none" strike="noStrike">
+              <a:solidFill>
+                <a:srgbClr val="000000"/>
+              </a:solidFill>
+              <a:latin typeface="Arial"/>
+              <a:ea typeface="Arial"/>
+              <a:cs typeface="Arial"/>
+            </a:endParaRPr>
           </a:p>
         </p:txBody>
       </p:sp>
@@ -11804,7 +13746,7 @@
           <p:cNvPr id="152" name="Text 29">
             <a:extLst xmlns:a="http://schemas.openxmlformats.org/drawingml/2006/main">
               <a:ext uri="{FF2B5EF4-FFF2-40B4-BE49-F238E27FC236}">
-                <a16:creationId xmlns:a16="http://schemas.microsoft.com/office/drawing/2014/main" id="{2288A713-4B0C-454C-9BB5-450A2DD039F1}"/>
+                <a16:creationId xmlns:a16="http://schemas.microsoft.com/office/drawing/2014/main" id="{D346E14F-6C80-444D-84EB-D011F4490B6A}"/>
               </a:ext>
             </a:extLst>
           </p:cNvPr>
@@ -11909,7 +13851,7 @@
           <p:cNvPr id="153" name="Text 30">
             <a:extLst xmlns:a="http://schemas.openxmlformats.org/drawingml/2006/main">
               <a:ext uri="{FF2B5EF4-FFF2-40B4-BE49-F238E27FC236}">
-                <a16:creationId xmlns:a16="http://schemas.microsoft.com/office/drawing/2014/main" id="{A1EDA266-7CD1-4AA4-A21D-DCBCE9CFBC46}"/>
+                <a16:creationId xmlns:a16="http://schemas.microsoft.com/office/drawing/2014/main" id="{E811B97A-DD22-4F8D-884A-0826182F6202}"/>
               </a:ext>
             </a:extLst>
           </p:cNvPr>
@@ -11984,7 +13926,7 @@
           <p:cNvPr id="154" name="Text 31">
             <a:extLst xmlns:a="http://schemas.openxmlformats.org/drawingml/2006/main">
               <a:ext uri="{FF2B5EF4-FFF2-40B4-BE49-F238E27FC236}">
-                <a16:creationId xmlns:a16="http://schemas.microsoft.com/office/drawing/2014/main" id="{6E6EC528-0D82-4F5A-8B2B-974EF0F2B8E2}"/>
+                <a16:creationId xmlns:a16="http://schemas.microsoft.com/office/drawing/2014/main" id="{5A9A2FCC-957D-4B08-B65E-C55D53CF9C89}"/>
               </a:ext>
             </a:extLst>
           </p:cNvPr>
@@ -12119,7 +14061,7 @@
           <p:cNvPr id="155" name="Text 32">
             <a:extLst xmlns:a="http://schemas.openxmlformats.org/drawingml/2006/main">
               <a:ext uri="{FF2B5EF4-FFF2-40B4-BE49-F238E27FC236}">
-                <a16:creationId xmlns:a16="http://schemas.microsoft.com/office/drawing/2014/main" id="{D2847A1C-A17C-4AD9-B18A-D4446C2D4C3A}"/>
+                <a16:creationId xmlns:a16="http://schemas.microsoft.com/office/drawing/2014/main" id="{9C718BE0-E5B9-4DC8-A937-321D1E708A24}"/>
               </a:ext>
             </a:extLst>
           </p:cNvPr>
@@ -12224,7 +14166,7 @@
           <p:cNvPr id="156" name="Text 33">
             <a:extLst xmlns:a="http://schemas.openxmlformats.org/drawingml/2006/main">
               <a:ext uri="{FF2B5EF4-FFF2-40B4-BE49-F238E27FC236}">
-                <a16:creationId xmlns:a16="http://schemas.microsoft.com/office/drawing/2014/main" id="{E8FAFDE8-84DE-4781-8472-CD4AF9DAFC4D}"/>
+                <a16:creationId xmlns:a16="http://schemas.microsoft.com/office/drawing/2014/main" id="{DB621FD1-7494-49D9-B4EF-B5D185A2FD33}"/>
               </a:ext>
             </a:extLst>
           </p:cNvPr>
@@ -12329,7 +14271,7 @@
           <p:cNvPr id="157" name="Text 34">
             <a:extLst xmlns:a="http://schemas.openxmlformats.org/drawingml/2006/main">
               <a:ext uri="{FF2B5EF4-FFF2-40B4-BE49-F238E27FC236}">
-                <a16:creationId xmlns:a16="http://schemas.microsoft.com/office/drawing/2014/main" id="{4CD9D11F-80D8-4229-B0D8-DAE6C5F052F0}"/>
+                <a16:creationId xmlns:a16="http://schemas.microsoft.com/office/drawing/2014/main" id="{1DF70F05-6853-4B0A-93BD-42E8A7D3FE19}"/>
               </a:ext>
             </a:extLst>
           </p:cNvPr>
@@ -12404,7 +14346,7 @@
           <p:cNvPr id="158" name="Text 35">
             <a:extLst xmlns:a="http://schemas.openxmlformats.org/drawingml/2006/main">
               <a:ext uri="{FF2B5EF4-FFF2-40B4-BE49-F238E27FC236}">
-                <a16:creationId xmlns:a16="http://schemas.microsoft.com/office/drawing/2014/main" id="{CABA3C19-9D24-4E0D-824C-08942BC732D9}"/>
+                <a16:creationId xmlns:a16="http://schemas.microsoft.com/office/drawing/2014/main" id="{18EB3AA7-111E-422C-8AE7-998E8DDB820D}"/>
               </a:ext>
             </a:extLst>
           </p:cNvPr>
@@ -12443,32 +14385,64 @@
           </a:bodyPr>
           <a:lstStyle xmlns:a="http://schemas.openxmlformats.org/drawingml/2006/main"/>
           <a:p xmlns:a="http://schemas.openxmlformats.org/drawingml/2006/main">
-            <a:r>
-              <a:rPr u="none">
+            <a:pPr defTabSz="914400">
+              <a:lnSpc>
+                <a:spcPct val="100000"/>
+              </a:lnSpc>
+              <a:buNone/>
+              <a:tabLst>
+                <a:tab pos="0" algn="l"/>
+              </a:tabLst>
+            </a:pPr>
+            <a:r>
+              <a:rPr sz="1260" b="0" u="none" strike="noStrike">
                 <a:solidFill>
                   <a:srgbClr val="26354B"/>
                 </a:solidFill>
-                <a:hlinkClick xmlns:r="http://schemas.openxmlformats.org/officeDocument/2006/relationships" r:id="R43b01e0b22e2494b"/>
-              </a:rPr>
-              <a:t>F1 ACCEPTED / OPEN: chybí C04. Vlastník a termín uzavření nejsou určeny.</a:t>
-            </a:r>
-            <a:br>
-              <a:rPr u="none">
+                <a:latin typeface="Arial"/>
+                <a:ea typeface="Arial"/>
+                <a:cs typeface="Arial"/>
+              </a:rPr>
+              <a:t>F1 ACCEPTED / OPEN: chybí úplný řetězec C04.</a:t>
+            </a:r>
+            <a:endParaRPr sz="1260" b="0" u="none" strike="noStrike">
+              <a:solidFill>
+                <a:srgbClr val="000000"/>
+              </a:solidFill>
+              <a:latin typeface="Arial"/>
+              <a:ea typeface="Arial"/>
+              <a:cs typeface="Arial"/>
+            </a:endParaRPr>
+          </a:p>
+          <a:p xmlns:a="http://schemas.openxmlformats.org/drawingml/2006/main">
+            <a:pPr defTabSz="914400">
+              <a:lnSpc>
+                <a:spcPct val="100000"/>
+              </a:lnSpc>
+              <a:buNone/>
+              <a:tabLst>
+                <a:tab pos="0" algn="l"/>
+              </a:tabLst>
+            </a:pPr>
+            <a:r>
+              <a:rPr sz="1260" b="0" u="none" strike="noStrike">
                 <a:solidFill>
                   <a:srgbClr val="26354B"/>
                 </a:solidFill>
-                <a:hlinkClick xmlns:r="http://schemas.openxmlformats.org/officeDocument/2006/relationships" r:id="R43b01e0b22e2494b"/>
-              </a:rPr>
-            </a:br>
-            <a:r>
-              <a:rPr u="none">
-                <a:solidFill>
-                  <a:srgbClr val="26354B"/>
-                </a:solidFill>
-                <a:hlinkClick xmlns:r="http://schemas.openxmlformats.org/officeDocument/2006/relationships" r:id="R43b01e0b22e2494b"/>
-              </a:rPr>
-              <a:t>Plán: Kryštof do 2. 11. zajistí kapacity a termín obhajoby.</a:t>
-            </a:r>
+                <a:latin typeface="Arial"/>
+                <a:ea typeface="Arial"/>
+                <a:cs typeface="Arial"/>
+              </a:rPr>
+              <a:t>Další krok: doplnit kritérium, měření a navazující rozhodnutí.</a:t>
+            </a:r>
+            <a:endParaRPr sz="1260" b="0" u="none" strike="noStrike">
+              <a:solidFill>
+                <a:srgbClr val="000000"/>
+              </a:solidFill>
+              <a:latin typeface="Arial"/>
+              <a:ea typeface="Arial"/>
+              <a:cs typeface="Arial"/>
+            </a:endParaRPr>
           </a:p>
         </p:txBody>
       </p:sp>
@@ -12477,7 +14451,7 @@
           <p:cNvPr id="159" name="Text 36">
             <a:extLst xmlns:a="http://schemas.openxmlformats.org/drawingml/2006/main">
               <a:ext uri="{FF2B5EF4-FFF2-40B4-BE49-F238E27FC236}">
-                <a16:creationId xmlns:a16="http://schemas.microsoft.com/office/drawing/2014/main" id="{1407643C-C5D1-4B44-969A-D8F8A1C8A8ED}"/>
+                <a16:creationId xmlns:a16="http://schemas.microsoft.com/office/drawing/2014/main" id="{65DA91DD-E26D-4FC9-9FF7-411E9CEDF1CC}"/>
               </a:ext>
             </a:extLst>
           </p:cNvPr>
@@ -12511,22 +14485,41 @@
           </a:bodyPr>
           <a:lstStyle xmlns:a="http://schemas.openxmlformats.org/drawingml/2006/main"/>
           <a:p xmlns:a="http://schemas.openxmlformats.org/drawingml/2006/main">
-            <a:r>
-              <a:rPr u="none">
+            <a:pPr defTabSz="914400">
+              <a:lnSpc>
+                <a:spcPct val="100000"/>
+              </a:lnSpc>
+              <a:buNone/>
+              <a:tabLst>
+                <a:tab pos="0" algn="l"/>
+              </a:tabLst>
+            </a:pPr>
+            <a:r>
+              <a:rPr sz="1100" b="0" u="none" strike="noStrike">
                 <a:solidFill>
                   <a:srgbClr val="52657D"/>
                 </a:solidFill>
-                <a:hlinkClick xmlns:r="http://schemas.openxmlformats.org/officeDocument/2006/relationships" r:id="R3c9efc6f60894d4e"/>
+                <a:latin typeface="Arial"/>
+                <a:ea typeface="Arial"/>
+                <a:cs typeface="Arial"/>
               </a:rPr>
               <a:t>L × I: 1–2 LOW, 3–4 MEDIUM, 6–9 HIGH. R-02 je ve čtyřpoložkovém registru v repozitáři.</a:t>
             </a:r>
+            <a:endParaRPr sz="1100" b="0" u="none" strike="noStrike">
+              <a:solidFill>
+                <a:srgbClr val="000000"/>
+              </a:solidFill>
+              <a:latin typeface="Arial"/>
+              <a:ea typeface="Arial"/>
+              <a:cs typeface="Arial"/>
+            </a:endParaRPr>
           </a:p>
         </p:txBody>
       </p:sp>
     </p:spTree>
     <p:extLst>
       <p:ext uri="{BB962C8B-B14F-4D97-AF65-F5344CB8AC3E}">
-        <p14:creationId xmlns:p14="http://schemas.microsoft.com/office/powerpoint/2010/main" val="1350498499"/>
+        <p14:creationId xmlns:p14="http://schemas.microsoft.com/office/powerpoint/2010/main" val="1902723774"/>
       </p:ext>
     </p:extLst>
   </p:cSld>
@@ -12550,7 +14543,7 @@
           <p:cNvPr id="160" name="Shape 0">
             <a:extLst xmlns:a="http://schemas.openxmlformats.org/drawingml/2006/main">
               <a:ext uri="{FF2B5EF4-FFF2-40B4-BE49-F238E27FC236}">
-                <a16:creationId xmlns:a16="http://schemas.microsoft.com/office/drawing/2014/main" id="{C1CDA9A6-36C9-4758-928F-8F5A6D8B3157}"/>
+                <a16:creationId xmlns:a16="http://schemas.microsoft.com/office/drawing/2014/main" id="{A46332FF-8316-4EB1-9FAB-51A253EE38B0}"/>
               </a:ext>
             </a:extLst>
           </p:cNvPr>
@@ -12607,7 +14600,7 @@
           <p:cNvPr id="161" name="Text 1">
             <a:extLst xmlns:a="http://schemas.openxmlformats.org/drawingml/2006/main">
               <a:ext uri="{FF2B5EF4-FFF2-40B4-BE49-F238E27FC236}">
-                <a16:creationId xmlns:a16="http://schemas.microsoft.com/office/drawing/2014/main" id="{8F598B91-C97B-4D32-9C1E-8C04F1DFB9C3}"/>
+                <a16:creationId xmlns:a16="http://schemas.microsoft.com/office/drawing/2014/main" id="{B9FE5573-02F9-477A-A68A-F496A0920534}"/>
               </a:ext>
             </a:extLst>
           </p:cNvPr>
@@ -12677,7 +14670,7 @@
           <p:cNvPr id="162" name="Text 2">
             <a:extLst xmlns:a="http://schemas.openxmlformats.org/drawingml/2006/main">
               <a:ext uri="{FF2B5EF4-FFF2-40B4-BE49-F238E27FC236}">
-                <a16:creationId xmlns:a16="http://schemas.microsoft.com/office/drawing/2014/main" id="{22C60427-40F2-493E-ABDB-A761600CFA78}"/>
+                <a16:creationId xmlns:a16="http://schemas.microsoft.com/office/drawing/2014/main" id="{FBF2C54B-B8DC-4355-AD13-F0627FF009E9}"/>
               </a:ext>
             </a:extLst>
           </p:cNvPr>
@@ -12747,7 +14740,7 @@
           <p:cNvPr id="163" name="Text 3">
             <a:extLst xmlns:a="http://schemas.openxmlformats.org/drawingml/2006/main">
               <a:ext uri="{FF2B5EF4-FFF2-40B4-BE49-F238E27FC236}">
-                <a16:creationId xmlns:a16="http://schemas.microsoft.com/office/drawing/2014/main" id="{FFC7A1E7-4BA6-4D43-9EDB-381478736551}"/>
+                <a16:creationId xmlns:a16="http://schemas.microsoft.com/office/drawing/2014/main" id="{3C59F722-4C9C-40BB-86C1-01A6CE806198}"/>
               </a:ext>
             </a:extLst>
           </p:cNvPr>
@@ -12799,7 +14792,7 @@
                 <a:ea typeface="Arial"/>
                 <a:cs typeface="Arial"/>
               </a:rPr>
-              <a:t>NEJBLIŽŠÍ AKCE</a:t>
+              <a:t>DALŠÍ KROKY K C04</a:t>
             </a:r>
             <a:endParaRPr sz="2650" b="0" u="none" strike="noStrike">
               <a:solidFill>
@@ -12817,7 +14810,7 @@
           <p:cNvPr id="164" name="Text 4">
             <a:extLst xmlns:a="http://schemas.openxmlformats.org/drawingml/2006/main">
               <a:ext uri="{FF2B5EF4-FFF2-40B4-BE49-F238E27FC236}">
-                <a16:creationId xmlns:a16="http://schemas.microsoft.com/office/drawing/2014/main" id="{B4FD6F65-EFDD-43F9-B99C-040AF3F4D7CF}"/>
+                <a16:creationId xmlns:a16="http://schemas.microsoft.com/office/drawing/2014/main" id="{0636CC56-64AD-4C25-A519-8383167F9D61}"/>
               </a:ext>
             </a:extLst>
           </p:cNvPr>
@@ -12869,7 +14862,7 @@
                 <a:ea typeface="Arial"/>
                 <a:cs typeface="Arial"/>
               </a:rPr>
-              <a:t>Čtyři konkrétní kroky. Termín opatření není důkazem jeho dokončení.</a:t>
+              <a:t>Všechny další kroky směřují k uzavření jediného otevřeného nálezu F1.</a:t>
             </a:r>
             <a:endParaRPr sz="1210" b="0" u="none" strike="noStrike">
               <a:solidFill>
@@ -12887,7 +14880,7 @@
           <p:cNvPr id="165" name="Text 5">
             <a:extLst xmlns:a="http://schemas.openxmlformats.org/drawingml/2006/main">
               <a:ext uri="{FF2B5EF4-FFF2-40B4-BE49-F238E27FC236}">
-                <a16:creationId xmlns:a16="http://schemas.microsoft.com/office/drawing/2014/main" id="{181D383F-B60F-4191-9FE0-0B3063A09BB4}"/>
+                <a16:creationId xmlns:a16="http://schemas.microsoft.com/office/drawing/2014/main" id="{73790752-722F-4E22-B7EF-AD0434AFCCAE}"/>
               </a:ext>
             </a:extLst>
           </p:cNvPr>
@@ -12962,7 +14955,7 @@
           <p:cNvPr id="166" name="Text 6">
             <a:extLst xmlns:a="http://schemas.openxmlformats.org/drawingml/2006/main">
               <a:ext uri="{FF2B5EF4-FFF2-40B4-BE49-F238E27FC236}">
-                <a16:creationId xmlns:a16="http://schemas.microsoft.com/office/drawing/2014/main" id="{FF0C6697-E1C3-4FFF-AB69-221FA49F44EE}"/>
+                <a16:creationId xmlns:a16="http://schemas.microsoft.com/office/drawing/2014/main" id="{D85AB484-CE28-4962-957E-C06C554D577D}"/>
               </a:ext>
             </a:extLst>
           </p:cNvPr>
@@ -13019,7 +15012,7 @@
                 <a:ea typeface="Arial"/>
                 <a:cs typeface="Arial"/>
               </a:rPr>
-              <a:t>BASELINE: c08-report-2026-10-30</a:t>
+              <a:t>BASELINE: c08-report-2026-10-30-v4</a:t>
             </a:r>
             <a:endParaRPr sz="1040" b="0" u="none" strike="noStrike">
               <a:solidFill>
@@ -13037,7 +15030,7 @@
           <p:cNvPr id="167" name="Text 7">
             <a:extLst xmlns:a="http://schemas.openxmlformats.org/drawingml/2006/main">
               <a:ext uri="{FF2B5EF4-FFF2-40B4-BE49-F238E27FC236}">
-                <a16:creationId xmlns:a16="http://schemas.microsoft.com/office/drawing/2014/main" id="{B12BFD9A-0593-477F-8407-3648B6DBF057}"/>
+                <a16:creationId xmlns:a16="http://schemas.microsoft.com/office/drawing/2014/main" id="{806A7AEC-1F34-40DB-AD6C-36CB604B3EAF}"/>
               </a:ext>
             </a:extLst>
           </p:cNvPr>
@@ -13112,7 +15105,7 @@
           <p:cNvPr id="168" name="Shape 8">
             <a:extLst xmlns:a="http://schemas.openxmlformats.org/drawingml/2006/main">
               <a:ext uri="{FF2B5EF4-FFF2-40B4-BE49-F238E27FC236}">
-                <a16:creationId xmlns:a16="http://schemas.microsoft.com/office/drawing/2014/main" id="{31D1ED90-6BA7-4D08-B662-9C83D10A0C57}"/>
+                <a16:creationId xmlns:a16="http://schemas.microsoft.com/office/drawing/2014/main" id="{8FE17D05-2163-4BED-A65C-B1202BAC75DE}"/>
               </a:ext>
             </a:extLst>
           </p:cNvPr>
@@ -13164,7 +15157,7 @@
           <p:cNvPr id="169" name="Text 9">
             <a:extLst xmlns:a="http://schemas.openxmlformats.org/drawingml/2006/main">
               <a:ext uri="{FF2B5EF4-FFF2-40B4-BE49-F238E27FC236}">
-                <a16:creationId xmlns:a16="http://schemas.microsoft.com/office/drawing/2014/main" id="{1D7D5037-96E1-4C98-BECC-174A0E5CAC8B}"/>
+                <a16:creationId xmlns:a16="http://schemas.microsoft.com/office/drawing/2014/main" id="{FB7865F8-C743-4940-87AB-2B7C943755D1}"/>
               </a:ext>
             </a:extLst>
           </p:cNvPr>
@@ -13216,7 +15209,7 @@
                 <a:ea typeface="Arial"/>
                 <a:cs typeface="Arial"/>
               </a:rPr>
-              <a:t>SWI C08   Baseline: c08-report-2026-10-30   Stav k 30. 10. 2026</a:t>
+              <a:t>SWI C08   Baseline: c08-report-2026-10-30-v4   Stav k 30. 10. 2026</a:t>
             </a:r>
             <a:endParaRPr sz="880" b="0" u="none" strike="noStrike">
               <a:solidFill>
@@ -13234,7 +15227,7 @@
           <p:cNvPr id="170" name="Text 10">
             <a:extLst xmlns:a="http://schemas.openxmlformats.org/drawingml/2006/main">
               <a:ext uri="{FF2B5EF4-FFF2-40B4-BE49-F238E27FC236}">
-                <a16:creationId xmlns:a16="http://schemas.microsoft.com/office/drawing/2014/main" id="{6A177924-C12A-4E3A-A2C5-EA41D9F7C95B}"/>
+                <a16:creationId xmlns:a16="http://schemas.microsoft.com/office/drawing/2014/main" id="{D812C363-0851-43AC-AD6C-9DF84A92B1B7}"/>
               </a:ext>
             </a:extLst>
           </p:cNvPr>
@@ -13309,7 +15302,7 @@
           <p:cNvPr id="171" name="Text 11">
             <a:extLst xmlns:a="http://schemas.openxmlformats.org/drawingml/2006/main">
               <a:ext uri="{FF2B5EF4-FFF2-40B4-BE49-F238E27FC236}">
-                <a16:creationId xmlns:a16="http://schemas.microsoft.com/office/drawing/2014/main" id="{D0A3C8C1-E490-4159-9F3F-8D92F5BF6F86}"/>
+                <a16:creationId xmlns:a16="http://schemas.microsoft.com/office/drawing/2014/main" id="{3749643C-6352-48D0-865F-507EFB685927}"/>
               </a:ext>
             </a:extLst>
           </p:cNvPr>
@@ -13384,7 +15377,7 @@
           <p:cNvPr id="172" name="Text 12">
             <a:extLst xmlns:a="http://schemas.openxmlformats.org/drawingml/2006/main">
               <a:ext uri="{FF2B5EF4-FFF2-40B4-BE49-F238E27FC236}">
-                <a16:creationId xmlns:a16="http://schemas.microsoft.com/office/drawing/2014/main" id="{4797B9C9-D493-41F7-AFD2-EA1CD3F7994A}"/>
+                <a16:creationId xmlns:a16="http://schemas.microsoft.com/office/drawing/2014/main" id="{585BDE24-39F8-4268-BC38-485583748552}"/>
               </a:ext>
             </a:extLst>
           </p:cNvPr>
@@ -13459,7 +15452,7 @@
           <p:cNvPr id="173" name="Text 13">
             <a:extLst xmlns:a="http://schemas.openxmlformats.org/drawingml/2006/main">
               <a:ext uri="{FF2B5EF4-FFF2-40B4-BE49-F238E27FC236}">
-                <a16:creationId xmlns:a16="http://schemas.microsoft.com/office/drawing/2014/main" id="{4570BCD3-1FF0-4A59-B6E3-A1F9DE2A6DEB}"/>
+                <a16:creationId xmlns:a16="http://schemas.microsoft.com/office/drawing/2014/main" id="{D3BDAAC4-F7E3-4ACE-86A3-39FBB2EF6ECA}"/>
               </a:ext>
             </a:extLst>
           </p:cNvPr>
@@ -13534,7 +15527,7 @@
           <p:cNvPr id="174" name="Text 14">
             <a:extLst xmlns:a="http://schemas.openxmlformats.org/drawingml/2006/main">
               <a:ext uri="{FF2B5EF4-FFF2-40B4-BE49-F238E27FC236}">
-                <a16:creationId xmlns:a16="http://schemas.microsoft.com/office/drawing/2014/main" id="{147A41D7-777A-4180-8F4E-64DCFA40D738}"/>
+                <a16:creationId xmlns:a16="http://schemas.microsoft.com/office/drawing/2014/main" id="{0701363B-D49F-461E-B00C-C3393C27BCCC}"/>
               </a:ext>
             </a:extLst>
           </p:cNvPr>
@@ -13609,7 +15602,7 @@
           <p:cNvPr id="175" name="Text 15">
             <a:extLst xmlns:a="http://schemas.openxmlformats.org/drawingml/2006/main">
               <a:ext uri="{FF2B5EF4-FFF2-40B4-BE49-F238E27FC236}">
-                <a16:creationId xmlns:a16="http://schemas.microsoft.com/office/drawing/2014/main" id="{D7DE0542-44E8-4B76-B4B3-344016D1C12C}"/>
+                <a16:creationId xmlns:a16="http://schemas.microsoft.com/office/drawing/2014/main" id="{332E81C3-BF2B-4CC2-A630-7D954EA3C239}"/>
               </a:ext>
             </a:extLst>
           </p:cNvPr>
@@ -13666,7 +15659,7 @@
                 <a:ea typeface="Arial"/>
                 <a:cs typeface="Arial"/>
               </a:rPr>
-              <a:t>P1 Kontrola dokumentace</a:t>
+              <a:t>P1 Kritérium C04</a:t>
             </a:r>
             <a:endParaRPr sz="1200" b="0" u="none" strike="noStrike">
               <a:solidFill>
@@ -13684,7 +15677,7 @@
           <p:cNvPr id="176" name="Text 16">
             <a:extLst xmlns:a="http://schemas.openxmlformats.org/drawingml/2006/main">
               <a:ext uri="{FF2B5EF4-FFF2-40B4-BE49-F238E27FC236}">
-                <a16:creationId xmlns:a16="http://schemas.microsoft.com/office/drawing/2014/main" id="{584F423E-030C-40AC-BF41-D96885D5ADAA}"/>
+                <a16:creationId xmlns:a16="http://schemas.microsoft.com/office/drawing/2014/main" id="{5957D9F1-7826-4585-93FE-0E4651D178E5}"/>
               </a:ext>
             </a:extLst>
           </p:cNvPr>
@@ -13759,7 +15752,7 @@
           <p:cNvPr id="177" name="Text 17">
             <a:extLst xmlns:a="http://schemas.openxmlformats.org/drawingml/2006/main">
               <a:ext uri="{FF2B5EF4-FFF2-40B4-BE49-F238E27FC236}">
-                <a16:creationId xmlns:a16="http://schemas.microsoft.com/office/drawing/2014/main" id="{8CCA56E6-9082-4501-9E66-7E776EAE1C15}"/>
+                <a16:creationId xmlns:a16="http://schemas.microsoft.com/office/drawing/2014/main" id="{BB1AA7B9-A9E1-40C0-BB4E-50BC24D101D5}"/>
               </a:ext>
             </a:extLst>
           </p:cNvPr>
@@ -13816,7 +15809,7 @@
                 <a:ea typeface="Arial"/>
                 <a:cs typeface="Arial"/>
               </a:rPr>
-              <a:t>30. 10. 2026</a:t>
+              <a:t>Neurčen</a:t>
             </a:r>
             <a:endParaRPr sz="1200" b="0" u="none" strike="noStrike">
               <a:solidFill>
@@ -13834,7 +15827,7 @@
           <p:cNvPr id="178" name="Text 18">
             <a:extLst xmlns:a="http://schemas.openxmlformats.org/drawingml/2006/main">
               <a:ext uri="{FF2B5EF4-FFF2-40B4-BE49-F238E27FC236}">
-                <a16:creationId xmlns:a16="http://schemas.microsoft.com/office/drawing/2014/main" id="{48555C32-57A4-4384-A484-CCEF0285F2D7}"/>
+                <a16:creationId xmlns:a16="http://schemas.microsoft.com/office/drawing/2014/main" id="{7A0F3265-E033-4509-B699-1DA295A3FAA3}"/>
               </a:ext>
             </a:extLst>
           </p:cNvPr>
@@ -13891,7 +15884,7 @@
                 <a:ea typeface="Arial"/>
                 <a:cs typeface="Arial"/>
               </a:rPr>
-              <a:t>Záznam porovnání specifikace a C05 s kódem.</a:t>
+              <a:t>Popsaný quality concern a kritérium,</a:t>
             </a:r>
             <a:endParaRPr sz="1200" b="0" u="none" strike="noStrike">
               <a:solidFill>
@@ -13921,7 +15914,7 @@
                 <a:ea typeface="Arial"/>
                 <a:cs typeface="Arial"/>
               </a:rPr>
-              <a:t>Rozdíly opravené nebo označené.</a:t>
+              <a:t>podle kterého lze vyhodnotit výsledek.</a:t>
             </a:r>
             <a:endParaRPr sz="1200" b="0" u="none" strike="noStrike">
               <a:solidFill>
@@ -13939,7 +15932,7 @@
           <p:cNvPr id="179" name="Text 19">
             <a:extLst xmlns:a="http://schemas.openxmlformats.org/drawingml/2006/main">
               <a:ext uri="{FF2B5EF4-FFF2-40B4-BE49-F238E27FC236}">
-                <a16:creationId xmlns:a16="http://schemas.microsoft.com/office/drawing/2014/main" id="{6E2EF54D-EB2A-4D6B-9C16-37B644C75B72}"/>
+                <a16:creationId xmlns:a16="http://schemas.microsoft.com/office/drawing/2014/main" id="{B81E7BCA-10BD-4E3C-A2BE-1A6F1296E82E}"/>
               </a:ext>
             </a:extLst>
           </p:cNvPr>
@@ -13978,15 +15971,34 @@
           </a:bodyPr>
           <a:lstStyle xmlns:a="http://schemas.openxmlformats.org/drawingml/2006/main"/>
           <a:p xmlns:a="http://schemas.openxmlformats.org/drawingml/2006/main">
-            <a:r>
-              <a:rPr u="none">
+            <a:pPr defTabSz="914400">
+              <a:lnSpc>
+                <a:spcPct val="100000"/>
+              </a:lnSpc>
+              <a:buNone/>
+              <a:tabLst>
+                <a:tab pos="0" algn="l"/>
+              </a:tabLst>
+            </a:pPr>
+            <a:r>
+              <a:rPr sz="1200" b="0" u="none" strike="noStrike">
                 <a:solidFill>
                   <a:srgbClr val="26354B"/>
                 </a:solidFill>
-                <a:hlinkClick xmlns:r="http://schemas.openxmlformats.org/officeDocument/2006/relationships" r:id="R72dfcdf8e59b422b"/>
-              </a:rPr>
-              <a:t>R-01</a:t>
-            </a:r>
+                <a:latin typeface="Arial"/>
+                <a:ea typeface="Arial"/>
+                <a:cs typeface="Arial"/>
+              </a:rPr>
+              <a:t>F1</a:t>
+            </a:r>
+            <a:endParaRPr sz="1200" b="0" u="none" strike="noStrike">
+              <a:solidFill>
+                <a:srgbClr val="000000"/>
+              </a:solidFill>
+              <a:latin typeface="Arial"/>
+              <a:ea typeface="Arial"/>
+              <a:cs typeface="Arial"/>
+            </a:endParaRPr>
           </a:p>
         </p:txBody>
       </p:sp>
@@ -13995,7 +16007,7 @@
           <p:cNvPr id="180" name="Text 20">
             <a:extLst xmlns:a="http://schemas.openxmlformats.org/drawingml/2006/main">
               <a:ext uri="{FF2B5EF4-FFF2-40B4-BE49-F238E27FC236}">
-                <a16:creationId xmlns:a16="http://schemas.microsoft.com/office/drawing/2014/main" id="{9B41FAE1-F80A-49AE-8A8D-CA1BE9767244}"/>
+                <a16:creationId xmlns:a16="http://schemas.microsoft.com/office/drawing/2014/main" id="{29F4AFCF-0E25-41FA-B789-2B0C6A73C4DB}"/>
               </a:ext>
             </a:extLst>
           </p:cNvPr>
@@ -14052,7 +16064,7 @@
                 <a:ea typeface="Arial"/>
                 <a:cs typeface="Arial"/>
               </a:rPr>
-              <a:t>P2 Domluvené zastoupení</a:t>
+              <a:t>P2 Měření a důkazy</a:t>
             </a:r>
             <a:endParaRPr sz="1200" b="0" u="none" strike="noStrike">
               <a:solidFill>
@@ -14070,7 +16082,7 @@
           <p:cNvPr id="181" name="Text 21">
             <a:extLst xmlns:a="http://schemas.openxmlformats.org/drawingml/2006/main">
               <a:ext uri="{FF2B5EF4-FFF2-40B4-BE49-F238E27FC236}">
-                <a16:creationId xmlns:a16="http://schemas.microsoft.com/office/drawing/2014/main" id="{89BF8E12-97A8-4E8A-81A0-7597630990AB}"/>
+                <a16:creationId xmlns:a16="http://schemas.microsoft.com/office/drawing/2014/main" id="{14FD289B-1F37-4327-B87E-83DAF1065484}"/>
               </a:ext>
             </a:extLst>
           </p:cNvPr>
@@ -14145,7 +16157,7 @@
           <p:cNvPr id="182" name="Text 22">
             <a:extLst xmlns:a="http://schemas.openxmlformats.org/drawingml/2006/main">
               <a:ext uri="{FF2B5EF4-FFF2-40B4-BE49-F238E27FC236}">
-                <a16:creationId xmlns:a16="http://schemas.microsoft.com/office/drawing/2014/main" id="{EB794EAB-189B-40A2-94CB-FD418FAE7EB4}"/>
+                <a16:creationId xmlns:a16="http://schemas.microsoft.com/office/drawing/2014/main" id="{07B54BD8-1B20-4F26-84B2-9AF40888F1DE}"/>
               </a:ext>
             </a:extLst>
           </p:cNvPr>
@@ -14202,7 +16214,7 @@
                 <a:ea typeface="Arial"/>
                 <a:cs typeface="Arial"/>
               </a:rPr>
-              <a:t>30. 10. 2026</a:t>
+              <a:t>Po P1</a:t>
             </a:r>
             <a:endParaRPr sz="1200" b="0" u="none" strike="noStrike">
               <a:solidFill>
@@ -14220,7 +16232,7 @@
           <p:cNvPr id="183" name="Text 23">
             <a:extLst xmlns:a="http://schemas.openxmlformats.org/drawingml/2006/main">
               <a:ext uri="{FF2B5EF4-FFF2-40B4-BE49-F238E27FC236}">
-                <a16:creationId xmlns:a16="http://schemas.microsoft.com/office/drawing/2014/main" id="{777079D8-BEE1-4479-9355-EA876C48A296}"/>
+                <a16:creationId xmlns:a16="http://schemas.microsoft.com/office/drawing/2014/main" id="{2DF29785-A29B-474D-8F31-7660D90E2D1D}"/>
               </a:ext>
             </a:extLst>
           </p:cNvPr>
@@ -14277,7 +16289,7 @@
                 <a:ea typeface="Arial"/>
                 <a:cs typeface="Arial"/>
               </a:rPr>
-              <a:t>Určený zástupce zvládne převzít</a:t>
+              <a:t>Zapsané podmínky měření a skutečný</a:t>
             </a:r>
             <a:endParaRPr sz="1200" b="0" u="none" strike="noStrike">
               <a:solidFill>
@@ -14307,7 +16319,7 @@
                 <a:ea typeface="Arial"/>
                 <a:cs typeface="Arial"/>
               </a:rPr>
-              <a:t>příslušnou část A.</a:t>
+              <a:t>výsledek odpovídající kritériu.</a:t>
             </a:r>
             <a:endParaRPr sz="1200" b="0" u="none" strike="noStrike">
               <a:solidFill>
@@ -14325,7 +16337,7 @@
           <p:cNvPr id="184" name="Text 24">
             <a:extLst xmlns:a="http://schemas.openxmlformats.org/drawingml/2006/main">
               <a:ext uri="{FF2B5EF4-FFF2-40B4-BE49-F238E27FC236}">
-                <a16:creationId xmlns:a16="http://schemas.microsoft.com/office/drawing/2014/main" id="{4891AD66-26A1-4AB6-9B1B-4DA1942942F2}"/>
+                <a16:creationId xmlns:a16="http://schemas.microsoft.com/office/drawing/2014/main" id="{9B98EC59-02DC-4E4F-B36B-D72FDA6750BE}"/>
               </a:ext>
             </a:extLst>
           </p:cNvPr>
@@ -14364,15 +16376,34 @@
           </a:bodyPr>
           <a:lstStyle xmlns:a="http://schemas.openxmlformats.org/drawingml/2006/main"/>
           <a:p xmlns:a="http://schemas.openxmlformats.org/drawingml/2006/main">
-            <a:r>
-              <a:rPr u="none">
+            <a:pPr defTabSz="914400">
+              <a:lnSpc>
+                <a:spcPct val="100000"/>
+              </a:lnSpc>
+              <a:buNone/>
+              <a:tabLst>
+                <a:tab pos="0" algn="l"/>
+              </a:tabLst>
+            </a:pPr>
+            <a:r>
+              <a:rPr sz="1200" b="0" u="none" strike="noStrike">
                 <a:solidFill>
                   <a:srgbClr val="26354B"/>
                 </a:solidFill>
-                <a:hlinkClick xmlns:r="http://schemas.openxmlformats.org/officeDocument/2006/relationships" r:id="R5e3b2705025c4068"/>
-              </a:rPr>
-              <a:t>R-02</a:t>
-            </a:r>
+                <a:latin typeface="Arial"/>
+                <a:ea typeface="Arial"/>
+                <a:cs typeface="Arial"/>
+              </a:rPr>
+              <a:t>F1</a:t>
+            </a:r>
+            <a:endParaRPr sz="1200" b="0" u="none" strike="noStrike">
+              <a:solidFill>
+                <a:srgbClr val="000000"/>
+              </a:solidFill>
+              <a:latin typeface="Arial"/>
+              <a:ea typeface="Arial"/>
+              <a:cs typeface="Arial"/>
+            </a:endParaRPr>
           </a:p>
         </p:txBody>
       </p:sp>
@@ -14381,7 +16412,7 @@
           <p:cNvPr id="185" name="Text 25">
             <a:extLst xmlns:a="http://schemas.openxmlformats.org/drawingml/2006/main">
               <a:ext uri="{FF2B5EF4-FFF2-40B4-BE49-F238E27FC236}">
-                <a16:creationId xmlns:a16="http://schemas.microsoft.com/office/drawing/2014/main" id="{B8A3280E-98A7-489D-858E-5702C9D9C5C8}"/>
+                <a16:creationId xmlns:a16="http://schemas.microsoft.com/office/drawing/2014/main" id="{792DBF4B-A23D-4358-AC97-3135991880B4}"/>
               </a:ext>
             </a:extLst>
           </p:cNvPr>
@@ -14438,7 +16469,7 @@
                 <a:ea typeface="Arial"/>
                 <a:cs typeface="Arial"/>
               </a:rPr>
-              <a:t>P3 Plán a kapacity</a:t>
+              <a:t>P3 Rozhodnutí</a:t>
             </a:r>
             <a:endParaRPr sz="1200" b="0" u="none" strike="noStrike">
               <a:solidFill>
@@ -14456,7 +16487,7 @@
           <p:cNvPr id="186" name="Text 26">
             <a:extLst xmlns:a="http://schemas.openxmlformats.org/drawingml/2006/main">
               <a:ext uri="{FF2B5EF4-FFF2-40B4-BE49-F238E27FC236}">
-                <a16:creationId xmlns:a16="http://schemas.microsoft.com/office/drawing/2014/main" id="{0D30FFFA-1E52-4318-94AE-18479D94DA1A}"/>
+                <a16:creationId xmlns:a16="http://schemas.microsoft.com/office/drawing/2014/main" id="{2BE51013-C72C-480B-9472-D4DEC111AA46}"/>
               </a:ext>
             </a:extLst>
           </p:cNvPr>
@@ -14531,7 +16562,7 @@
           <p:cNvPr id="187" name="Text 27">
             <a:extLst xmlns:a="http://schemas.openxmlformats.org/drawingml/2006/main">
               <a:ext uri="{FF2B5EF4-FFF2-40B4-BE49-F238E27FC236}">
-                <a16:creationId xmlns:a16="http://schemas.microsoft.com/office/drawing/2014/main" id="{3375E6D4-5B52-40DA-909A-C2355BD09496}"/>
+                <a16:creationId xmlns:a16="http://schemas.microsoft.com/office/drawing/2014/main" id="{E8A7A6BD-2368-4FF6-860D-0E78E3CA6E16}"/>
               </a:ext>
             </a:extLst>
           </p:cNvPr>
@@ -14588,7 +16619,7 @@
                 <a:ea typeface="Arial"/>
                 <a:cs typeface="Arial"/>
               </a:rPr>
-              <a:t>2. 11. 2026</a:t>
+              <a:t>Po P2</a:t>
             </a:r>
             <a:endParaRPr sz="1200" b="0" u="none" strike="noStrike">
               <a:solidFill>
@@ -14606,7 +16637,7 @@
           <p:cNvPr id="188" name="Text 28">
             <a:extLst xmlns:a="http://schemas.openxmlformats.org/drawingml/2006/main">
               <a:ext uri="{FF2B5EF4-FFF2-40B4-BE49-F238E27FC236}">
-                <a16:creationId xmlns:a16="http://schemas.microsoft.com/office/drawing/2014/main" id="{3E0EC476-0B37-468A-81DD-F56257A9E60E}"/>
+                <a16:creationId xmlns:a16="http://schemas.microsoft.com/office/drawing/2014/main" id="{E925E191-38D4-48BB-ADC2-38060FDAD8DE}"/>
               </a:ext>
             </a:extLst>
           </p:cNvPr>
@@ -14663,7 +16694,7 @@
                 <a:ea typeface="Arial"/>
                 <a:cs typeface="Arial"/>
               </a:rPr>
-              <a:t>Zapsané kapacity, termín obhajoby</a:t>
+              <a:t>Závěr vycházející z měření a vazba</a:t>
             </a:r>
             <a:endParaRPr sz="1200" b="0" u="none" strike="noStrike">
               <a:solidFill>
@@ -14693,7 +16724,7 @@
                 <a:ea typeface="Arial"/>
                 <a:cs typeface="Arial"/>
               </a:rPr>
-              <a:t>a vlastník s plánem uzavření C04.</a:t>
+              <a:t>na architektonické rozhodnutí.</a:t>
             </a:r>
             <a:endParaRPr sz="1200" b="0" u="none" strike="noStrike">
               <a:solidFill>
@@ -14711,7 +16742,7 @@
           <p:cNvPr id="189" name="Text 29">
             <a:extLst xmlns:a="http://schemas.openxmlformats.org/drawingml/2006/main">
               <a:ext uri="{FF2B5EF4-FFF2-40B4-BE49-F238E27FC236}">
-                <a16:creationId xmlns:a16="http://schemas.microsoft.com/office/drawing/2014/main" id="{E329D478-DB3B-48CF-A21E-82ED183AAEFC}"/>
+                <a16:creationId xmlns:a16="http://schemas.microsoft.com/office/drawing/2014/main" id="{372BC8A0-FF5C-4A10-8F64-0FC12F5AF46D}"/>
               </a:ext>
             </a:extLst>
           </p:cNvPr>
@@ -14750,15 +16781,34 @@
           </a:bodyPr>
           <a:lstStyle xmlns:a="http://schemas.openxmlformats.org/drawingml/2006/main"/>
           <a:p xmlns:a="http://schemas.openxmlformats.org/drawingml/2006/main">
-            <a:r>
-              <a:rPr u="none">
+            <a:pPr defTabSz="914400">
+              <a:lnSpc>
+                <a:spcPct val="100000"/>
+              </a:lnSpc>
+              <a:buNone/>
+              <a:tabLst>
+                <a:tab pos="0" algn="l"/>
+              </a:tabLst>
+            </a:pPr>
+            <a:r>
+              <a:rPr sz="1200" b="0" u="none" strike="noStrike">
                 <a:solidFill>
                   <a:srgbClr val="26354B"/>
                 </a:solidFill>
-                <a:hlinkClick xmlns:r="http://schemas.openxmlformats.org/officeDocument/2006/relationships" r:id="Ra309a5fed42f4d94"/>
-              </a:rPr>
-              <a:t>R-04 / F1</a:t>
-            </a:r>
+                <a:latin typeface="Arial"/>
+                <a:ea typeface="Arial"/>
+                <a:cs typeface="Arial"/>
+              </a:rPr>
+              <a:t>F1</a:t>
+            </a:r>
+            <a:endParaRPr sz="1200" b="0" u="none" strike="noStrike">
+              <a:solidFill>
+                <a:srgbClr val="000000"/>
+              </a:solidFill>
+              <a:latin typeface="Arial"/>
+              <a:ea typeface="Arial"/>
+              <a:cs typeface="Arial"/>
+            </a:endParaRPr>
           </a:p>
         </p:txBody>
       </p:sp>
@@ -14767,7 +16817,7 @@
           <p:cNvPr id="190" name="Text 30">
             <a:extLst xmlns:a="http://schemas.openxmlformats.org/drawingml/2006/main">
               <a:ext uri="{FF2B5EF4-FFF2-40B4-BE49-F238E27FC236}">
-                <a16:creationId xmlns:a16="http://schemas.microsoft.com/office/drawing/2014/main" id="{4B199626-335A-410B-A15C-EEF497524D1F}"/>
+                <a16:creationId xmlns:a16="http://schemas.microsoft.com/office/drawing/2014/main" id="{296C7B38-363B-4F88-ACA7-48F0BF2B5D40}"/>
               </a:ext>
             </a:extLst>
           </p:cNvPr>
@@ -14824,7 +16874,7 @@
                 <a:ea typeface="Arial"/>
                 <a:cs typeface="Arial"/>
               </a:rPr>
-              <a:t>P4 Nácvik části A</a:t>
+              <a:t>P4 Uzavření F1</a:t>
             </a:r>
             <a:endParaRPr sz="1200" b="0" u="none" strike="noStrike">
               <a:solidFill>
@@ -14842,7 +16892,7 @@
           <p:cNvPr id="191" name="Text 31">
             <a:extLst xmlns:a="http://schemas.openxmlformats.org/drawingml/2006/main">
               <a:ext uri="{FF2B5EF4-FFF2-40B4-BE49-F238E27FC236}">
-                <a16:creationId xmlns:a16="http://schemas.microsoft.com/office/drawing/2014/main" id="{32F3694A-16FF-4394-A355-CDCEA2C50C4A}"/>
+                <a16:creationId xmlns:a16="http://schemas.microsoft.com/office/drawing/2014/main" id="{9FA18683-EB79-41A6-B48F-0F3356882B30}"/>
               </a:ext>
             </a:extLst>
           </p:cNvPr>
@@ -14899,7 +16949,7 @@
                 <a:ea typeface="Arial"/>
                 <a:cs typeface="Arial"/>
               </a:rPr>
-              <a:t>Kryštof Lalošák</a:t>
+              <a:t>Jakub Juchelka</a:t>
             </a:r>
             <a:endParaRPr sz="1200" b="0" u="none" strike="noStrike">
               <a:solidFill>
@@ -14917,7 +16967,7 @@
           <p:cNvPr id="192" name="Text 32">
             <a:extLst xmlns:a="http://schemas.openxmlformats.org/drawingml/2006/main">
               <a:ext uri="{FF2B5EF4-FFF2-40B4-BE49-F238E27FC236}">
-                <a16:creationId xmlns:a16="http://schemas.microsoft.com/office/drawing/2014/main" id="{3A732154-D19E-4399-A2AD-472FE772B2BB}"/>
+                <a16:creationId xmlns:a16="http://schemas.microsoft.com/office/drawing/2014/main" id="{B591C4F8-F84B-4583-AD1D-C0FEBC42F10A}"/>
               </a:ext>
             </a:extLst>
           </p:cNvPr>
@@ -14974,7 +17024,7 @@
                 <a:ea typeface="Arial"/>
                 <a:cs typeface="Arial"/>
               </a:rPr>
-              <a:t>2. 11. 2026</a:t>
+              <a:t>Po P3</a:t>
             </a:r>
             <a:endParaRPr sz="1200" b="0" u="none" strike="noStrike">
               <a:solidFill>
@@ -14992,7 +17042,7 @@
           <p:cNvPr id="193" name="Text 33">
             <a:extLst xmlns:a="http://schemas.openxmlformats.org/drawingml/2006/main">
               <a:ext uri="{FF2B5EF4-FFF2-40B4-BE49-F238E27FC236}">
-                <a16:creationId xmlns:a16="http://schemas.microsoft.com/office/drawing/2014/main" id="{691C2486-0ADA-4DAF-A5F8-881861D08A2A}"/>
+                <a16:creationId xmlns:a16="http://schemas.microsoft.com/office/drawing/2014/main" id="{391D01AF-F9A2-4B4A-943D-1ACF96A05AA3}"/>
               </a:ext>
             </a:extLst>
           </p:cNvPr>
@@ -15049,7 +17099,7 @@
                 <a:ea typeface="Arial"/>
                 <a:cs typeface="Arial"/>
               </a:rPr>
-              <a:t>Proběhl společný nácvik na 8–10 minut</a:t>
+              <a:t>Úplný řetězec C04 a dohledatelný</a:t>
             </a:r>
             <a:endParaRPr sz="1200" b="0" u="none" strike="noStrike">
               <a:solidFill>
@@ -15079,7 +17129,7 @@
                 <a:ea typeface="Arial"/>
                 <a:cs typeface="Arial"/>
               </a:rPr>
-              <a:t>se všemi pěti body A.</a:t>
+              <a:t>commit s důkazem kontroly.</a:t>
             </a:r>
             <a:endParaRPr sz="1200" b="0" u="none" strike="noStrike">
               <a:solidFill>
@@ -15097,7 +17147,7 @@
           <p:cNvPr id="194" name="Text 34">
             <a:extLst xmlns:a="http://schemas.openxmlformats.org/drawingml/2006/main">
               <a:ext uri="{FF2B5EF4-FFF2-40B4-BE49-F238E27FC236}">
-                <a16:creationId xmlns:a16="http://schemas.microsoft.com/office/drawing/2014/main" id="{1F3833C2-4B73-42C6-8E84-BE4837247E70}"/>
+                <a16:creationId xmlns:a16="http://schemas.microsoft.com/office/drawing/2014/main" id="{AC800A2C-16D4-47D0-BC1D-64FE15C0CD77}"/>
               </a:ext>
             </a:extLst>
           </p:cNvPr>
@@ -15136,15 +17186,34 @@
           </a:bodyPr>
           <a:lstStyle xmlns:a="http://schemas.openxmlformats.org/drawingml/2006/main"/>
           <a:p xmlns:a="http://schemas.openxmlformats.org/drawingml/2006/main">
-            <a:r>
-              <a:rPr u="none">
+            <a:pPr defTabSz="914400">
+              <a:lnSpc>
+                <a:spcPct val="100000"/>
+              </a:lnSpc>
+              <a:buNone/>
+              <a:tabLst>
+                <a:tab pos="0" algn="l"/>
+              </a:tabLst>
+            </a:pPr>
+            <a:r>
+              <a:rPr sz="1200" b="0" u="none" strike="noStrike">
                 <a:solidFill>
                   <a:srgbClr val="26354B"/>
                 </a:solidFill>
-                <a:hlinkClick xmlns:r="http://schemas.openxmlformats.org/officeDocument/2006/relationships" r:id="R135807759c604252"/>
-              </a:rPr>
-              <a:t>R-02 / R-04</a:t>
-            </a:r>
+                <a:latin typeface="Arial"/>
+                <a:ea typeface="Arial"/>
+                <a:cs typeface="Arial"/>
+              </a:rPr>
+              <a:t>F1</a:t>
+            </a:r>
+            <a:endParaRPr sz="1200" b="0" u="none" strike="noStrike">
+              <a:solidFill>
+                <a:srgbClr val="000000"/>
+              </a:solidFill>
+              <a:latin typeface="Arial"/>
+              <a:ea typeface="Arial"/>
+              <a:cs typeface="Arial"/>
+            </a:endParaRPr>
           </a:p>
         </p:txBody>
       </p:sp>
@@ -15153,7 +17222,7 @@
           <p:cNvPr id="195" name="Text 35">
             <a:extLst xmlns:a="http://schemas.openxmlformats.org/drawingml/2006/main">
               <a:ext uri="{FF2B5EF4-FFF2-40B4-BE49-F238E27FC236}">
-                <a16:creationId xmlns:a16="http://schemas.microsoft.com/office/drawing/2014/main" id="{E001AC00-5AF5-4945-BFB6-9746434C9311}"/>
+                <a16:creationId xmlns:a16="http://schemas.microsoft.com/office/drawing/2014/main" id="{AD9FD7FD-0781-4D77-B0CA-7F0029096B89}"/>
               </a:ext>
             </a:extLst>
           </p:cNvPr>
@@ -15210,7 +17279,7 @@
                 <a:ea typeface="Arial"/>
                 <a:cs typeface="Arial"/>
               </a:rPr>
-              <a:t>PŘI ZPOŽDĚNÍ</a:t>
+              <a:t>TERMÍN C04</a:t>
             </a:r>
             <a:endParaRPr sz="1140" b="0" u="none" strike="noStrike">
               <a:solidFill>
@@ -15228,7 +17297,7 @@
           <p:cNvPr id="196" name="Text 36">
             <a:extLst xmlns:a="http://schemas.openxmlformats.org/drawingml/2006/main">
               <a:ext uri="{FF2B5EF4-FFF2-40B4-BE49-F238E27FC236}">
-                <a16:creationId xmlns:a16="http://schemas.microsoft.com/office/drawing/2014/main" id="{93414DDB-972F-420E-9158-7F4CF273F77B}"/>
+                <a16:creationId xmlns:a16="http://schemas.microsoft.com/office/drawing/2014/main" id="{4B778C18-7A85-4B74-BD4D-8E883FBD2932}"/>
               </a:ext>
             </a:extLst>
           </p:cNvPr>
@@ -15267,39 +17336,41 @@
           </a:bodyPr>
           <a:lstStyle xmlns:a="http://schemas.openxmlformats.org/drawingml/2006/main"/>
           <a:p xmlns:a="http://schemas.openxmlformats.org/drawingml/2006/main">
-            <a:r>
-              <a:rPr u="none">
+            <a:pPr defTabSz="914400">
+              <a:lnSpc>
+                <a:spcPct val="100000"/>
+              </a:lnSpc>
+              <a:buNone/>
+              <a:tabLst>
+                <a:tab pos="0" algn="l"/>
+              </a:tabLst>
+            </a:pPr>
+            <a:r>
+              <a:rPr sz="1260" b="0" u="none" strike="noStrike">
                 <a:solidFill>
                   <a:srgbClr val="26354B"/>
                 </a:solidFill>
-                <a:hlinkClick xmlns:r="http://schemas.openxmlformats.org/officeDocument/2006/relationships" r:id="Rfd40252d6da24fdf"/>
-              </a:rPr>
-              <a:t>Kryštof přerozdělí práci a upraví plán při kontrole 2. 11.</a:t>
-            </a:r>
-            <a:br>
-              <a:rPr u="none">
-                <a:solidFill>
-                  <a:srgbClr val="26354B"/>
-                </a:solidFill>
-                <a:hlinkClick xmlns:r="http://schemas.openxmlformats.org/officeDocument/2006/relationships" r:id="Rfd40252d6da24fdf"/>
-              </a:rPr>
-            </a:br>
-            <a:r>
-              <a:rPr u="none">
-                <a:solidFill>
-                  <a:srgbClr val="26354B"/>
-                </a:solidFill>
-                <a:hlinkClick xmlns:r="http://schemas.openxmlformats.org/officeDocument/2006/relationships" r:id="Rfd40252d6da24fdf"/>
-              </a:rPr>
-              <a:t>F1 zůstává OPEN do doloženého uzavření.</a:t>
-            </a:r>
+                <a:latin typeface="Arial"/>
+                <a:ea typeface="Arial"/>
+                <a:cs typeface="Arial"/>
+              </a:rPr>
+              <a:t>Tým zatím nezná dostupný čas ani termín dokončení C04.</a:t>
+            </a:r>
+            <a:endParaRPr sz="1260" b="0" u="none" strike="noStrike">
+              <a:solidFill>
+                <a:srgbClr val="000000"/>
+              </a:solidFill>
+              <a:latin typeface="Arial"/>
+              <a:ea typeface="Arial"/>
+              <a:cs typeface="Arial"/>
+            </a:endParaRPr>
           </a:p>
         </p:txBody>
       </p:sp>
     </p:spTree>
     <p:extLst>
       <p:ext uri="{BB962C8B-B14F-4D97-AF65-F5344CB8AC3E}">
-        <p14:creationId xmlns:p14="http://schemas.microsoft.com/office/powerpoint/2010/main" val="1866248279"/>
+        <p14:creationId xmlns:p14="http://schemas.microsoft.com/office/powerpoint/2010/main" val="1816009307"/>
       </p:ext>
     </p:extLst>
   </p:cSld>
@@ -15323,7 +17394,7 @@
           <p:cNvPr id="197" name="Shape 0">
             <a:extLst xmlns:a="http://schemas.openxmlformats.org/drawingml/2006/main">
               <a:ext uri="{FF2B5EF4-FFF2-40B4-BE49-F238E27FC236}">
-                <a16:creationId xmlns:a16="http://schemas.microsoft.com/office/drawing/2014/main" id="{8828A745-84A0-4383-98C4-C0FE245951E2}"/>
+                <a16:creationId xmlns:a16="http://schemas.microsoft.com/office/drawing/2014/main" id="{88174D56-A558-4060-942A-A9212BA4C011}"/>
               </a:ext>
             </a:extLst>
           </p:cNvPr>
@@ -15380,7 +17451,7 @@
           <p:cNvPr id="198" name="Text 1">
             <a:extLst xmlns:a="http://schemas.openxmlformats.org/drawingml/2006/main">
               <a:ext uri="{FF2B5EF4-FFF2-40B4-BE49-F238E27FC236}">
-                <a16:creationId xmlns:a16="http://schemas.microsoft.com/office/drawing/2014/main" id="{294607A2-6935-433A-BB52-0FA99490D9E5}"/>
+                <a16:creationId xmlns:a16="http://schemas.microsoft.com/office/drawing/2014/main" id="{D2512F50-2BA8-4995-8760-E199262D9423}"/>
               </a:ext>
             </a:extLst>
           </p:cNvPr>
@@ -15450,7 +17521,7 @@
           <p:cNvPr id="199" name="Text 2">
             <a:extLst xmlns:a="http://schemas.openxmlformats.org/drawingml/2006/main">
               <a:ext uri="{FF2B5EF4-FFF2-40B4-BE49-F238E27FC236}">
-                <a16:creationId xmlns:a16="http://schemas.microsoft.com/office/drawing/2014/main" id="{D2AD2829-F74E-4DF9-B051-DFA6309F6C67}"/>
+                <a16:creationId xmlns:a16="http://schemas.microsoft.com/office/drawing/2014/main" id="{FBB904F5-11AD-40E9-A3AD-1BB71CCD38CF}"/>
               </a:ext>
             </a:extLst>
           </p:cNvPr>
@@ -15520,7 +17591,7 @@
           <p:cNvPr id="200" name="Text 3">
             <a:extLst xmlns:a="http://schemas.openxmlformats.org/drawingml/2006/main">
               <a:ext uri="{FF2B5EF4-FFF2-40B4-BE49-F238E27FC236}">
-                <a16:creationId xmlns:a16="http://schemas.microsoft.com/office/drawing/2014/main" id="{BF625EEA-B798-4E2C-B880-E1E7A8DF8BBF}"/>
+                <a16:creationId xmlns:a16="http://schemas.microsoft.com/office/drawing/2014/main" id="{7EF2DA80-7126-4379-975C-2074A31D6B73}"/>
               </a:ext>
             </a:extLst>
           </p:cNvPr>
@@ -15590,7 +17661,7 @@
           <p:cNvPr id="201" name="Text 4">
             <a:extLst xmlns:a="http://schemas.openxmlformats.org/drawingml/2006/main">
               <a:ext uri="{FF2B5EF4-FFF2-40B4-BE49-F238E27FC236}">
-                <a16:creationId xmlns:a16="http://schemas.microsoft.com/office/drawing/2014/main" id="{ADBD266B-6EC5-4D6A-B9B1-C00062AF10A7}"/>
+                <a16:creationId xmlns:a16="http://schemas.microsoft.com/office/drawing/2014/main" id="{EE50A87E-578E-433A-87BC-5B259959DE51}"/>
               </a:ext>
             </a:extLst>
           </p:cNvPr>
@@ -15642,7 +17713,7 @@
                 <a:ea typeface="Arial"/>
                 <a:cs typeface="Arial"/>
               </a:rPr>
-              <a:t>Stav odpovídá podkladům A, registru B a uloženým výsledkům testů.</a:t>
+              <a:t>Funkční řešení a jeho ověření jsou připravené. Zbývá evidence C04.</a:t>
             </a:r>
             <a:endParaRPr sz="1210" b="0" u="none" strike="noStrike">
               <a:solidFill>
@@ -15660,7 +17731,7 @@
           <p:cNvPr id="202" name="Text 5">
             <a:extLst xmlns:a="http://schemas.openxmlformats.org/drawingml/2006/main">
               <a:ext uri="{FF2B5EF4-FFF2-40B4-BE49-F238E27FC236}">
-                <a16:creationId xmlns:a16="http://schemas.microsoft.com/office/drawing/2014/main" id="{2CCD9596-F109-49DD-A29F-B4699582D734}"/>
+                <a16:creationId xmlns:a16="http://schemas.microsoft.com/office/drawing/2014/main" id="{1FC93C35-6379-4771-B4C8-EB6E7692B990}"/>
               </a:ext>
             </a:extLst>
           </p:cNvPr>
@@ -15735,7 +17806,7 @@
           <p:cNvPr id="203" name="Text 6">
             <a:extLst xmlns:a="http://schemas.openxmlformats.org/drawingml/2006/main">
               <a:ext uri="{FF2B5EF4-FFF2-40B4-BE49-F238E27FC236}">
-                <a16:creationId xmlns:a16="http://schemas.microsoft.com/office/drawing/2014/main" id="{22AF9A1F-1F15-4706-9484-C29D71A34B06}"/>
+                <a16:creationId xmlns:a16="http://schemas.microsoft.com/office/drawing/2014/main" id="{EC4D4A09-572A-4814-B34E-09D73222856B}"/>
               </a:ext>
             </a:extLst>
           </p:cNvPr>
@@ -15792,7 +17863,7 @@
                 <a:ea typeface="Arial"/>
                 <a:cs typeface="Arial"/>
               </a:rPr>
-              <a:t>BASELINE: c08-report-2026-10-30</a:t>
+              <a:t>BASELINE: c08-report-2026-10-30-v4</a:t>
             </a:r>
             <a:endParaRPr sz="1040" b="0" u="none" strike="noStrike">
               <a:solidFill>
@@ -15810,7 +17881,7 @@
           <p:cNvPr id="204" name="Text 7">
             <a:extLst xmlns:a="http://schemas.openxmlformats.org/drawingml/2006/main">
               <a:ext uri="{FF2B5EF4-FFF2-40B4-BE49-F238E27FC236}">
-                <a16:creationId xmlns:a16="http://schemas.microsoft.com/office/drawing/2014/main" id="{08E47CDD-1F1A-42F0-BDA4-A6AAFDECEFA1}"/>
+                <a16:creationId xmlns:a16="http://schemas.microsoft.com/office/drawing/2014/main" id="{7C4253DC-05E0-4401-AA23-86DAC67A6AAB}"/>
               </a:ext>
             </a:extLst>
           </p:cNvPr>
@@ -15885,7 +17956,7 @@
           <p:cNvPr id="205" name="Shape 8">
             <a:extLst xmlns:a="http://schemas.openxmlformats.org/drawingml/2006/main">
               <a:ext uri="{FF2B5EF4-FFF2-40B4-BE49-F238E27FC236}">
-                <a16:creationId xmlns:a16="http://schemas.microsoft.com/office/drawing/2014/main" id="{92B0BF45-97D9-46FE-ACC2-0A9D1AB6B122}"/>
+                <a16:creationId xmlns:a16="http://schemas.microsoft.com/office/drawing/2014/main" id="{20F70062-E280-4371-9871-1BCE61686A41}"/>
               </a:ext>
             </a:extLst>
           </p:cNvPr>
@@ -15937,7 +18008,7 @@
           <p:cNvPr id="206" name="Text 9">
             <a:extLst xmlns:a="http://schemas.openxmlformats.org/drawingml/2006/main">
               <a:ext uri="{FF2B5EF4-FFF2-40B4-BE49-F238E27FC236}">
-                <a16:creationId xmlns:a16="http://schemas.microsoft.com/office/drawing/2014/main" id="{EF21E0D6-FC36-498B-AEF2-D3BAFAC07E2F}"/>
+                <a16:creationId xmlns:a16="http://schemas.microsoft.com/office/drawing/2014/main" id="{6DE06F13-BF45-4D2A-B554-DA9A5412BBBA}"/>
               </a:ext>
             </a:extLst>
           </p:cNvPr>
@@ -15989,7 +18060,7 @@
                 <a:ea typeface="Arial"/>
                 <a:cs typeface="Arial"/>
               </a:rPr>
-              <a:t>SWI C08   Baseline: c08-report-2026-10-30   Stav k 30. 10. 2026</a:t>
+              <a:t>SWI C08   Baseline: c08-report-2026-10-30-v4   Stav k 30. 10. 2026</a:t>
             </a:r>
             <a:endParaRPr sz="880" b="0" u="none" strike="noStrike">
               <a:solidFill>
@@ -16007,7 +18078,7 @@
           <p:cNvPr id="207" name="Text 10">
             <a:extLst xmlns:a="http://schemas.openxmlformats.org/drawingml/2006/main">
               <a:ext uri="{FF2B5EF4-FFF2-40B4-BE49-F238E27FC236}">
-                <a16:creationId xmlns:a16="http://schemas.microsoft.com/office/drawing/2014/main" id="{51C8BF08-54B6-4830-B262-4737E218DB7B}"/>
+                <a16:creationId xmlns:a16="http://schemas.microsoft.com/office/drawing/2014/main" id="{F00C6169-FD19-43C1-BD0F-76FDBB33700D}"/>
               </a:ext>
             </a:extLst>
           </p:cNvPr>
@@ -16082,7 +18153,7 @@
           <p:cNvPr id="208" name="Text 11">
             <a:extLst xmlns:a="http://schemas.openxmlformats.org/drawingml/2006/main">
               <a:ext uri="{FF2B5EF4-FFF2-40B4-BE49-F238E27FC236}">
-                <a16:creationId xmlns:a16="http://schemas.microsoft.com/office/drawing/2014/main" id="{2278EA74-A421-47F5-91E9-42BEAAE2F8DC}"/>
+                <a16:creationId xmlns:a16="http://schemas.microsoft.com/office/drawing/2014/main" id="{DA3589BF-8A27-436D-A1A0-3A24C0646DC1}"/>
               </a:ext>
             </a:extLst>
           </p:cNvPr>
@@ -16121,49 +18192,94 @@
           </a:bodyPr>
           <a:lstStyle xmlns:a="http://schemas.openxmlformats.org/drawingml/2006/main"/>
           <a:p xmlns:a="http://schemas.openxmlformats.org/drawingml/2006/main">
-            <a:r>
-              <a:rPr u="none">
+            <a:pPr defTabSz="914400">
+              <a:lnSpc>
+                <a:spcPct val="100000"/>
+              </a:lnSpc>
+              <a:buNone/>
+              <a:tabLst>
+                <a:tab pos="0" algn="l"/>
+              </a:tabLst>
+            </a:pPr>
+            <a:r>
+              <a:rPr sz="1440" b="0" u="none" strike="noStrike">
                 <a:solidFill>
                   <a:srgbClr val="26354B"/>
                 </a:solidFill>
-                <a:hlinkClick xmlns:r="http://schemas.openxmlformats.org/officeDocument/2006/relationships" r:id="R042b6435d311460a"/>
+                <a:latin typeface="Arial"/>
+                <a:ea typeface="Arial"/>
+                <a:cs typeface="Arial"/>
               </a:rPr>
               <a:t>Create, Availability, Confirm/Approval a Cancel.</a:t>
             </a:r>
-            <a:br>
-              <a:rPr u="none">
+            <a:endParaRPr sz="1440" b="0" u="none" strike="noStrike">
+              <a:solidFill>
+                <a:srgbClr val="000000"/>
+              </a:solidFill>
+              <a:latin typeface="Arial"/>
+              <a:ea typeface="Arial"/>
+              <a:cs typeface="Arial"/>
+            </a:endParaRPr>
+          </a:p>
+          <a:p xmlns:a="http://schemas.openxmlformats.org/drawingml/2006/main">
+            <a:pPr defTabSz="914400">
+              <a:lnSpc>
+                <a:spcPct val="100000"/>
+              </a:lnSpc>
+              <a:buNone/>
+              <a:tabLst>
+                <a:tab pos="0" algn="l"/>
+              </a:tabLst>
+            </a:pPr>
+            <a:r>
+              <a:rPr sz="1440" b="0" u="none" strike="noStrike">
                 <a:solidFill>
                   <a:srgbClr val="26354B"/>
                 </a:solidFill>
-                <a:hlinkClick xmlns:r="http://schemas.openxmlformats.org/officeDocument/2006/relationships" r:id="R042b6435d311460a"/>
-              </a:rPr>
-            </a:br>
-            <a:r>
-              <a:rPr u="none">
+                <a:latin typeface="Arial"/>
+                <a:ea typeface="Arial"/>
+                <a:cs typeface="Arial"/>
+              </a:rPr>
+              <a:t>97 vybraných testů prošlo.</a:t>
+            </a:r>
+            <a:endParaRPr sz="1440" b="0" u="none" strike="noStrike">
+              <a:solidFill>
+                <a:srgbClr val="000000"/>
+              </a:solidFill>
+              <a:latin typeface="Arial"/>
+              <a:ea typeface="Arial"/>
+              <a:cs typeface="Arial"/>
+            </a:endParaRPr>
+          </a:p>
+          <a:p xmlns:a="http://schemas.openxmlformats.org/drawingml/2006/main">
+            <a:pPr defTabSz="914400">
+              <a:lnSpc>
+                <a:spcPct val="100000"/>
+              </a:lnSpc>
+              <a:buNone/>
+              <a:tabLst>
+                <a:tab pos="0" algn="l"/>
+              </a:tabLst>
+            </a:pPr>
+            <a:r>
+              <a:rPr sz="1440" b="0" u="none" strike="noStrike">
                 <a:solidFill>
                   <a:srgbClr val="26354B"/>
                 </a:solidFill>
-                <a:hlinkClick xmlns:r="http://schemas.openxmlformats.org/officeDocument/2006/relationships" r:id="R042b6435d311460a"/>
-              </a:rPr>
-              <a:t>97 vybraných testů prošlo.</a:t>
-            </a:r>
-            <a:br>
-              <a:rPr u="none">
-                <a:solidFill>
-                  <a:srgbClr val="26354B"/>
-                </a:solidFill>
-                <a:hlinkClick xmlns:r="http://schemas.openxmlformats.org/officeDocument/2006/relationships" r:id="R042b6435d311460a"/>
-              </a:rPr>
-            </a:br>
-            <a:r>
-              <a:rPr u="none">
-                <a:solidFill>
-                  <a:srgbClr val="26354B"/>
-                </a:solidFill>
-                <a:hlinkClick xmlns:r="http://schemas.openxmlformats.org/officeDocument/2006/relationships" r:id="R042b6435d311460a"/>
+                <a:latin typeface="Arial"/>
+                <a:ea typeface="Arial"/>
+                <a:cs typeface="Arial"/>
               </a:rPr>
               <a:t>Souběžné potvrzení přidělí učebnu jen jednou.</a:t>
             </a:r>
+            <a:endParaRPr sz="1440" b="0" u="none" strike="noStrike">
+              <a:solidFill>
+                <a:srgbClr val="000000"/>
+              </a:solidFill>
+              <a:latin typeface="Arial"/>
+              <a:ea typeface="Arial"/>
+              <a:cs typeface="Arial"/>
+            </a:endParaRPr>
           </a:p>
         </p:txBody>
       </p:sp>
@@ -16172,7 +18288,7 @@
           <p:cNvPr id="209" name="Text 12">
             <a:extLst xmlns:a="http://schemas.openxmlformats.org/drawingml/2006/main">
               <a:ext uri="{FF2B5EF4-FFF2-40B4-BE49-F238E27FC236}">
-                <a16:creationId xmlns:a16="http://schemas.microsoft.com/office/drawing/2014/main" id="{52D0AF46-C496-40B2-B7DD-F6EC140EFB52}"/>
+                <a16:creationId xmlns:a16="http://schemas.microsoft.com/office/drawing/2014/main" id="{342A9218-E25C-4110-8B24-1523D9CBD925}"/>
               </a:ext>
             </a:extLst>
           </p:cNvPr>
@@ -16229,7 +18345,7 @@
                 <a:ea typeface="Arial"/>
                 <a:cs typeface="Arial"/>
               </a:rPr>
-              <a:t>OTEVŘENÉ / NOT VERIFIED</a:t>
+              <a:t>OTEVŘENÝ NÁLEZ</a:t>
             </a:r>
             <a:endParaRPr sz="1060" b="0" u="none" strike="noStrike">
               <a:solidFill>
@@ -16247,7 +18363,7 @@
           <p:cNvPr id="210" name="Text 13">
             <a:extLst xmlns:a="http://schemas.openxmlformats.org/drawingml/2006/main">
               <a:ext uri="{FF2B5EF4-FFF2-40B4-BE49-F238E27FC236}">
-                <a16:creationId xmlns:a16="http://schemas.microsoft.com/office/drawing/2014/main" id="{6D3F597C-4A82-4990-BAB3-052F12A3312F}"/>
+                <a16:creationId xmlns:a16="http://schemas.microsoft.com/office/drawing/2014/main" id="{E3BA1615-52A3-4F50-85CA-F40B7219FD4D}"/>
               </a:ext>
             </a:extLst>
           </p:cNvPr>
@@ -16286,49 +18402,94 @@
           </a:bodyPr>
           <a:lstStyle xmlns:a="http://schemas.openxmlformats.org/drawingml/2006/main"/>
           <a:p xmlns:a="http://schemas.openxmlformats.org/drawingml/2006/main">
-            <a:r>
-              <a:rPr u="none">
+            <a:pPr defTabSz="914400">
+              <a:lnSpc>
+                <a:spcPct val="100000"/>
+              </a:lnSpc>
+              <a:buNone/>
+              <a:tabLst>
+                <a:tab pos="0" algn="l"/>
+              </a:tabLst>
+            </a:pPr>
+            <a:r>
+              <a:rPr sz="1440" b="0" u="none" strike="noStrike">
                 <a:solidFill>
                   <a:srgbClr val="26354B"/>
                 </a:solidFill>
-                <a:hlinkClick xmlns:r="http://schemas.openxmlformats.org/officeDocument/2006/relationships" r:id="R8b264ea16dc245b2"/>
-              </a:rPr>
-              <a:t>F1 ACCEPTED / OPEN: chybí řetězec C04.</a:t>
-            </a:r>
-            <a:br>
-              <a:rPr u="none">
+                <a:latin typeface="Arial"/>
+                <a:ea typeface="Arial"/>
+                <a:cs typeface="Arial"/>
+              </a:rPr>
+              <a:t>F1 ACCEPTED / OPEN</a:t>
+            </a:r>
+            <a:endParaRPr sz="1440" b="0" u="none" strike="noStrike">
+              <a:solidFill>
+                <a:srgbClr val="000000"/>
+              </a:solidFill>
+              <a:latin typeface="Arial"/>
+              <a:ea typeface="Arial"/>
+              <a:cs typeface="Arial"/>
+            </a:endParaRPr>
+          </a:p>
+          <a:p xmlns:a="http://schemas.openxmlformats.org/drawingml/2006/main">
+            <a:pPr defTabSz="914400">
+              <a:lnSpc>
+                <a:spcPct val="100000"/>
+              </a:lnSpc>
+              <a:buNone/>
+              <a:tabLst>
+                <a:tab pos="0" algn="l"/>
+              </a:tabLst>
+            </a:pPr>
+            <a:r>
+              <a:rPr sz="1440" b="0" u="none" strike="noStrike">
                 <a:solidFill>
                   <a:srgbClr val="26354B"/>
                 </a:solidFill>
-                <a:hlinkClick xmlns:r="http://schemas.openxmlformats.org/officeDocument/2006/relationships" r:id="R8b264ea16dc245b2"/>
-              </a:rPr>
-            </a:br>
-            <a:r>
-              <a:rPr u="none">
+                <a:latin typeface="Arial"/>
+                <a:ea typeface="Arial"/>
+                <a:cs typeface="Arial"/>
+              </a:rPr>
+              <a:t>Chybí úplný řetězec C04:</a:t>
+            </a:r>
+            <a:endParaRPr sz="1440" b="0" u="none" strike="noStrike">
+              <a:solidFill>
+                <a:srgbClr val="000000"/>
+              </a:solidFill>
+              <a:latin typeface="Arial"/>
+              <a:ea typeface="Arial"/>
+              <a:cs typeface="Arial"/>
+            </a:endParaRPr>
+          </a:p>
+          <a:p xmlns:a="http://schemas.openxmlformats.org/drawingml/2006/main">
+            <a:pPr defTabSz="914400">
+              <a:lnSpc>
+                <a:spcPct val="100000"/>
+              </a:lnSpc>
+              <a:buNone/>
+              <a:tabLst>
+                <a:tab pos="0" algn="l"/>
+              </a:tabLst>
+            </a:pPr>
+            <a:r>
+              <a:rPr sz="1440" b="0" u="none" strike="noStrike">
                 <a:solidFill>
                   <a:srgbClr val="26354B"/>
                 </a:solidFill>
-                <a:hlinkClick xmlns:r="http://schemas.openxmlformats.org/officeDocument/2006/relationships" r:id="R8b264ea16dc245b2"/>
-              </a:rPr>
-              <a:t>Kontrola dokumentace a zastoupení nejsou doložené.</a:t>
-            </a:r>
-            <a:br>
-              <a:rPr u="none">
-                <a:solidFill>
-                  <a:srgbClr val="26354B"/>
-                </a:solidFill>
-                <a:hlinkClick xmlns:r="http://schemas.openxmlformats.org/officeDocument/2006/relationships" r:id="R8b264ea16dc245b2"/>
-              </a:rPr>
-            </a:br>
-            <a:r>
-              <a:rPr u="none">
-                <a:solidFill>
-                  <a:srgbClr val="26354B"/>
-                </a:solidFill>
-                <a:hlinkClick xmlns:r="http://schemas.openxmlformats.org/officeDocument/2006/relationships" r:id="R8b264ea16dc245b2"/>
-              </a:rPr>
-              <a:t>Kapacity a termín obhajoby nejsou potvrzené.</a:t>
-            </a:r>
+                <a:latin typeface="Arial"/>
+                <a:ea typeface="Arial"/>
+                <a:cs typeface="Arial"/>
+              </a:rPr>
+              <a:t>Quality Concern, Criterion, Measurement, Decision.</a:t>
+            </a:r>
+            <a:endParaRPr sz="1440" b="0" u="none" strike="noStrike">
+              <a:solidFill>
+                <a:srgbClr val="000000"/>
+              </a:solidFill>
+              <a:latin typeface="Arial"/>
+              <a:ea typeface="Arial"/>
+              <a:cs typeface="Arial"/>
+            </a:endParaRPr>
           </a:p>
         </p:txBody>
       </p:sp>
@@ -16337,7 +18498,7 @@
           <p:cNvPr id="211" name="Text 14">
             <a:extLst xmlns:a="http://schemas.openxmlformats.org/drawingml/2006/main">
               <a:ext uri="{FF2B5EF4-FFF2-40B4-BE49-F238E27FC236}">
-                <a16:creationId xmlns:a16="http://schemas.microsoft.com/office/drawing/2014/main" id="{3FF8ABA0-ABA8-4040-A546-C876E5F41899}"/>
+                <a16:creationId xmlns:a16="http://schemas.microsoft.com/office/drawing/2014/main" id="{7D7C6257-5BD1-4785-A01E-1B397D56DAC5}"/>
               </a:ext>
             </a:extLst>
           </p:cNvPr>
@@ -16412,7 +18573,7 @@
           <p:cNvPr id="212" name="Text 15">
             <a:extLst xmlns:a="http://schemas.openxmlformats.org/drawingml/2006/main">
               <a:ext uri="{FF2B5EF4-FFF2-40B4-BE49-F238E27FC236}">
-                <a16:creationId xmlns:a16="http://schemas.microsoft.com/office/drawing/2014/main" id="{CFC9AB54-8CB1-4351-81BD-74F5F5DC88EF}"/>
+                <a16:creationId xmlns:a16="http://schemas.microsoft.com/office/drawing/2014/main" id="{B156380B-8A0A-42AB-93A1-6034E5F23633}"/>
               </a:ext>
             </a:extLst>
           </p:cNvPr>
@@ -16451,49 +18612,94 @@
           </a:bodyPr>
           <a:lstStyle xmlns:a="http://schemas.openxmlformats.org/drawingml/2006/main"/>
           <a:p xmlns:a="http://schemas.openxmlformats.org/drawingml/2006/main">
-            <a:r>
-              <a:rPr u="none">
+            <a:pPr defTabSz="914400">
+              <a:lnSpc>
+                <a:spcPct val="100000"/>
+              </a:lnSpc>
+              <a:buNone/>
+              <a:tabLst>
+                <a:tab pos="0" algn="l"/>
+              </a:tabLst>
+            </a:pPr>
+            <a:r>
+              <a:rPr sz="1390" b="0" u="none" strike="noStrike">
                 <a:solidFill>
                   <a:srgbClr val="26354B"/>
                 </a:solidFill>
-                <a:hlinkClick xmlns:r="http://schemas.openxmlformats.org/officeDocument/2006/relationships" r:id="R9eab76730c6b43bd"/>
+                <a:latin typeface="Arial"/>
+                <a:ea typeface="Arial"/>
+                <a:cs typeface="Arial"/>
               </a:rPr>
               <a:t>R-03: dvojí přidělení učebny.</a:t>
             </a:r>
-            <a:br>
-              <a:rPr u="none">
+            <a:endParaRPr sz="1390" b="0" u="none" strike="noStrike">
+              <a:solidFill>
+                <a:srgbClr val="000000"/>
+              </a:solidFill>
+              <a:latin typeface="Arial"/>
+              <a:ea typeface="Arial"/>
+              <a:cs typeface="Arial"/>
+            </a:endParaRPr>
+          </a:p>
+          <a:p xmlns:a="http://schemas.openxmlformats.org/drawingml/2006/main">
+            <a:pPr defTabSz="914400">
+              <a:lnSpc>
+                <a:spcPct val="100000"/>
+              </a:lnSpc>
+              <a:buNone/>
+              <a:tabLst>
+                <a:tab pos="0" algn="l"/>
+              </a:tabLst>
+            </a:pPr>
+            <a:r>
+              <a:rPr sz="1390" b="0" u="none" strike="noStrike">
                 <a:solidFill>
                   <a:srgbClr val="26354B"/>
                 </a:solidFill>
-                <a:hlinkClick xmlns:r="http://schemas.openxmlformats.org/officeDocument/2006/relationships" r:id="R9eab76730c6b43bd"/>
-              </a:rPr>
-            </a:br>
-            <a:r>
-              <a:rPr u="none">
+                <a:latin typeface="Arial"/>
+                <a:ea typeface="Arial"/>
+                <a:cs typeface="Arial"/>
+              </a:rPr>
+              <a:t>Jakub: DB ochrana a souběžné testy VERIFIED.</a:t>
+            </a:r>
+            <a:endParaRPr sz="1390" b="0" u="none" strike="noStrike">
+              <a:solidFill>
+                <a:srgbClr val="000000"/>
+              </a:solidFill>
+              <a:latin typeface="Arial"/>
+              <a:ea typeface="Arial"/>
+              <a:cs typeface="Arial"/>
+            </a:endParaRPr>
+          </a:p>
+          <a:p xmlns:a="http://schemas.openxmlformats.org/drawingml/2006/main">
+            <a:pPr defTabSz="914400">
+              <a:lnSpc>
+                <a:spcPct val="100000"/>
+              </a:lnSpc>
+              <a:buNone/>
+              <a:tabLst>
+                <a:tab pos="0" algn="l"/>
+              </a:tabLst>
+            </a:pPr>
+            <a:r>
+              <a:rPr sz="1390" b="0" u="none" strike="noStrike">
                 <a:solidFill>
                   <a:srgbClr val="26354B"/>
                 </a:solidFill>
-                <a:hlinkClick xmlns:r="http://schemas.openxmlformats.org/officeDocument/2006/relationships" r:id="R9eab76730c6b43bd"/>
-              </a:rPr>
-              <a:t>Jakub: DB ochrana a souběžné testy VERIFIED.</a:t>
-            </a:r>
-            <a:br>
-              <a:rPr u="none">
-                <a:solidFill>
-                  <a:srgbClr val="26354B"/>
-                </a:solidFill>
-                <a:hlinkClick xmlns:r="http://schemas.openxmlformats.org/officeDocument/2006/relationships" r:id="R9eab76730c6b43bd"/>
-              </a:rPr>
-            </a:br>
-            <a:r>
-              <a:rPr u="none">
-                <a:solidFill>
-                  <a:srgbClr val="26354B"/>
-                </a:solidFill>
-                <a:hlinkClick xmlns:r="http://schemas.openxmlformats.org/officeDocument/2006/relationships" r:id="R9eab76730c6b43bd"/>
+                <a:latin typeface="Arial"/>
+                <a:ea typeface="Arial"/>
+                <a:cs typeface="Arial"/>
               </a:rPr>
               <a:t>Skutečné zbytkové riziko MEDIUM (3), přijato.</a:t>
             </a:r>
+            <a:endParaRPr sz="1390" b="0" u="none" strike="noStrike">
+              <a:solidFill>
+                <a:srgbClr val="000000"/>
+              </a:solidFill>
+              <a:latin typeface="Arial"/>
+              <a:ea typeface="Arial"/>
+              <a:cs typeface="Arial"/>
+            </a:endParaRPr>
           </a:p>
         </p:txBody>
       </p:sp>
@@ -16502,7 +18708,7 @@
           <p:cNvPr id="213" name="Text 16">
             <a:extLst xmlns:a="http://schemas.openxmlformats.org/drawingml/2006/main">
               <a:ext uri="{FF2B5EF4-FFF2-40B4-BE49-F238E27FC236}">
-                <a16:creationId xmlns:a16="http://schemas.microsoft.com/office/drawing/2014/main" id="{1F23D352-D339-471F-AEC0-625972BE4427}"/>
+                <a16:creationId xmlns:a16="http://schemas.microsoft.com/office/drawing/2014/main" id="{77D28A54-D825-4A64-8A64-CC7D3B0FEE3F}"/>
               </a:ext>
             </a:extLst>
           </p:cNvPr>
@@ -16577,7 +18783,7 @@
           <p:cNvPr id="214" name="Text 17">
             <a:extLst xmlns:a="http://schemas.openxmlformats.org/drawingml/2006/main">
               <a:ext uri="{FF2B5EF4-FFF2-40B4-BE49-F238E27FC236}">
-                <a16:creationId xmlns:a16="http://schemas.microsoft.com/office/drawing/2014/main" id="{B1940DBE-ED6D-41BA-8745-769BF4AC5658}"/>
+                <a16:creationId xmlns:a16="http://schemas.microsoft.com/office/drawing/2014/main" id="{9587AC4D-0E1C-49EA-A290-2073EC4F8FDA}"/>
               </a:ext>
             </a:extLst>
           </p:cNvPr>
@@ -16616,32 +18822,64 @@
           </a:bodyPr>
           <a:lstStyle xmlns:a="http://schemas.openxmlformats.org/drawingml/2006/main"/>
           <a:p xmlns:a="http://schemas.openxmlformats.org/drawingml/2006/main">
-            <a:r>
-              <a:rPr u="none">
+            <a:pPr defTabSz="914400">
+              <a:lnSpc>
+                <a:spcPct val="100000"/>
+              </a:lnSpc>
+              <a:buNone/>
+              <a:tabLst>
+                <a:tab pos="0" algn="l"/>
+              </a:tabLst>
+            </a:pPr>
+            <a:r>
+              <a:rPr sz="1390" b="0" u="none" strike="noStrike">
                 <a:solidFill>
                   <a:srgbClr val="26354B"/>
                 </a:solidFill>
-                <a:hlinkClick xmlns:r="http://schemas.openxmlformats.org/officeDocument/2006/relationships" r:id="R936e1e9007f84550"/>
-              </a:rPr>
-              <a:t>Potvrdit zbývající plán, kapacity a vlastníka C04.</a:t>
-            </a:r>
-            <a:br>
-              <a:rPr u="none">
+                <a:latin typeface="Arial"/>
+                <a:ea typeface="Arial"/>
+                <a:cs typeface="Arial"/>
+              </a:rPr>
+              <a:t>Doplnit C04 a doložit uzavření F1.</a:t>
+            </a:r>
+            <a:endParaRPr sz="1390" b="0" u="none" strike="noStrike">
+              <a:solidFill>
+                <a:srgbClr val="000000"/>
+              </a:solidFill>
+              <a:latin typeface="Arial"/>
+              <a:ea typeface="Arial"/>
+              <a:cs typeface="Arial"/>
+            </a:endParaRPr>
+          </a:p>
+          <a:p xmlns:a="http://schemas.openxmlformats.org/drawingml/2006/main">
+            <a:pPr defTabSz="914400">
+              <a:lnSpc>
+                <a:spcPct val="100000"/>
+              </a:lnSpc>
+              <a:buNone/>
+              <a:tabLst>
+                <a:tab pos="0" algn="l"/>
+              </a:tabLst>
+            </a:pPr>
+            <a:r>
+              <a:rPr sz="1390" b="0" u="none" strike="noStrike">
                 <a:solidFill>
                   <a:srgbClr val="26354B"/>
                 </a:solidFill>
-                <a:hlinkClick xmlns:r="http://schemas.openxmlformats.org/officeDocument/2006/relationships" r:id="R936e1e9007f84550"/>
-              </a:rPr>
-            </a:br>
-            <a:r>
-              <a:rPr u="none">
-                <a:solidFill>
-                  <a:srgbClr val="26354B"/>
-                </a:solidFill>
-                <a:hlinkClick xmlns:r="http://schemas.openxmlformats.org/officeDocument/2006/relationships" r:id="R936e1e9007f84550"/>
-              </a:rPr>
-              <a:t>Koordinuje Kryštof Lalošák do 2. 11. 2026.</a:t>
-            </a:r>
+                <a:latin typeface="Arial"/>
+                <a:ea typeface="Arial"/>
+                <a:cs typeface="Arial"/>
+              </a:rPr>
+              <a:t>Dostupný čas ani termín dokončení zatím tým nezná.</a:t>
+            </a:r>
+            <a:endParaRPr sz="1390" b="0" u="none" strike="noStrike">
+              <a:solidFill>
+                <a:srgbClr val="000000"/>
+              </a:solidFill>
+              <a:latin typeface="Arial"/>
+              <a:ea typeface="Arial"/>
+              <a:cs typeface="Arial"/>
+            </a:endParaRPr>
           </a:p>
         </p:txBody>
       </p:sp>
@@ -16650,7 +18888,7 @@
           <p:cNvPr id="215" name="Text 18">
             <a:extLst xmlns:a="http://schemas.openxmlformats.org/drawingml/2006/main">
               <a:ext uri="{FF2B5EF4-FFF2-40B4-BE49-F238E27FC236}">
-                <a16:creationId xmlns:a16="http://schemas.microsoft.com/office/drawing/2014/main" id="{AD478D2F-3551-4D5F-A82E-D6584C6A57D2}"/>
+                <a16:creationId xmlns:a16="http://schemas.microsoft.com/office/drawing/2014/main" id="{14B6A121-E7EE-4480-9CCE-6C6D4B9B1532}"/>
               </a:ext>
             </a:extLst>
           </p:cNvPr>
@@ -16725,7 +18963,7 @@
           <p:cNvPr id="216" name="Text 19">
             <a:extLst xmlns:a="http://schemas.openxmlformats.org/drawingml/2006/main">
               <a:ext uri="{FF2B5EF4-FFF2-40B4-BE49-F238E27FC236}">
-                <a16:creationId xmlns:a16="http://schemas.microsoft.com/office/drawing/2014/main" id="{625F875D-CC64-4203-BADF-C198534A2323}"/>
+                <a16:creationId xmlns:a16="http://schemas.microsoft.com/office/drawing/2014/main" id="{57310C74-5BF9-4550-9C75-2D399AFCADED}"/>
               </a:ext>
             </a:extLst>
           </p:cNvPr>
@@ -16764,39 +19002,71 @@
           </a:bodyPr>
           <a:lstStyle xmlns:a="http://schemas.openxmlformats.org/drawingml/2006/main"/>
           <a:p xmlns:a="http://schemas.openxmlformats.org/drawingml/2006/main">
-            <a:r>
-              <a:rPr u="none">
+            <a:pPr defTabSz="914400">
+              <a:lnSpc>
+                <a:spcPct val="100000"/>
+              </a:lnSpc>
+              <a:buNone/>
+              <a:tabLst>
+                <a:tab pos="0" algn="l"/>
+              </a:tabLst>
+            </a:pPr>
+            <a:r>
+              <a:rPr sz="1600" b="0" u="none" strike="noStrike">
                 <a:solidFill>
                   <a:srgbClr val="26354B"/>
                 </a:solidFill>
-                <a:hlinkClick xmlns:r="http://schemas.openxmlformats.org/officeDocument/2006/relationships" r:id="R45e08289d0794e8c"/>
-              </a:rPr>
-              <a:t>AMBER / AT RISK. Podklady A/B a funkční ověření jsou připravené.</a:t>
-            </a:r>
-            <a:br>
-              <a:rPr u="none">
+                <a:latin typeface="Arial"/>
+                <a:ea typeface="Arial"/>
+                <a:cs typeface="Arial"/>
+              </a:rPr>
+              <a:t>AMBER / AT RISK kvůli otevřenému C04.</a:t>
+            </a:r>
+            <a:endParaRPr sz="1600" b="0" u="none" strike="noStrike">
+              <a:solidFill>
+                <a:srgbClr val="000000"/>
+              </a:solidFill>
+              <a:latin typeface="Arial"/>
+              <a:ea typeface="Arial"/>
+              <a:cs typeface="Arial"/>
+            </a:endParaRPr>
+          </a:p>
+          <a:p xmlns:a="http://schemas.openxmlformats.org/drawingml/2006/main">
+            <a:pPr defTabSz="914400">
+              <a:lnSpc>
+                <a:spcPct val="100000"/>
+              </a:lnSpc>
+              <a:buNone/>
+              <a:tabLst>
+                <a:tab pos="0" algn="l"/>
+              </a:tabLst>
+            </a:pPr>
+            <a:r>
+              <a:rPr sz="1600" b="0" u="none" strike="noStrike">
                 <a:solidFill>
                   <a:srgbClr val="26354B"/>
                 </a:solidFill>
-                <a:hlinkClick xmlns:r="http://schemas.openxmlformats.org/officeDocument/2006/relationships" r:id="R45e08289d0794e8c"/>
-              </a:rPr>
-            </a:br>
-            <a:r>
-              <a:rPr u="none">
-                <a:solidFill>
-                  <a:srgbClr val="26354B"/>
-                </a:solidFill>
-                <a:hlinkClick xmlns:r="http://schemas.openxmlformats.org/officeDocument/2006/relationships" r:id="R45e08289d0794e8c"/>
-              </a:rPr>
-              <a:t>Cíl nácviku: 2. 11. 2026. Závazný odhad dokončení závisí na potvrzení kapacit a plánu C04.</a:t>
-            </a:r>
+                <a:latin typeface="Arial"/>
+                <a:ea typeface="Arial"/>
+                <a:cs typeface="Arial"/>
+              </a:rPr>
+              <a:t>A, B a 97 úspěšných vybraných testů jsou doložené. Termín dokončení C04 zatím není stanovený.</a:t>
+            </a:r>
+            <a:endParaRPr sz="1600" b="0" u="none" strike="noStrike">
+              <a:solidFill>
+                <a:srgbClr val="000000"/>
+              </a:solidFill>
+              <a:latin typeface="Arial"/>
+              <a:ea typeface="Arial"/>
+              <a:cs typeface="Arial"/>
+            </a:endParaRPr>
           </a:p>
         </p:txBody>
       </p:sp>
     </p:spTree>
     <p:extLst>
       <p:ext uri="{BB962C8B-B14F-4D97-AF65-F5344CB8AC3E}">
-        <p14:creationId xmlns:p14="http://schemas.microsoft.com/office/powerpoint/2010/main" val="99879285"/>
+        <p14:creationId xmlns:p14="http://schemas.microsoft.com/office/powerpoint/2010/main" val="1261221804"/>
       </p:ext>
     </p:extLst>
   </p:cSld>
